--- a/ulesie_sebastien_2_presentation_082026 (1).pptx
+++ b/ulesie_sebastien_2_presentation_082026 (1).pptx
@@ -5,10 +5,10 @@
     <p:sldMasterId id="2147483712" r:id="rId1"/>
   </p:sldMasterIdLst>
   <p:notesMasterIdLst>
-    <p:notesMasterId r:id="rId30"/>
+    <p:notesMasterId r:id="rId29"/>
   </p:notesMasterIdLst>
   <p:handoutMasterIdLst>
-    <p:handoutMasterId r:id="rId31"/>
+    <p:handoutMasterId r:id="rId30"/>
   </p:handoutMasterIdLst>
   <p:sldIdLst>
     <p:sldId id="257" r:id="rId2"/>
@@ -26,8 +26,8 @@
     <p:sldId id="347" r:id="rId14"/>
     <p:sldId id="358" r:id="rId15"/>
     <p:sldId id="357" r:id="rId16"/>
-    <p:sldId id="359" r:id="rId17"/>
-    <p:sldId id="362" r:id="rId18"/>
+    <p:sldId id="368" r:id="rId17"/>
+    <p:sldId id="359" r:id="rId18"/>
     <p:sldId id="360" r:id="rId19"/>
     <p:sldId id="348" r:id="rId20"/>
     <p:sldId id="349" r:id="rId21"/>
@@ -37,8 +37,7 @@
     <p:sldId id="365" r:id="rId25"/>
     <p:sldId id="366" r:id="rId26"/>
     <p:sldId id="282" r:id="rId27"/>
-    <p:sldId id="367" r:id="rId28"/>
-    <p:sldId id="299" r:id="rId29"/>
+    <p:sldId id="299" r:id="rId28"/>
   </p:sldIdLst>
   <p:sldSz cx="12192000" cy="6858000"/>
   <p:notesSz cx="6858000" cy="9144000"/>
@@ -6775,7 +6774,7 @@
             <a:pPr rtl="0"/>
             <a:fld id="{2FC74BDE-6627-49B6-90F1-0334E723F64C}" type="datetime1">
               <a:rPr lang="fr-FR" smtClean="0"/>
-              <a:t>21/08/2026</a:t>
+              <a:t>25/08/2026</a:t>
             </a:fld>
             <a:endParaRPr lang="en-US" dirty="0"/>
           </a:p>
@@ -6945,7 +6944,7 @@
             <a:pPr rtl="0"/>
             <a:fld id="{F28DAF60-E56A-4648-8936-22D801672B6C}" type="datetime1">
               <a:rPr lang="fr-FR" smtClean="0"/>
-              <a:t>21/08/2026</a:t>
+              <a:t>25/08/2026</a:t>
             </a:fld>
             <a:endParaRPr lang="en-US"/>
           </a:p>
@@ -7466,7 +7465,7 @@
             <a:pPr rtl="0"/>
             <a:fld id="{E641DF6C-ECED-4BD8-8025-73323DD5D35C}" type="datetime1">
               <a:rPr lang="fr-FR" smtClean="0"/>
-              <a:t>21/08/2026</a:t>
+              <a:t>25/08/2026</a:t>
             </a:fld>
             <a:endParaRPr lang="en-US" dirty="0"/>
           </a:p>
@@ -7673,7 +7672,7 @@
             <a:pPr rtl="0"/>
             <a:fld id="{1E5B03D9-FC89-4784-BD60-336471BA7724}" type="datetime1">
               <a:rPr lang="fr-FR" smtClean="0"/>
-              <a:t>21/08/2026</a:t>
+              <a:t>25/08/2026</a:t>
             </a:fld>
             <a:endParaRPr lang="en-US" dirty="0"/>
           </a:p>
@@ -8067,7 +8066,7 @@
             <a:pPr rtl="0"/>
             <a:fld id="{D0216CB3-B929-446C-876F-83C9B86D9FDE}" type="datetime1">
               <a:rPr lang="fr-FR" smtClean="0"/>
-              <a:t>21/08/2026</a:t>
+              <a:t>25/08/2026</a:t>
             </a:fld>
             <a:endParaRPr lang="en-US" dirty="0"/>
           </a:p>
@@ -8269,7 +8268,7 @@
             <a:pPr rtl="0"/>
             <a:fld id="{22897033-9A55-4DAC-991D-1FF1921C78B7}" type="datetime1">
               <a:rPr lang="fr-FR" smtClean="0"/>
-              <a:t>21/08/2026</a:t>
+              <a:t>25/08/2026</a:t>
             </a:fld>
             <a:endParaRPr lang="en-US" dirty="0"/>
           </a:p>
@@ -8592,7 +8591,7 @@
             <a:pPr rtl="0"/>
             <a:fld id="{A1255F31-5DB3-4925-BA87-822F5B17A2F1}" type="datetime1">
               <a:rPr lang="fr-FR" smtClean="0"/>
-              <a:t>21/08/2026</a:t>
+              <a:t>25/08/2026</a:t>
             </a:fld>
             <a:endParaRPr lang="en-US" dirty="0"/>
           </a:p>
@@ -8849,7 +8848,7 @@
             <a:pPr rtl="0"/>
             <a:fld id="{7E4EF44C-5F50-4A80-A957-57B3338337C0}" type="datetime1">
               <a:rPr lang="fr-FR" smtClean="0"/>
-              <a:t>21/08/2026</a:t>
+              <a:t>25/08/2026</a:t>
             </a:fld>
             <a:endParaRPr lang="en-US" dirty="0"/>
           </a:p>
@@ -9275,7 +9274,7 @@
             <a:pPr rtl="0"/>
             <a:fld id="{B2D0F46D-59FD-4484-924E-E79DD516B5ED}" type="datetime1">
               <a:rPr lang="fr-FR" smtClean="0"/>
-              <a:t>21/08/2026</a:t>
+              <a:t>25/08/2026</a:t>
             </a:fld>
             <a:endParaRPr lang="en-US" dirty="0"/>
           </a:p>
@@ -9402,7 +9401,7 @@
             <a:pPr rtl="0"/>
             <a:fld id="{0FAEC910-4AAA-42A1-A49C-7DDC64BC53C6}" type="datetime1">
               <a:rPr lang="fr-FR" smtClean="0"/>
-              <a:t>21/08/2026</a:t>
+              <a:t>25/08/2026</a:t>
             </a:fld>
             <a:endParaRPr lang="en-US" dirty="0"/>
           </a:p>
@@ -9500,7 +9499,7 @@
             <a:pPr rtl="0"/>
             <a:fld id="{ACEC98BE-FCE2-445F-8146-3A7F8CC3881D}" type="datetime1">
               <a:rPr lang="fr-FR" smtClean="0"/>
-              <a:t>21/08/2026</a:t>
+              <a:t>25/08/2026</a:t>
             </a:fld>
             <a:endParaRPr lang="en-US" dirty="0"/>
           </a:p>
@@ -9888,7 +9887,7 @@
             <a:pPr rtl="0"/>
             <a:fld id="{6D0953DD-A6BD-427D-B7A8-BDE378B2E678}" type="datetime1">
               <a:rPr lang="fr-FR" smtClean="0"/>
-              <a:t>21/08/2026</a:t>
+              <a:t>25/08/2026</a:t>
             </a:fld>
             <a:endParaRPr lang="en-US" dirty="0"/>
           </a:p>
@@ -10186,7 +10185,7 @@
             <a:pPr rtl="0"/>
             <a:fld id="{47E77B56-6788-4F40-A65E-12AFEB3AC095}" type="datetime1">
               <a:rPr lang="fr-FR" smtClean="0"/>
-              <a:t>21/08/2026</a:t>
+              <a:t>25/08/2026</a:t>
             </a:fld>
             <a:endParaRPr lang="en-US" dirty="0"/>
           </a:p>
@@ -10404,7 +10403,7 @@
             <a:pPr rtl="0"/>
             <a:fld id="{E69A0D1A-B1A6-4A33-B3AE-513EF3B4A7E7}" type="datetime1">
               <a:rPr lang="fr-FR" smtClean="0"/>
-              <a:t>21/08/2026</a:t>
+              <a:t>25/08/2026</a:t>
             </a:fld>
             <a:endParaRPr lang="en-US" dirty="0"/>
           </a:p>
@@ -11828,7 +11827,7 @@
             <a:pPr rtl="0"/>
             <a:fld id="{22897033-9A55-4DAC-991D-1FF1921C78B7}" type="datetime1">
               <a:rPr lang="fr-FR" smtClean="0"/>
-              <a:t>21/08/2026</a:t>
+              <a:t>25/08/2026</a:t>
             </a:fld>
             <a:endParaRPr lang="en-US" dirty="0"/>
           </a:p>
@@ -12428,7 +12427,7 @@
             <a:pPr rtl="0"/>
             <a:fld id="{22897033-9A55-4DAC-991D-1FF1921C78B7}" type="datetime1">
               <a:rPr lang="fr-FR" smtClean="0"/>
-              <a:t>21/08/2026</a:t>
+              <a:t>25/08/2026</a:t>
             </a:fld>
             <a:endParaRPr lang="en-US" dirty="0"/>
           </a:p>
@@ -12924,7 +12923,7 @@
             <a:pPr rtl="0"/>
             <a:fld id="{22897033-9A55-4DAC-991D-1FF1921C78B7}" type="datetime1">
               <a:rPr lang="fr-FR" smtClean="0"/>
-              <a:t>21/08/2026</a:t>
+              <a:t>25/08/2026</a:t>
             </a:fld>
             <a:endParaRPr lang="en-US" dirty="0"/>
           </a:p>
@@ -13725,7 +13724,7 @@
             <a:pPr rtl="0"/>
             <a:fld id="{22897033-9A55-4DAC-991D-1FF1921C78B7}" type="datetime1">
               <a:rPr lang="fr-FR" smtClean="0"/>
-              <a:t>21/08/2026</a:t>
+              <a:t>25/08/2026</a:t>
             </a:fld>
             <a:endParaRPr lang="en-US" dirty="0"/>
           </a:p>
@@ -13959,7 +13958,7 @@
             <a:pPr rtl="0"/>
             <a:fld id="{22897033-9A55-4DAC-991D-1FF1921C78B7}" type="datetime1">
               <a:rPr lang="fr-FR" smtClean="0"/>
-              <a:t>21/08/2026</a:t>
+              <a:t>25/08/2026</a:t>
             </a:fld>
             <a:endParaRPr lang="en-US" dirty="0"/>
           </a:p>
@@ -14147,7 +14146,11 @@
             <p:ph type="title"/>
           </p:nvPr>
         </p:nvSpPr>
-        <p:spPr/>
+        <p:spPr>
+          <a:ln>
+            <a:noFill/>
+          </a:ln>
+        </p:spPr>
         <p:txBody>
           <a:bodyPr/>
           <a:lstStyle/>
@@ -14278,7 +14281,7 @@
             <a:pPr rtl="0"/>
             <a:fld id="{22897033-9A55-4DAC-991D-1FF1921C78B7}" type="datetime1">
               <a:rPr lang="fr-FR" smtClean="0"/>
-              <a:t>21/08/2026</a:t>
+              <a:t>25/08/2026</a:t>
             </a:fld>
             <a:endParaRPr lang="en-US" dirty="0"/>
           </a:p>
@@ -15604,6 +15607,194 @@
   <p:cSld>
     <p:spTree>
       <p:nvGrpSpPr>
+        <p:cNvPr id="1" name="">
+          <a:extLst>
+            <a:ext uri="{FF2B5EF4-FFF2-40B4-BE49-F238E27FC236}">
+              <a16:creationId xmlns:a16="http://schemas.microsoft.com/office/drawing/2014/main" id="{1A8B211C-47F9-6E59-589A-FFCF4FE30847}"/>
+            </a:ext>
+          </a:extLst>
+        </p:cNvPr>
+        <p:cNvGrpSpPr/>
+        <p:nvPr/>
+      </p:nvGrpSpPr>
+      <p:grpSpPr>
+        <a:xfrm>
+          <a:off x="0" y="0"/>
+          <a:ext cx="0" cy="0"/>
+          <a:chOff x="0" y="0"/>
+          <a:chExt cx="0" cy="0"/>
+        </a:xfrm>
+      </p:grpSpPr>
+      <p:sp>
+        <p:nvSpPr>
+          <p:cNvPr id="2" name="Titre 1">
+            <a:extLst>
+              <a:ext uri="{FF2B5EF4-FFF2-40B4-BE49-F238E27FC236}">
+                <a16:creationId xmlns:a16="http://schemas.microsoft.com/office/drawing/2014/main" id="{E102BBED-3987-1BEB-699F-8E46FC3C5178}"/>
+              </a:ext>
+            </a:extLst>
+          </p:cNvPr>
+          <p:cNvSpPr>
+            <a:spLocks noGrp="1"/>
+          </p:cNvSpPr>
+          <p:nvPr>
+            <p:ph type="title"/>
+          </p:nvPr>
+        </p:nvSpPr>
+        <p:spPr/>
+        <p:txBody>
+          <a:bodyPr/>
+          <a:lstStyle/>
+          <a:p>
+            <a:r>
+              <a:rPr lang="fr-FR" dirty="0"/>
+              <a:t>6. Mise en place DBT</a:t>
+            </a:r>
+            <a:br>
+              <a:rPr lang="fr-FR" dirty="0"/>
+            </a:br>
+            <a:endParaRPr lang="fr-FR" dirty="0"/>
+          </a:p>
+        </p:txBody>
+      </p:sp>
+      <p:sp>
+        <p:nvSpPr>
+          <p:cNvPr id="3" name="Espace réservé du contenu 2">
+            <a:extLst>
+              <a:ext uri="{FF2B5EF4-FFF2-40B4-BE49-F238E27FC236}">
+                <a16:creationId xmlns:a16="http://schemas.microsoft.com/office/drawing/2014/main" id="{DAF1EB3C-C2A0-AB99-EF72-61D343ED2C5C}"/>
+              </a:ext>
+            </a:extLst>
+          </p:cNvPr>
+          <p:cNvSpPr>
+            <a:spLocks noGrp="1"/>
+          </p:cNvSpPr>
+          <p:nvPr>
+            <p:ph idx="1"/>
+          </p:nvPr>
+        </p:nvSpPr>
+        <p:spPr/>
+        <p:txBody>
+          <a:bodyPr/>
+          <a:lstStyle/>
+          <a:p>
+            <a:r>
+              <a:rPr lang="fr-FR" dirty="0"/>
+              <a:t>Commande </a:t>
+            </a:r>
+            <a:r>
+              <a:rPr lang="fr-FR" b="1" i="1" dirty="0" err="1"/>
+              <a:t>dbt</a:t>
+            </a:r>
+            <a:r>
+              <a:rPr lang="fr-FR" b="1" i="1" dirty="0"/>
+              <a:t> docs serve</a:t>
+            </a:r>
+          </a:p>
+          <a:p>
+            <a:endParaRPr lang="fr-FR" dirty="0"/>
+          </a:p>
+          <a:p>
+            <a:endParaRPr lang="fr-FR" dirty="0"/>
+          </a:p>
+          <a:p>
+            <a:endParaRPr lang="fr-FR" dirty="0"/>
+          </a:p>
+          <a:p>
+            <a:endParaRPr lang="fr-FR" dirty="0"/>
+          </a:p>
+          <a:p>
+            <a:endParaRPr lang="fr-FR" dirty="0"/>
+          </a:p>
+          <a:p>
+            <a:endParaRPr lang="fr-FR" dirty="0"/>
+          </a:p>
+          <a:p>
+            <a:endParaRPr lang="fr-FR" dirty="0"/>
+          </a:p>
+          <a:p>
+            <a:endParaRPr lang="fr-FR" dirty="0"/>
+          </a:p>
+        </p:txBody>
+      </p:sp>
+      <p:sp>
+        <p:nvSpPr>
+          <p:cNvPr id="4" name="Espace réservé de la date 3">
+            <a:extLst>
+              <a:ext uri="{FF2B5EF4-FFF2-40B4-BE49-F238E27FC236}">
+                <a16:creationId xmlns:a16="http://schemas.microsoft.com/office/drawing/2014/main" id="{620A630D-19CA-91E1-0AA4-114F144B9307}"/>
+              </a:ext>
+            </a:extLst>
+          </p:cNvPr>
+          <p:cNvSpPr>
+            <a:spLocks noGrp="1"/>
+          </p:cNvSpPr>
+          <p:nvPr>
+            <p:ph type="dt" sz="half" idx="10"/>
+          </p:nvPr>
+        </p:nvSpPr>
+        <p:spPr/>
+        <p:txBody>
+          <a:bodyPr/>
+          <a:lstStyle/>
+          <a:p>
+            <a:pPr rtl="0"/>
+            <a:fld id="{22897033-9A55-4DAC-991D-1FF1921C78B7}" type="datetime1">
+              <a:rPr lang="fr-FR" smtClean="0"/>
+              <a:t>25/08/2026</a:t>
+            </a:fld>
+            <a:endParaRPr lang="en-US" dirty="0"/>
+          </a:p>
+        </p:txBody>
+      </p:sp>
+      <p:pic>
+        <p:nvPicPr>
+          <p:cNvPr id="6" name="Image 5">
+            <a:extLst>
+              <a:ext uri="{FF2B5EF4-FFF2-40B4-BE49-F238E27FC236}">
+                <a16:creationId xmlns:a16="http://schemas.microsoft.com/office/drawing/2014/main" id="{4D84F0C5-5D72-7047-7F47-E09E578133B7}"/>
+              </a:ext>
+            </a:extLst>
+          </p:cNvPr>
+          <p:cNvPicPr>
+            <a:picLocks noChangeAspect="1"/>
+          </p:cNvPicPr>
+          <p:nvPr/>
+        </p:nvPicPr>
+        <p:blipFill>
+          <a:blip r:embed="rId2"/>
+          <a:stretch>
+            <a:fillRect/>
+          </a:stretch>
+        </p:blipFill>
+        <p:spPr>
+          <a:xfrm>
+            <a:off x="0" y="2926219"/>
+            <a:ext cx="12192000" cy="3229625"/>
+          </a:xfrm>
+          <a:prstGeom prst="rect">
+            <a:avLst/>
+          </a:prstGeom>
+        </p:spPr>
+      </p:pic>
+    </p:spTree>
+    <p:extLst>
+      <p:ext uri="{BB962C8B-B14F-4D97-AF65-F5344CB8AC3E}">
+        <p14:creationId xmlns:p14="http://schemas.microsoft.com/office/powerpoint/2010/main" val="4144445628"/>
+      </p:ext>
+    </p:extLst>
+  </p:cSld>
+  <p:clrMapOvr>
+    <a:masterClrMapping/>
+  </p:clrMapOvr>
+</p:sld>
+</file>
+
+<file path=ppt/slides/slide17.xml><?xml version="1.0" encoding="utf-8"?>
+<p:sld xmlns:a="http://schemas.openxmlformats.org/drawingml/2006/main" xmlns:r="http://schemas.openxmlformats.org/officeDocument/2006/relationships" xmlns:p="http://schemas.openxmlformats.org/presentationml/2006/main">
+  <p:cSld>
+    <p:spTree>
+      <p:nvGrpSpPr>
         <p:cNvPr id="1" name=""/>
         <p:cNvGrpSpPr/>
         <p:nvPr/>
@@ -15732,7 +15923,7 @@
             <a:pPr rtl="0"/>
             <a:fld id="{22897033-9A55-4DAC-991D-1FF1921C78B7}" type="datetime1">
               <a:rPr lang="fr-FR" smtClean="0"/>
-              <a:t>21/08/2026</a:t>
+              <a:t>25/08/2026</a:t>
             </a:fld>
             <a:endParaRPr lang="en-US" dirty="0"/>
           </a:p>
@@ -15768,128 +15959,2476 @@
           </a:prstGeom>
         </p:spPr>
       </p:pic>
+      <p:sp>
+        <p:nvSpPr>
+          <p:cNvPr id="5" name="Rectangle 4">
+            <a:extLst>
+              <a:ext uri="{FF2B5EF4-FFF2-40B4-BE49-F238E27FC236}">
+                <a16:creationId xmlns:a16="http://schemas.microsoft.com/office/drawing/2014/main" id="{F82021EA-B1C4-E647-6371-507A71358803}"/>
+              </a:ext>
+            </a:extLst>
+          </p:cNvPr>
+          <p:cNvSpPr/>
+          <p:nvPr/>
+        </p:nvSpPr>
+        <p:spPr>
+          <a:xfrm>
+            <a:off x="6714566" y="3015867"/>
+            <a:ext cx="3630706" cy="1834040"/>
+          </a:xfrm>
+          <a:prstGeom prst="rect">
+            <a:avLst/>
+          </a:prstGeom>
+          <a:noFill/>
+          <a:ln w="28575">
+            <a:solidFill>
+              <a:srgbClr val="00B050"/>
+            </a:solidFill>
+          </a:ln>
+        </p:spPr>
+        <p:style>
+          <a:lnRef idx="2">
+            <a:schemeClr val="accent1">
+              <a:shade val="15000"/>
+            </a:schemeClr>
+          </a:lnRef>
+          <a:fillRef idx="1">
+            <a:schemeClr val="accent1"/>
+          </a:fillRef>
+          <a:effectRef idx="0">
+            <a:schemeClr val="accent1"/>
+          </a:effectRef>
+          <a:fontRef idx="minor">
+            <a:schemeClr val="lt1"/>
+          </a:fontRef>
+        </p:style>
+        <p:txBody>
+          <a:bodyPr rtlCol="0" anchor="ctr"/>
+          <a:lstStyle/>
+          <a:p>
+            <a:pPr algn="ctr"/>
+            <a:endParaRPr lang="fr-FR"/>
+          </a:p>
+        </p:txBody>
+      </p:sp>
+      <p:sp>
+        <p:nvSpPr>
+          <p:cNvPr id="7" name="TextBox 5">
+            <a:extLst>
+              <a:ext uri="{FF2B5EF4-FFF2-40B4-BE49-F238E27FC236}">
+                <a16:creationId xmlns:a16="http://schemas.microsoft.com/office/drawing/2014/main" id="{D6AE3AD5-157F-59E3-C0EF-08727724719B}"/>
+              </a:ext>
+            </a:extLst>
+          </p:cNvPr>
+          <p:cNvSpPr txBox="1"/>
+          <p:nvPr/>
+        </p:nvSpPr>
+        <p:spPr>
+          <a:xfrm>
+            <a:off x="8854441" y="3121223"/>
+            <a:ext cx="1965960" cy="307777"/>
+          </a:xfrm>
+          <a:prstGeom prst="rect">
+            <a:avLst/>
+          </a:prstGeom>
+          <a:noFill/>
+        </p:spPr>
+        <p:txBody>
+          <a:bodyPr wrap="square" lIns="45720" rIns="45720" anchor="t">
+            <a:spAutoFit/>
+          </a:bodyPr>
+          <a:lstStyle/>
+          <a:p>
+            <a:pPr algn="ctr">
+              <a:defRPr sz="2000" b="1">
+                <a:solidFill>
+                  <a:srgbClr val="FFFFFF"/>
+                </a:solidFill>
+                <a:latin typeface="Aptos"/>
+              </a:defRPr>
+            </a:pPr>
+            <a:r>
+              <a:rPr lang="fr-FR" sz="1400" dirty="0" err="1">
+                <a:solidFill>
+                  <a:srgbClr val="00B050"/>
+                </a:solidFill>
+              </a:rPr>
+              <a:t>marts</a:t>
+            </a:r>
+            <a:endParaRPr sz="1400" dirty="0">
+              <a:solidFill>
+                <a:srgbClr val="00B050"/>
+              </a:solidFill>
+            </a:endParaRPr>
+          </a:p>
+        </p:txBody>
+      </p:sp>
+      <p:sp>
+        <p:nvSpPr>
+          <p:cNvPr id="8" name="Rectangle 7">
+            <a:extLst>
+              <a:ext uri="{FF2B5EF4-FFF2-40B4-BE49-F238E27FC236}">
+                <a16:creationId xmlns:a16="http://schemas.microsoft.com/office/drawing/2014/main" id="{E53BA47C-53D1-752C-1DCF-669C5942E134}"/>
+              </a:ext>
+            </a:extLst>
+          </p:cNvPr>
+          <p:cNvSpPr/>
+          <p:nvPr/>
+        </p:nvSpPr>
+        <p:spPr>
+          <a:xfrm>
+            <a:off x="6320118" y="5072190"/>
+            <a:ext cx="2142563" cy="903160"/>
+          </a:xfrm>
+          <a:prstGeom prst="rect">
+            <a:avLst/>
+          </a:prstGeom>
+          <a:noFill/>
+          <a:ln w="28575">
+            <a:solidFill>
+              <a:srgbClr val="FFC000"/>
+            </a:solidFill>
+          </a:ln>
+        </p:spPr>
+        <p:style>
+          <a:lnRef idx="2">
+            <a:schemeClr val="accent1">
+              <a:shade val="15000"/>
+            </a:schemeClr>
+          </a:lnRef>
+          <a:fillRef idx="1">
+            <a:schemeClr val="accent1"/>
+          </a:fillRef>
+          <a:effectRef idx="0">
+            <a:schemeClr val="accent1"/>
+          </a:effectRef>
+          <a:fontRef idx="minor">
+            <a:schemeClr val="lt1"/>
+          </a:fontRef>
+        </p:style>
+        <p:txBody>
+          <a:bodyPr rtlCol="0" anchor="ctr"/>
+          <a:lstStyle/>
+          <a:p>
+            <a:pPr algn="ctr"/>
+            <a:endParaRPr lang="fr-FR"/>
+          </a:p>
+        </p:txBody>
+      </p:sp>
+      <p:sp>
+        <p:nvSpPr>
+          <p:cNvPr id="9" name="TextBox 5">
+            <a:extLst>
+              <a:ext uri="{FF2B5EF4-FFF2-40B4-BE49-F238E27FC236}">
+                <a16:creationId xmlns:a16="http://schemas.microsoft.com/office/drawing/2014/main" id="{06C42C2E-CB13-EEEE-7DE2-C7868A31595F}"/>
+              </a:ext>
+            </a:extLst>
+          </p:cNvPr>
+          <p:cNvSpPr txBox="1"/>
+          <p:nvPr/>
+        </p:nvSpPr>
+        <p:spPr>
+          <a:xfrm>
+            <a:off x="6888481" y="5044911"/>
+            <a:ext cx="1965960" cy="307777"/>
+          </a:xfrm>
+          <a:prstGeom prst="rect">
+            <a:avLst/>
+          </a:prstGeom>
+          <a:noFill/>
+        </p:spPr>
+        <p:txBody>
+          <a:bodyPr wrap="square" lIns="45720" rIns="45720" anchor="t">
+            <a:spAutoFit/>
+          </a:bodyPr>
+          <a:lstStyle/>
+          <a:p>
+            <a:pPr algn="ctr">
+              <a:defRPr sz="2000" b="1">
+                <a:solidFill>
+                  <a:srgbClr val="FFFFFF"/>
+                </a:solidFill>
+                <a:latin typeface="Aptos"/>
+              </a:defRPr>
+            </a:pPr>
+            <a:r>
+              <a:rPr lang="fr-FR" sz="1400" dirty="0" err="1">
+                <a:solidFill>
+                  <a:srgbClr val="FFC000"/>
+                </a:solidFill>
+              </a:rPr>
+              <a:t>intermediate</a:t>
+            </a:r>
+            <a:endParaRPr sz="1400" dirty="0">
+              <a:solidFill>
+                <a:srgbClr val="FFC000"/>
+              </a:solidFill>
+            </a:endParaRPr>
+          </a:p>
+        </p:txBody>
+      </p:sp>
+      <p:sp>
+        <p:nvSpPr>
+          <p:cNvPr id="10" name="Forme libre : forme 9">
+            <a:extLst>
+              <a:ext uri="{FF2B5EF4-FFF2-40B4-BE49-F238E27FC236}">
+                <a16:creationId xmlns:a16="http://schemas.microsoft.com/office/drawing/2014/main" id="{916AF3AE-F3A7-AFC4-666D-8616A6BF6360}"/>
+              </a:ext>
+            </a:extLst>
+          </p:cNvPr>
+          <p:cNvSpPr/>
+          <p:nvPr/>
+        </p:nvSpPr>
+        <p:spPr>
+          <a:xfrm>
+            <a:off x="3227294" y="3056965"/>
+            <a:ext cx="2655710" cy="3065929"/>
+          </a:xfrm>
+          <a:custGeom>
+            <a:avLst/>
+            <a:gdLst>
+              <a:gd name="connsiteX0" fmla="*/ 2384612 w 2752165"/>
+              <a:gd name="connsiteY0" fmla="*/ 1748117 h 3065929"/>
+              <a:gd name="connsiteX1" fmla="*/ 2662518 w 2752165"/>
+              <a:gd name="connsiteY1" fmla="*/ 2008094 h 3065929"/>
+              <a:gd name="connsiteX2" fmla="*/ 2752165 w 2752165"/>
+              <a:gd name="connsiteY2" fmla="*/ 2456329 h 3065929"/>
+              <a:gd name="connsiteX3" fmla="*/ 2743200 w 2752165"/>
+              <a:gd name="connsiteY3" fmla="*/ 2895600 h 3065929"/>
+              <a:gd name="connsiteX4" fmla="*/ 2537012 w 2752165"/>
+              <a:gd name="connsiteY4" fmla="*/ 2985247 h 3065929"/>
+              <a:gd name="connsiteX5" fmla="*/ 2061882 w 2752165"/>
+              <a:gd name="connsiteY5" fmla="*/ 3065929 h 3065929"/>
+              <a:gd name="connsiteX6" fmla="*/ 313765 w 2752165"/>
+              <a:gd name="connsiteY6" fmla="*/ 3048000 h 3065929"/>
+              <a:gd name="connsiteX7" fmla="*/ 107577 w 2752165"/>
+              <a:gd name="connsiteY7" fmla="*/ 2868706 h 3065929"/>
+              <a:gd name="connsiteX8" fmla="*/ 0 w 2752165"/>
+              <a:gd name="connsiteY8" fmla="*/ 2294964 h 3065929"/>
+              <a:gd name="connsiteX9" fmla="*/ 62753 w 2752165"/>
+              <a:gd name="connsiteY9" fmla="*/ 1272988 h 3065929"/>
+              <a:gd name="connsiteX10" fmla="*/ 224118 w 2752165"/>
+              <a:gd name="connsiteY10" fmla="*/ 412376 h 3065929"/>
+              <a:gd name="connsiteX11" fmla="*/ 546847 w 2752165"/>
+              <a:gd name="connsiteY11" fmla="*/ 26894 h 3065929"/>
+              <a:gd name="connsiteX12" fmla="*/ 1120588 w 2752165"/>
+              <a:gd name="connsiteY12" fmla="*/ 0 h 3065929"/>
+              <a:gd name="connsiteX13" fmla="*/ 1963271 w 2752165"/>
+              <a:gd name="connsiteY13" fmla="*/ 26894 h 3065929"/>
+              <a:gd name="connsiteX14" fmla="*/ 2375647 w 2752165"/>
+              <a:gd name="connsiteY14" fmla="*/ 286870 h 3065929"/>
+              <a:gd name="connsiteX15" fmla="*/ 2277035 w 2752165"/>
+              <a:gd name="connsiteY15" fmla="*/ 519953 h 3065929"/>
+              <a:gd name="connsiteX16" fmla="*/ 1954306 w 2752165"/>
+              <a:gd name="connsiteY16" fmla="*/ 546847 h 3065929"/>
+              <a:gd name="connsiteX17" fmla="*/ 1335741 w 2752165"/>
+              <a:gd name="connsiteY17" fmla="*/ 528917 h 3065929"/>
+              <a:gd name="connsiteX18" fmla="*/ 914400 w 2752165"/>
+              <a:gd name="connsiteY18" fmla="*/ 528917 h 3065929"/>
+              <a:gd name="connsiteX19" fmla="*/ 923365 w 2752165"/>
+              <a:gd name="connsiteY19" fmla="*/ 726141 h 3065929"/>
+              <a:gd name="connsiteX20" fmla="*/ 1004047 w 2752165"/>
+              <a:gd name="connsiteY20" fmla="*/ 896470 h 3065929"/>
+              <a:gd name="connsiteX21" fmla="*/ 1586753 w 2752165"/>
+              <a:gd name="connsiteY21" fmla="*/ 860611 h 3065929"/>
+              <a:gd name="connsiteX22" fmla="*/ 2043953 w 2752165"/>
+              <a:gd name="connsiteY22" fmla="*/ 887506 h 3065929"/>
+              <a:gd name="connsiteX23" fmla="*/ 2268071 w 2752165"/>
+              <a:gd name="connsiteY23" fmla="*/ 968188 h 3065929"/>
+              <a:gd name="connsiteX24" fmla="*/ 2286000 w 2752165"/>
+              <a:gd name="connsiteY24" fmla="*/ 1156447 h 3065929"/>
+              <a:gd name="connsiteX25" fmla="*/ 2214282 w 2752165"/>
+              <a:gd name="connsiteY25" fmla="*/ 1299882 h 3065929"/>
+              <a:gd name="connsiteX26" fmla="*/ 1766047 w 2752165"/>
+              <a:gd name="connsiteY26" fmla="*/ 1335741 h 3065929"/>
+              <a:gd name="connsiteX27" fmla="*/ 609600 w 2752165"/>
+              <a:gd name="connsiteY27" fmla="*/ 1353670 h 3065929"/>
+              <a:gd name="connsiteX28" fmla="*/ 385482 w 2752165"/>
+              <a:gd name="connsiteY28" fmla="*/ 1434353 h 3065929"/>
+              <a:gd name="connsiteX29" fmla="*/ 430306 w 2752165"/>
+              <a:gd name="connsiteY29" fmla="*/ 1649506 h 3065929"/>
+              <a:gd name="connsiteX30" fmla="*/ 546847 w 2752165"/>
+              <a:gd name="connsiteY30" fmla="*/ 1792941 h 3065929"/>
+              <a:gd name="connsiteX31" fmla="*/ 1515035 w 2752165"/>
+              <a:gd name="connsiteY31" fmla="*/ 1766047 h 3065929"/>
+              <a:gd name="connsiteX32" fmla="*/ 2384612 w 2752165"/>
+              <a:gd name="connsiteY32" fmla="*/ 1748117 h 3065929"/>
+              <a:gd name="connsiteX0" fmla="*/ 2384612 w 2752165"/>
+              <a:gd name="connsiteY0" fmla="*/ 1748117 h 3065929"/>
+              <a:gd name="connsiteX1" fmla="*/ 2662518 w 2752165"/>
+              <a:gd name="connsiteY1" fmla="*/ 2008094 h 3065929"/>
+              <a:gd name="connsiteX2" fmla="*/ 2752165 w 2752165"/>
+              <a:gd name="connsiteY2" fmla="*/ 2456329 h 3065929"/>
+              <a:gd name="connsiteX3" fmla="*/ 2743200 w 2752165"/>
+              <a:gd name="connsiteY3" fmla="*/ 2895600 h 3065929"/>
+              <a:gd name="connsiteX4" fmla="*/ 2537012 w 2752165"/>
+              <a:gd name="connsiteY4" fmla="*/ 2985247 h 3065929"/>
+              <a:gd name="connsiteX5" fmla="*/ 2061882 w 2752165"/>
+              <a:gd name="connsiteY5" fmla="*/ 3065929 h 3065929"/>
+              <a:gd name="connsiteX6" fmla="*/ 313765 w 2752165"/>
+              <a:gd name="connsiteY6" fmla="*/ 3048000 h 3065929"/>
+              <a:gd name="connsiteX7" fmla="*/ 107577 w 2752165"/>
+              <a:gd name="connsiteY7" fmla="*/ 2868706 h 3065929"/>
+              <a:gd name="connsiteX8" fmla="*/ 0 w 2752165"/>
+              <a:gd name="connsiteY8" fmla="*/ 2294964 h 3065929"/>
+              <a:gd name="connsiteX9" fmla="*/ 62753 w 2752165"/>
+              <a:gd name="connsiteY9" fmla="*/ 1272988 h 3065929"/>
+              <a:gd name="connsiteX10" fmla="*/ 224118 w 2752165"/>
+              <a:gd name="connsiteY10" fmla="*/ 412376 h 3065929"/>
+              <a:gd name="connsiteX11" fmla="*/ 546847 w 2752165"/>
+              <a:gd name="connsiteY11" fmla="*/ 26894 h 3065929"/>
+              <a:gd name="connsiteX12" fmla="*/ 1120588 w 2752165"/>
+              <a:gd name="connsiteY12" fmla="*/ 0 h 3065929"/>
+              <a:gd name="connsiteX13" fmla="*/ 1963271 w 2752165"/>
+              <a:gd name="connsiteY13" fmla="*/ 26894 h 3065929"/>
+              <a:gd name="connsiteX14" fmla="*/ 2238487 w 2752165"/>
+              <a:gd name="connsiteY14" fmla="*/ 139550 h 3065929"/>
+              <a:gd name="connsiteX15" fmla="*/ 2277035 w 2752165"/>
+              <a:gd name="connsiteY15" fmla="*/ 519953 h 3065929"/>
+              <a:gd name="connsiteX16" fmla="*/ 1954306 w 2752165"/>
+              <a:gd name="connsiteY16" fmla="*/ 546847 h 3065929"/>
+              <a:gd name="connsiteX17" fmla="*/ 1335741 w 2752165"/>
+              <a:gd name="connsiteY17" fmla="*/ 528917 h 3065929"/>
+              <a:gd name="connsiteX18" fmla="*/ 914400 w 2752165"/>
+              <a:gd name="connsiteY18" fmla="*/ 528917 h 3065929"/>
+              <a:gd name="connsiteX19" fmla="*/ 923365 w 2752165"/>
+              <a:gd name="connsiteY19" fmla="*/ 726141 h 3065929"/>
+              <a:gd name="connsiteX20" fmla="*/ 1004047 w 2752165"/>
+              <a:gd name="connsiteY20" fmla="*/ 896470 h 3065929"/>
+              <a:gd name="connsiteX21" fmla="*/ 1586753 w 2752165"/>
+              <a:gd name="connsiteY21" fmla="*/ 860611 h 3065929"/>
+              <a:gd name="connsiteX22" fmla="*/ 2043953 w 2752165"/>
+              <a:gd name="connsiteY22" fmla="*/ 887506 h 3065929"/>
+              <a:gd name="connsiteX23" fmla="*/ 2268071 w 2752165"/>
+              <a:gd name="connsiteY23" fmla="*/ 968188 h 3065929"/>
+              <a:gd name="connsiteX24" fmla="*/ 2286000 w 2752165"/>
+              <a:gd name="connsiteY24" fmla="*/ 1156447 h 3065929"/>
+              <a:gd name="connsiteX25" fmla="*/ 2214282 w 2752165"/>
+              <a:gd name="connsiteY25" fmla="*/ 1299882 h 3065929"/>
+              <a:gd name="connsiteX26" fmla="*/ 1766047 w 2752165"/>
+              <a:gd name="connsiteY26" fmla="*/ 1335741 h 3065929"/>
+              <a:gd name="connsiteX27" fmla="*/ 609600 w 2752165"/>
+              <a:gd name="connsiteY27" fmla="*/ 1353670 h 3065929"/>
+              <a:gd name="connsiteX28" fmla="*/ 385482 w 2752165"/>
+              <a:gd name="connsiteY28" fmla="*/ 1434353 h 3065929"/>
+              <a:gd name="connsiteX29" fmla="*/ 430306 w 2752165"/>
+              <a:gd name="connsiteY29" fmla="*/ 1649506 h 3065929"/>
+              <a:gd name="connsiteX30" fmla="*/ 546847 w 2752165"/>
+              <a:gd name="connsiteY30" fmla="*/ 1792941 h 3065929"/>
+              <a:gd name="connsiteX31" fmla="*/ 1515035 w 2752165"/>
+              <a:gd name="connsiteY31" fmla="*/ 1766047 h 3065929"/>
+              <a:gd name="connsiteX32" fmla="*/ 2384612 w 2752165"/>
+              <a:gd name="connsiteY32" fmla="*/ 1748117 h 3065929"/>
+              <a:gd name="connsiteX0" fmla="*/ 2384612 w 2752165"/>
+              <a:gd name="connsiteY0" fmla="*/ 1748117 h 3065929"/>
+              <a:gd name="connsiteX1" fmla="*/ 2662518 w 2752165"/>
+              <a:gd name="connsiteY1" fmla="*/ 2008094 h 3065929"/>
+              <a:gd name="connsiteX2" fmla="*/ 2752165 w 2752165"/>
+              <a:gd name="connsiteY2" fmla="*/ 2456329 h 3065929"/>
+              <a:gd name="connsiteX3" fmla="*/ 2743200 w 2752165"/>
+              <a:gd name="connsiteY3" fmla="*/ 2895600 h 3065929"/>
+              <a:gd name="connsiteX4" fmla="*/ 2537012 w 2752165"/>
+              <a:gd name="connsiteY4" fmla="*/ 2985247 h 3065929"/>
+              <a:gd name="connsiteX5" fmla="*/ 2061882 w 2752165"/>
+              <a:gd name="connsiteY5" fmla="*/ 3065929 h 3065929"/>
+              <a:gd name="connsiteX6" fmla="*/ 313765 w 2752165"/>
+              <a:gd name="connsiteY6" fmla="*/ 3048000 h 3065929"/>
+              <a:gd name="connsiteX7" fmla="*/ 107577 w 2752165"/>
+              <a:gd name="connsiteY7" fmla="*/ 2868706 h 3065929"/>
+              <a:gd name="connsiteX8" fmla="*/ 0 w 2752165"/>
+              <a:gd name="connsiteY8" fmla="*/ 2294964 h 3065929"/>
+              <a:gd name="connsiteX9" fmla="*/ 62753 w 2752165"/>
+              <a:gd name="connsiteY9" fmla="*/ 1272988 h 3065929"/>
+              <a:gd name="connsiteX10" fmla="*/ 224118 w 2752165"/>
+              <a:gd name="connsiteY10" fmla="*/ 412376 h 3065929"/>
+              <a:gd name="connsiteX11" fmla="*/ 546847 w 2752165"/>
+              <a:gd name="connsiteY11" fmla="*/ 26894 h 3065929"/>
+              <a:gd name="connsiteX12" fmla="*/ 1120588 w 2752165"/>
+              <a:gd name="connsiteY12" fmla="*/ 0 h 3065929"/>
+              <a:gd name="connsiteX13" fmla="*/ 1963271 w 2752165"/>
+              <a:gd name="connsiteY13" fmla="*/ 26894 h 3065929"/>
+              <a:gd name="connsiteX14" fmla="*/ 2228327 w 2752165"/>
+              <a:gd name="connsiteY14" fmla="*/ 170030 h 3065929"/>
+              <a:gd name="connsiteX15" fmla="*/ 2277035 w 2752165"/>
+              <a:gd name="connsiteY15" fmla="*/ 519953 h 3065929"/>
+              <a:gd name="connsiteX16" fmla="*/ 1954306 w 2752165"/>
+              <a:gd name="connsiteY16" fmla="*/ 546847 h 3065929"/>
+              <a:gd name="connsiteX17" fmla="*/ 1335741 w 2752165"/>
+              <a:gd name="connsiteY17" fmla="*/ 528917 h 3065929"/>
+              <a:gd name="connsiteX18" fmla="*/ 914400 w 2752165"/>
+              <a:gd name="connsiteY18" fmla="*/ 528917 h 3065929"/>
+              <a:gd name="connsiteX19" fmla="*/ 923365 w 2752165"/>
+              <a:gd name="connsiteY19" fmla="*/ 726141 h 3065929"/>
+              <a:gd name="connsiteX20" fmla="*/ 1004047 w 2752165"/>
+              <a:gd name="connsiteY20" fmla="*/ 896470 h 3065929"/>
+              <a:gd name="connsiteX21" fmla="*/ 1586753 w 2752165"/>
+              <a:gd name="connsiteY21" fmla="*/ 860611 h 3065929"/>
+              <a:gd name="connsiteX22" fmla="*/ 2043953 w 2752165"/>
+              <a:gd name="connsiteY22" fmla="*/ 887506 h 3065929"/>
+              <a:gd name="connsiteX23" fmla="*/ 2268071 w 2752165"/>
+              <a:gd name="connsiteY23" fmla="*/ 968188 h 3065929"/>
+              <a:gd name="connsiteX24" fmla="*/ 2286000 w 2752165"/>
+              <a:gd name="connsiteY24" fmla="*/ 1156447 h 3065929"/>
+              <a:gd name="connsiteX25" fmla="*/ 2214282 w 2752165"/>
+              <a:gd name="connsiteY25" fmla="*/ 1299882 h 3065929"/>
+              <a:gd name="connsiteX26" fmla="*/ 1766047 w 2752165"/>
+              <a:gd name="connsiteY26" fmla="*/ 1335741 h 3065929"/>
+              <a:gd name="connsiteX27" fmla="*/ 609600 w 2752165"/>
+              <a:gd name="connsiteY27" fmla="*/ 1353670 h 3065929"/>
+              <a:gd name="connsiteX28" fmla="*/ 385482 w 2752165"/>
+              <a:gd name="connsiteY28" fmla="*/ 1434353 h 3065929"/>
+              <a:gd name="connsiteX29" fmla="*/ 430306 w 2752165"/>
+              <a:gd name="connsiteY29" fmla="*/ 1649506 h 3065929"/>
+              <a:gd name="connsiteX30" fmla="*/ 546847 w 2752165"/>
+              <a:gd name="connsiteY30" fmla="*/ 1792941 h 3065929"/>
+              <a:gd name="connsiteX31" fmla="*/ 1515035 w 2752165"/>
+              <a:gd name="connsiteY31" fmla="*/ 1766047 h 3065929"/>
+              <a:gd name="connsiteX32" fmla="*/ 2384612 w 2752165"/>
+              <a:gd name="connsiteY32" fmla="*/ 1748117 h 3065929"/>
+              <a:gd name="connsiteX0" fmla="*/ 2384612 w 2752165"/>
+              <a:gd name="connsiteY0" fmla="*/ 1748117 h 3065929"/>
+              <a:gd name="connsiteX1" fmla="*/ 2662518 w 2752165"/>
+              <a:gd name="connsiteY1" fmla="*/ 2008094 h 3065929"/>
+              <a:gd name="connsiteX2" fmla="*/ 2752165 w 2752165"/>
+              <a:gd name="connsiteY2" fmla="*/ 2456329 h 3065929"/>
+              <a:gd name="connsiteX3" fmla="*/ 2743200 w 2752165"/>
+              <a:gd name="connsiteY3" fmla="*/ 2895600 h 3065929"/>
+              <a:gd name="connsiteX4" fmla="*/ 2537012 w 2752165"/>
+              <a:gd name="connsiteY4" fmla="*/ 2985247 h 3065929"/>
+              <a:gd name="connsiteX5" fmla="*/ 2061882 w 2752165"/>
+              <a:gd name="connsiteY5" fmla="*/ 3065929 h 3065929"/>
+              <a:gd name="connsiteX6" fmla="*/ 313765 w 2752165"/>
+              <a:gd name="connsiteY6" fmla="*/ 3048000 h 3065929"/>
+              <a:gd name="connsiteX7" fmla="*/ 107577 w 2752165"/>
+              <a:gd name="connsiteY7" fmla="*/ 2868706 h 3065929"/>
+              <a:gd name="connsiteX8" fmla="*/ 0 w 2752165"/>
+              <a:gd name="connsiteY8" fmla="*/ 2294964 h 3065929"/>
+              <a:gd name="connsiteX9" fmla="*/ 62753 w 2752165"/>
+              <a:gd name="connsiteY9" fmla="*/ 1272988 h 3065929"/>
+              <a:gd name="connsiteX10" fmla="*/ 224118 w 2752165"/>
+              <a:gd name="connsiteY10" fmla="*/ 412376 h 3065929"/>
+              <a:gd name="connsiteX11" fmla="*/ 546847 w 2752165"/>
+              <a:gd name="connsiteY11" fmla="*/ 26894 h 3065929"/>
+              <a:gd name="connsiteX12" fmla="*/ 1120588 w 2752165"/>
+              <a:gd name="connsiteY12" fmla="*/ 0 h 3065929"/>
+              <a:gd name="connsiteX13" fmla="*/ 1963271 w 2752165"/>
+              <a:gd name="connsiteY13" fmla="*/ 26894 h 3065929"/>
+              <a:gd name="connsiteX14" fmla="*/ 2228327 w 2752165"/>
+              <a:gd name="connsiteY14" fmla="*/ 170030 h 3065929"/>
+              <a:gd name="connsiteX15" fmla="*/ 2205915 w 2752165"/>
+              <a:gd name="connsiteY15" fmla="*/ 489473 h 3065929"/>
+              <a:gd name="connsiteX16" fmla="*/ 1954306 w 2752165"/>
+              <a:gd name="connsiteY16" fmla="*/ 546847 h 3065929"/>
+              <a:gd name="connsiteX17" fmla="*/ 1335741 w 2752165"/>
+              <a:gd name="connsiteY17" fmla="*/ 528917 h 3065929"/>
+              <a:gd name="connsiteX18" fmla="*/ 914400 w 2752165"/>
+              <a:gd name="connsiteY18" fmla="*/ 528917 h 3065929"/>
+              <a:gd name="connsiteX19" fmla="*/ 923365 w 2752165"/>
+              <a:gd name="connsiteY19" fmla="*/ 726141 h 3065929"/>
+              <a:gd name="connsiteX20" fmla="*/ 1004047 w 2752165"/>
+              <a:gd name="connsiteY20" fmla="*/ 896470 h 3065929"/>
+              <a:gd name="connsiteX21" fmla="*/ 1586753 w 2752165"/>
+              <a:gd name="connsiteY21" fmla="*/ 860611 h 3065929"/>
+              <a:gd name="connsiteX22" fmla="*/ 2043953 w 2752165"/>
+              <a:gd name="connsiteY22" fmla="*/ 887506 h 3065929"/>
+              <a:gd name="connsiteX23" fmla="*/ 2268071 w 2752165"/>
+              <a:gd name="connsiteY23" fmla="*/ 968188 h 3065929"/>
+              <a:gd name="connsiteX24" fmla="*/ 2286000 w 2752165"/>
+              <a:gd name="connsiteY24" fmla="*/ 1156447 h 3065929"/>
+              <a:gd name="connsiteX25" fmla="*/ 2214282 w 2752165"/>
+              <a:gd name="connsiteY25" fmla="*/ 1299882 h 3065929"/>
+              <a:gd name="connsiteX26" fmla="*/ 1766047 w 2752165"/>
+              <a:gd name="connsiteY26" fmla="*/ 1335741 h 3065929"/>
+              <a:gd name="connsiteX27" fmla="*/ 609600 w 2752165"/>
+              <a:gd name="connsiteY27" fmla="*/ 1353670 h 3065929"/>
+              <a:gd name="connsiteX28" fmla="*/ 385482 w 2752165"/>
+              <a:gd name="connsiteY28" fmla="*/ 1434353 h 3065929"/>
+              <a:gd name="connsiteX29" fmla="*/ 430306 w 2752165"/>
+              <a:gd name="connsiteY29" fmla="*/ 1649506 h 3065929"/>
+              <a:gd name="connsiteX30" fmla="*/ 546847 w 2752165"/>
+              <a:gd name="connsiteY30" fmla="*/ 1792941 h 3065929"/>
+              <a:gd name="connsiteX31" fmla="*/ 1515035 w 2752165"/>
+              <a:gd name="connsiteY31" fmla="*/ 1766047 h 3065929"/>
+              <a:gd name="connsiteX32" fmla="*/ 2384612 w 2752165"/>
+              <a:gd name="connsiteY32" fmla="*/ 1748117 h 3065929"/>
+              <a:gd name="connsiteX0" fmla="*/ 2384612 w 2752165"/>
+              <a:gd name="connsiteY0" fmla="*/ 1748117 h 3065929"/>
+              <a:gd name="connsiteX1" fmla="*/ 2662518 w 2752165"/>
+              <a:gd name="connsiteY1" fmla="*/ 2008094 h 3065929"/>
+              <a:gd name="connsiteX2" fmla="*/ 2752165 w 2752165"/>
+              <a:gd name="connsiteY2" fmla="*/ 2456329 h 3065929"/>
+              <a:gd name="connsiteX3" fmla="*/ 2743200 w 2752165"/>
+              <a:gd name="connsiteY3" fmla="*/ 2895600 h 3065929"/>
+              <a:gd name="connsiteX4" fmla="*/ 2537012 w 2752165"/>
+              <a:gd name="connsiteY4" fmla="*/ 2985247 h 3065929"/>
+              <a:gd name="connsiteX5" fmla="*/ 2061882 w 2752165"/>
+              <a:gd name="connsiteY5" fmla="*/ 3065929 h 3065929"/>
+              <a:gd name="connsiteX6" fmla="*/ 313765 w 2752165"/>
+              <a:gd name="connsiteY6" fmla="*/ 3048000 h 3065929"/>
+              <a:gd name="connsiteX7" fmla="*/ 107577 w 2752165"/>
+              <a:gd name="connsiteY7" fmla="*/ 2868706 h 3065929"/>
+              <a:gd name="connsiteX8" fmla="*/ 0 w 2752165"/>
+              <a:gd name="connsiteY8" fmla="*/ 2294964 h 3065929"/>
+              <a:gd name="connsiteX9" fmla="*/ 62753 w 2752165"/>
+              <a:gd name="connsiteY9" fmla="*/ 1272988 h 3065929"/>
+              <a:gd name="connsiteX10" fmla="*/ 224118 w 2752165"/>
+              <a:gd name="connsiteY10" fmla="*/ 412376 h 3065929"/>
+              <a:gd name="connsiteX11" fmla="*/ 546847 w 2752165"/>
+              <a:gd name="connsiteY11" fmla="*/ 26894 h 3065929"/>
+              <a:gd name="connsiteX12" fmla="*/ 1120588 w 2752165"/>
+              <a:gd name="connsiteY12" fmla="*/ 0 h 3065929"/>
+              <a:gd name="connsiteX13" fmla="*/ 1963271 w 2752165"/>
+              <a:gd name="connsiteY13" fmla="*/ 26894 h 3065929"/>
+              <a:gd name="connsiteX14" fmla="*/ 2228327 w 2752165"/>
+              <a:gd name="connsiteY14" fmla="*/ 170030 h 3065929"/>
+              <a:gd name="connsiteX15" fmla="*/ 2205915 w 2752165"/>
+              <a:gd name="connsiteY15" fmla="*/ 474233 h 3065929"/>
+              <a:gd name="connsiteX16" fmla="*/ 1954306 w 2752165"/>
+              <a:gd name="connsiteY16" fmla="*/ 546847 h 3065929"/>
+              <a:gd name="connsiteX17" fmla="*/ 1335741 w 2752165"/>
+              <a:gd name="connsiteY17" fmla="*/ 528917 h 3065929"/>
+              <a:gd name="connsiteX18" fmla="*/ 914400 w 2752165"/>
+              <a:gd name="connsiteY18" fmla="*/ 528917 h 3065929"/>
+              <a:gd name="connsiteX19" fmla="*/ 923365 w 2752165"/>
+              <a:gd name="connsiteY19" fmla="*/ 726141 h 3065929"/>
+              <a:gd name="connsiteX20" fmla="*/ 1004047 w 2752165"/>
+              <a:gd name="connsiteY20" fmla="*/ 896470 h 3065929"/>
+              <a:gd name="connsiteX21" fmla="*/ 1586753 w 2752165"/>
+              <a:gd name="connsiteY21" fmla="*/ 860611 h 3065929"/>
+              <a:gd name="connsiteX22" fmla="*/ 2043953 w 2752165"/>
+              <a:gd name="connsiteY22" fmla="*/ 887506 h 3065929"/>
+              <a:gd name="connsiteX23" fmla="*/ 2268071 w 2752165"/>
+              <a:gd name="connsiteY23" fmla="*/ 968188 h 3065929"/>
+              <a:gd name="connsiteX24" fmla="*/ 2286000 w 2752165"/>
+              <a:gd name="connsiteY24" fmla="*/ 1156447 h 3065929"/>
+              <a:gd name="connsiteX25" fmla="*/ 2214282 w 2752165"/>
+              <a:gd name="connsiteY25" fmla="*/ 1299882 h 3065929"/>
+              <a:gd name="connsiteX26" fmla="*/ 1766047 w 2752165"/>
+              <a:gd name="connsiteY26" fmla="*/ 1335741 h 3065929"/>
+              <a:gd name="connsiteX27" fmla="*/ 609600 w 2752165"/>
+              <a:gd name="connsiteY27" fmla="*/ 1353670 h 3065929"/>
+              <a:gd name="connsiteX28" fmla="*/ 385482 w 2752165"/>
+              <a:gd name="connsiteY28" fmla="*/ 1434353 h 3065929"/>
+              <a:gd name="connsiteX29" fmla="*/ 430306 w 2752165"/>
+              <a:gd name="connsiteY29" fmla="*/ 1649506 h 3065929"/>
+              <a:gd name="connsiteX30" fmla="*/ 546847 w 2752165"/>
+              <a:gd name="connsiteY30" fmla="*/ 1792941 h 3065929"/>
+              <a:gd name="connsiteX31" fmla="*/ 1515035 w 2752165"/>
+              <a:gd name="connsiteY31" fmla="*/ 1766047 h 3065929"/>
+              <a:gd name="connsiteX32" fmla="*/ 2384612 w 2752165"/>
+              <a:gd name="connsiteY32" fmla="*/ 1748117 h 3065929"/>
+              <a:gd name="connsiteX0" fmla="*/ 2384612 w 2752165"/>
+              <a:gd name="connsiteY0" fmla="*/ 1748117 h 3065929"/>
+              <a:gd name="connsiteX1" fmla="*/ 2662518 w 2752165"/>
+              <a:gd name="connsiteY1" fmla="*/ 2008094 h 3065929"/>
+              <a:gd name="connsiteX2" fmla="*/ 2752165 w 2752165"/>
+              <a:gd name="connsiteY2" fmla="*/ 2456329 h 3065929"/>
+              <a:gd name="connsiteX3" fmla="*/ 2743200 w 2752165"/>
+              <a:gd name="connsiteY3" fmla="*/ 2895600 h 3065929"/>
+              <a:gd name="connsiteX4" fmla="*/ 2537012 w 2752165"/>
+              <a:gd name="connsiteY4" fmla="*/ 2985247 h 3065929"/>
+              <a:gd name="connsiteX5" fmla="*/ 2061882 w 2752165"/>
+              <a:gd name="connsiteY5" fmla="*/ 3065929 h 3065929"/>
+              <a:gd name="connsiteX6" fmla="*/ 313765 w 2752165"/>
+              <a:gd name="connsiteY6" fmla="*/ 3048000 h 3065929"/>
+              <a:gd name="connsiteX7" fmla="*/ 107577 w 2752165"/>
+              <a:gd name="connsiteY7" fmla="*/ 2868706 h 3065929"/>
+              <a:gd name="connsiteX8" fmla="*/ 0 w 2752165"/>
+              <a:gd name="connsiteY8" fmla="*/ 2294964 h 3065929"/>
+              <a:gd name="connsiteX9" fmla="*/ 62753 w 2752165"/>
+              <a:gd name="connsiteY9" fmla="*/ 1272988 h 3065929"/>
+              <a:gd name="connsiteX10" fmla="*/ 224118 w 2752165"/>
+              <a:gd name="connsiteY10" fmla="*/ 412376 h 3065929"/>
+              <a:gd name="connsiteX11" fmla="*/ 546847 w 2752165"/>
+              <a:gd name="connsiteY11" fmla="*/ 26894 h 3065929"/>
+              <a:gd name="connsiteX12" fmla="*/ 1120588 w 2752165"/>
+              <a:gd name="connsiteY12" fmla="*/ 0 h 3065929"/>
+              <a:gd name="connsiteX13" fmla="*/ 1963271 w 2752165"/>
+              <a:gd name="connsiteY13" fmla="*/ 26894 h 3065929"/>
+              <a:gd name="connsiteX14" fmla="*/ 2182607 w 2752165"/>
+              <a:gd name="connsiteY14" fmla="*/ 170030 h 3065929"/>
+              <a:gd name="connsiteX15" fmla="*/ 2205915 w 2752165"/>
+              <a:gd name="connsiteY15" fmla="*/ 474233 h 3065929"/>
+              <a:gd name="connsiteX16" fmla="*/ 1954306 w 2752165"/>
+              <a:gd name="connsiteY16" fmla="*/ 546847 h 3065929"/>
+              <a:gd name="connsiteX17" fmla="*/ 1335741 w 2752165"/>
+              <a:gd name="connsiteY17" fmla="*/ 528917 h 3065929"/>
+              <a:gd name="connsiteX18" fmla="*/ 914400 w 2752165"/>
+              <a:gd name="connsiteY18" fmla="*/ 528917 h 3065929"/>
+              <a:gd name="connsiteX19" fmla="*/ 923365 w 2752165"/>
+              <a:gd name="connsiteY19" fmla="*/ 726141 h 3065929"/>
+              <a:gd name="connsiteX20" fmla="*/ 1004047 w 2752165"/>
+              <a:gd name="connsiteY20" fmla="*/ 896470 h 3065929"/>
+              <a:gd name="connsiteX21" fmla="*/ 1586753 w 2752165"/>
+              <a:gd name="connsiteY21" fmla="*/ 860611 h 3065929"/>
+              <a:gd name="connsiteX22" fmla="*/ 2043953 w 2752165"/>
+              <a:gd name="connsiteY22" fmla="*/ 887506 h 3065929"/>
+              <a:gd name="connsiteX23" fmla="*/ 2268071 w 2752165"/>
+              <a:gd name="connsiteY23" fmla="*/ 968188 h 3065929"/>
+              <a:gd name="connsiteX24" fmla="*/ 2286000 w 2752165"/>
+              <a:gd name="connsiteY24" fmla="*/ 1156447 h 3065929"/>
+              <a:gd name="connsiteX25" fmla="*/ 2214282 w 2752165"/>
+              <a:gd name="connsiteY25" fmla="*/ 1299882 h 3065929"/>
+              <a:gd name="connsiteX26" fmla="*/ 1766047 w 2752165"/>
+              <a:gd name="connsiteY26" fmla="*/ 1335741 h 3065929"/>
+              <a:gd name="connsiteX27" fmla="*/ 609600 w 2752165"/>
+              <a:gd name="connsiteY27" fmla="*/ 1353670 h 3065929"/>
+              <a:gd name="connsiteX28" fmla="*/ 385482 w 2752165"/>
+              <a:gd name="connsiteY28" fmla="*/ 1434353 h 3065929"/>
+              <a:gd name="connsiteX29" fmla="*/ 430306 w 2752165"/>
+              <a:gd name="connsiteY29" fmla="*/ 1649506 h 3065929"/>
+              <a:gd name="connsiteX30" fmla="*/ 546847 w 2752165"/>
+              <a:gd name="connsiteY30" fmla="*/ 1792941 h 3065929"/>
+              <a:gd name="connsiteX31" fmla="*/ 1515035 w 2752165"/>
+              <a:gd name="connsiteY31" fmla="*/ 1766047 h 3065929"/>
+              <a:gd name="connsiteX32" fmla="*/ 2384612 w 2752165"/>
+              <a:gd name="connsiteY32" fmla="*/ 1748117 h 3065929"/>
+              <a:gd name="connsiteX0" fmla="*/ 2384612 w 2752165"/>
+              <a:gd name="connsiteY0" fmla="*/ 1748117 h 3065929"/>
+              <a:gd name="connsiteX1" fmla="*/ 2662518 w 2752165"/>
+              <a:gd name="connsiteY1" fmla="*/ 2008094 h 3065929"/>
+              <a:gd name="connsiteX2" fmla="*/ 2752165 w 2752165"/>
+              <a:gd name="connsiteY2" fmla="*/ 2456329 h 3065929"/>
+              <a:gd name="connsiteX3" fmla="*/ 2743200 w 2752165"/>
+              <a:gd name="connsiteY3" fmla="*/ 2895600 h 3065929"/>
+              <a:gd name="connsiteX4" fmla="*/ 2537012 w 2752165"/>
+              <a:gd name="connsiteY4" fmla="*/ 2985247 h 3065929"/>
+              <a:gd name="connsiteX5" fmla="*/ 2061882 w 2752165"/>
+              <a:gd name="connsiteY5" fmla="*/ 3065929 h 3065929"/>
+              <a:gd name="connsiteX6" fmla="*/ 313765 w 2752165"/>
+              <a:gd name="connsiteY6" fmla="*/ 3048000 h 3065929"/>
+              <a:gd name="connsiteX7" fmla="*/ 107577 w 2752165"/>
+              <a:gd name="connsiteY7" fmla="*/ 2868706 h 3065929"/>
+              <a:gd name="connsiteX8" fmla="*/ 0 w 2752165"/>
+              <a:gd name="connsiteY8" fmla="*/ 2294964 h 3065929"/>
+              <a:gd name="connsiteX9" fmla="*/ 62753 w 2752165"/>
+              <a:gd name="connsiteY9" fmla="*/ 1272988 h 3065929"/>
+              <a:gd name="connsiteX10" fmla="*/ 224118 w 2752165"/>
+              <a:gd name="connsiteY10" fmla="*/ 412376 h 3065929"/>
+              <a:gd name="connsiteX11" fmla="*/ 546847 w 2752165"/>
+              <a:gd name="connsiteY11" fmla="*/ 26894 h 3065929"/>
+              <a:gd name="connsiteX12" fmla="*/ 1120588 w 2752165"/>
+              <a:gd name="connsiteY12" fmla="*/ 0 h 3065929"/>
+              <a:gd name="connsiteX13" fmla="*/ 1963271 w 2752165"/>
+              <a:gd name="connsiteY13" fmla="*/ 26894 h 3065929"/>
+              <a:gd name="connsiteX14" fmla="*/ 2182607 w 2752165"/>
+              <a:gd name="connsiteY14" fmla="*/ 170030 h 3065929"/>
+              <a:gd name="connsiteX15" fmla="*/ 2205915 w 2752165"/>
+              <a:gd name="connsiteY15" fmla="*/ 474233 h 3065929"/>
+              <a:gd name="connsiteX16" fmla="*/ 1954306 w 2752165"/>
+              <a:gd name="connsiteY16" fmla="*/ 546847 h 3065929"/>
+              <a:gd name="connsiteX17" fmla="*/ 1335741 w 2752165"/>
+              <a:gd name="connsiteY17" fmla="*/ 528917 h 3065929"/>
+              <a:gd name="connsiteX18" fmla="*/ 990600 w 2752165"/>
+              <a:gd name="connsiteY18" fmla="*/ 528917 h 3065929"/>
+              <a:gd name="connsiteX19" fmla="*/ 923365 w 2752165"/>
+              <a:gd name="connsiteY19" fmla="*/ 726141 h 3065929"/>
+              <a:gd name="connsiteX20" fmla="*/ 1004047 w 2752165"/>
+              <a:gd name="connsiteY20" fmla="*/ 896470 h 3065929"/>
+              <a:gd name="connsiteX21" fmla="*/ 1586753 w 2752165"/>
+              <a:gd name="connsiteY21" fmla="*/ 860611 h 3065929"/>
+              <a:gd name="connsiteX22" fmla="*/ 2043953 w 2752165"/>
+              <a:gd name="connsiteY22" fmla="*/ 887506 h 3065929"/>
+              <a:gd name="connsiteX23" fmla="*/ 2268071 w 2752165"/>
+              <a:gd name="connsiteY23" fmla="*/ 968188 h 3065929"/>
+              <a:gd name="connsiteX24" fmla="*/ 2286000 w 2752165"/>
+              <a:gd name="connsiteY24" fmla="*/ 1156447 h 3065929"/>
+              <a:gd name="connsiteX25" fmla="*/ 2214282 w 2752165"/>
+              <a:gd name="connsiteY25" fmla="*/ 1299882 h 3065929"/>
+              <a:gd name="connsiteX26" fmla="*/ 1766047 w 2752165"/>
+              <a:gd name="connsiteY26" fmla="*/ 1335741 h 3065929"/>
+              <a:gd name="connsiteX27" fmla="*/ 609600 w 2752165"/>
+              <a:gd name="connsiteY27" fmla="*/ 1353670 h 3065929"/>
+              <a:gd name="connsiteX28" fmla="*/ 385482 w 2752165"/>
+              <a:gd name="connsiteY28" fmla="*/ 1434353 h 3065929"/>
+              <a:gd name="connsiteX29" fmla="*/ 430306 w 2752165"/>
+              <a:gd name="connsiteY29" fmla="*/ 1649506 h 3065929"/>
+              <a:gd name="connsiteX30" fmla="*/ 546847 w 2752165"/>
+              <a:gd name="connsiteY30" fmla="*/ 1792941 h 3065929"/>
+              <a:gd name="connsiteX31" fmla="*/ 1515035 w 2752165"/>
+              <a:gd name="connsiteY31" fmla="*/ 1766047 h 3065929"/>
+              <a:gd name="connsiteX32" fmla="*/ 2384612 w 2752165"/>
+              <a:gd name="connsiteY32" fmla="*/ 1748117 h 3065929"/>
+              <a:gd name="connsiteX0" fmla="*/ 2384612 w 2752165"/>
+              <a:gd name="connsiteY0" fmla="*/ 1748117 h 3065929"/>
+              <a:gd name="connsiteX1" fmla="*/ 2662518 w 2752165"/>
+              <a:gd name="connsiteY1" fmla="*/ 2008094 h 3065929"/>
+              <a:gd name="connsiteX2" fmla="*/ 2752165 w 2752165"/>
+              <a:gd name="connsiteY2" fmla="*/ 2456329 h 3065929"/>
+              <a:gd name="connsiteX3" fmla="*/ 2743200 w 2752165"/>
+              <a:gd name="connsiteY3" fmla="*/ 2895600 h 3065929"/>
+              <a:gd name="connsiteX4" fmla="*/ 2537012 w 2752165"/>
+              <a:gd name="connsiteY4" fmla="*/ 2985247 h 3065929"/>
+              <a:gd name="connsiteX5" fmla="*/ 2061882 w 2752165"/>
+              <a:gd name="connsiteY5" fmla="*/ 3065929 h 3065929"/>
+              <a:gd name="connsiteX6" fmla="*/ 313765 w 2752165"/>
+              <a:gd name="connsiteY6" fmla="*/ 3048000 h 3065929"/>
+              <a:gd name="connsiteX7" fmla="*/ 107577 w 2752165"/>
+              <a:gd name="connsiteY7" fmla="*/ 2868706 h 3065929"/>
+              <a:gd name="connsiteX8" fmla="*/ 0 w 2752165"/>
+              <a:gd name="connsiteY8" fmla="*/ 2294964 h 3065929"/>
+              <a:gd name="connsiteX9" fmla="*/ 62753 w 2752165"/>
+              <a:gd name="connsiteY9" fmla="*/ 1272988 h 3065929"/>
+              <a:gd name="connsiteX10" fmla="*/ 224118 w 2752165"/>
+              <a:gd name="connsiteY10" fmla="*/ 412376 h 3065929"/>
+              <a:gd name="connsiteX11" fmla="*/ 546847 w 2752165"/>
+              <a:gd name="connsiteY11" fmla="*/ 26894 h 3065929"/>
+              <a:gd name="connsiteX12" fmla="*/ 1120588 w 2752165"/>
+              <a:gd name="connsiteY12" fmla="*/ 0 h 3065929"/>
+              <a:gd name="connsiteX13" fmla="*/ 1963271 w 2752165"/>
+              <a:gd name="connsiteY13" fmla="*/ 26894 h 3065929"/>
+              <a:gd name="connsiteX14" fmla="*/ 2182607 w 2752165"/>
+              <a:gd name="connsiteY14" fmla="*/ 170030 h 3065929"/>
+              <a:gd name="connsiteX15" fmla="*/ 2180515 w 2752165"/>
+              <a:gd name="connsiteY15" fmla="*/ 464073 h 3065929"/>
+              <a:gd name="connsiteX16" fmla="*/ 1954306 w 2752165"/>
+              <a:gd name="connsiteY16" fmla="*/ 546847 h 3065929"/>
+              <a:gd name="connsiteX17" fmla="*/ 1335741 w 2752165"/>
+              <a:gd name="connsiteY17" fmla="*/ 528917 h 3065929"/>
+              <a:gd name="connsiteX18" fmla="*/ 990600 w 2752165"/>
+              <a:gd name="connsiteY18" fmla="*/ 528917 h 3065929"/>
+              <a:gd name="connsiteX19" fmla="*/ 923365 w 2752165"/>
+              <a:gd name="connsiteY19" fmla="*/ 726141 h 3065929"/>
+              <a:gd name="connsiteX20" fmla="*/ 1004047 w 2752165"/>
+              <a:gd name="connsiteY20" fmla="*/ 896470 h 3065929"/>
+              <a:gd name="connsiteX21" fmla="*/ 1586753 w 2752165"/>
+              <a:gd name="connsiteY21" fmla="*/ 860611 h 3065929"/>
+              <a:gd name="connsiteX22" fmla="*/ 2043953 w 2752165"/>
+              <a:gd name="connsiteY22" fmla="*/ 887506 h 3065929"/>
+              <a:gd name="connsiteX23" fmla="*/ 2268071 w 2752165"/>
+              <a:gd name="connsiteY23" fmla="*/ 968188 h 3065929"/>
+              <a:gd name="connsiteX24" fmla="*/ 2286000 w 2752165"/>
+              <a:gd name="connsiteY24" fmla="*/ 1156447 h 3065929"/>
+              <a:gd name="connsiteX25" fmla="*/ 2214282 w 2752165"/>
+              <a:gd name="connsiteY25" fmla="*/ 1299882 h 3065929"/>
+              <a:gd name="connsiteX26" fmla="*/ 1766047 w 2752165"/>
+              <a:gd name="connsiteY26" fmla="*/ 1335741 h 3065929"/>
+              <a:gd name="connsiteX27" fmla="*/ 609600 w 2752165"/>
+              <a:gd name="connsiteY27" fmla="*/ 1353670 h 3065929"/>
+              <a:gd name="connsiteX28" fmla="*/ 385482 w 2752165"/>
+              <a:gd name="connsiteY28" fmla="*/ 1434353 h 3065929"/>
+              <a:gd name="connsiteX29" fmla="*/ 430306 w 2752165"/>
+              <a:gd name="connsiteY29" fmla="*/ 1649506 h 3065929"/>
+              <a:gd name="connsiteX30" fmla="*/ 546847 w 2752165"/>
+              <a:gd name="connsiteY30" fmla="*/ 1792941 h 3065929"/>
+              <a:gd name="connsiteX31" fmla="*/ 1515035 w 2752165"/>
+              <a:gd name="connsiteY31" fmla="*/ 1766047 h 3065929"/>
+              <a:gd name="connsiteX32" fmla="*/ 2384612 w 2752165"/>
+              <a:gd name="connsiteY32" fmla="*/ 1748117 h 3065929"/>
+              <a:gd name="connsiteX0" fmla="*/ 2384612 w 2752165"/>
+              <a:gd name="connsiteY0" fmla="*/ 1748117 h 3065929"/>
+              <a:gd name="connsiteX1" fmla="*/ 2662518 w 2752165"/>
+              <a:gd name="connsiteY1" fmla="*/ 2008094 h 3065929"/>
+              <a:gd name="connsiteX2" fmla="*/ 2752165 w 2752165"/>
+              <a:gd name="connsiteY2" fmla="*/ 2456329 h 3065929"/>
+              <a:gd name="connsiteX3" fmla="*/ 2743200 w 2752165"/>
+              <a:gd name="connsiteY3" fmla="*/ 2895600 h 3065929"/>
+              <a:gd name="connsiteX4" fmla="*/ 2537012 w 2752165"/>
+              <a:gd name="connsiteY4" fmla="*/ 2985247 h 3065929"/>
+              <a:gd name="connsiteX5" fmla="*/ 2061882 w 2752165"/>
+              <a:gd name="connsiteY5" fmla="*/ 3065929 h 3065929"/>
+              <a:gd name="connsiteX6" fmla="*/ 313765 w 2752165"/>
+              <a:gd name="connsiteY6" fmla="*/ 3048000 h 3065929"/>
+              <a:gd name="connsiteX7" fmla="*/ 107577 w 2752165"/>
+              <a:gd name="connsiteY7" fmla="*/ 2868706 h 3065929"/>
+              <a:gd name="connsiteX8" fmla="*/ 0 w 2752165"/>
+              <a:gd name="connsiteY8" fmla="*/ 2294964 h 3065929"/>
+              <a:gd name="connsiteX9" fmla="*/ 62753 w 2752165"/>
+              <a:gd name="connsiteY9" fmla="*/ 1272988 h 3065929"/>
+              <a:gd name="connsiteX10" fmla="*/ 224118 w 2752165"/>
+              <a:gd name="connsiteY10" fmla="*/ 412376 h 3065929"/>
+              <a:gd name="connsiteX11" fmla="*/ 546847 w 2752165"/>
+              <a:gd name="connsiteY11" fmla="*/ 26894 h 3065929"/>
+              <a:gd name="connsiteX12" fmla="*/ 1120588 w 2752165"/>
+              <a:gd name="connsiteY12" fmla="*/ 0 h 3065929"/>
+              <a:gd name="connsiteX13" fmla="*/ 1963271 w 2752165"/>
+              <a:gd name="connsiteY13" fmla="*/ 26894 h 3065929"/>
+              <a:gd name="connsiteX14" fmla="*/ 2182607 w 2752165"/>
+              <a:gd name="connsiteY14" fmla="*/ 170030 h 3065929"/>
+              <a:gd name="connsiteX15" fmla="*/ 2180515 w 2752165"/>
+              <a:gd name="connsiteY15" fmla="*/ 464073 h 3065929"/>
+              <a:gd name="connsiteX16" fmla="*/ 1954306 w 2752165"/>
+              <a:gd name="connsiteY16" fmla="*/ 546847 h 3065929"/>
+              <a:gd name="connsiteX17" fmla="*/ 1335741 w 2752165"/>
+              <a:gd name="connsiteY17" fmla="*/ 528917 h 3065929"/>
+              <a:gd name="connsiteX18" fmla="*/ 990600 w 2752165"/>
+              <a:gd name="connsiteY18" fmla="*/ 528917 h 3065929"/>
+              <a:gd name="connsiteX19" fmla="*/ 923365 w 2752165"/>
+              <a:gd name="connsiteY19" fmla="*/ 726141 h 3065929"/>
+              <a:gd name="connsiteX20" fmla="*/ 1004047 w 2752165"/>
+              <a:gd name="connsiteY20" fmla="*/ 896470 h 3065929"/>
+              <a:gd name="connsiteX21" fmla="*/ 1586753 w 2752165"/>
+              <a:gd name="connsiteY21" fmla="*/ 860611 h 3065929"/>
+              <a:gd name="connsiteX22" fmla="*/ 2043953 w 2752165"/>
+              <a:gd name="connsiteY22" fmla="*/ 887506 h 3065929"/>
+              <a:gd name="connsiteX23" fmla="*/ 2268071 w 2752165"/>
+              <a:gd name="connsiteY23" fmla="*/ 968188 h 3065929"/>
+              <a:gd name="connsiteX24" fmla="*/ 2286000 w 2752165"/>
+              <a:gd name="connsiteY24" fmla="*/ 1156447 h 3065929"/>
+              <a:gd name="connsiteX25" fmla="*/ 2214282 w 2752165"/>
+              <a:gd name="connsiteY25" fmla="*/ 1299882 h 3065929"/>
+              <a:gd name="connsiteX26" fmla="*/ 1766047 w 2752165"/>
+              <a:gd name="connsiteY26" fmla="*/ 1335741 h 3065929"/>
+              <a:gd name="connsiteX27" fmla="*/ 609600 w 2752165"/>
+              <a:gd name="connsiteY27" fmla="*/ 1353670 h 3065929"/>
+              <a:gd name="connsiteX28" fmla="*/ 426122 w 2752165"/>
+              <a:gd name="connsiteY28" fmla="*/ 1444513 h 3065929"/>
+              <a:gd name="connsiteX29" fmla="*/ 430306 w 2752165"/>
+              <a:gd name="connsiteY29" fmla="*/ 1649506 h 3065929"/>
+              <a:gd name="connsiteX30" fmla="*/ 546847 w 2752165"/>
+              <a:gd name="connsiteY30" fmla="*/ 1792941 h 3065929"/>
+              <a:gd name="connsiteX31" fmla="*/ 1515035 w 2752165"/>
+              <a:gd name="connsiteY31" fmla="*/ 1766047 h 3065929"/>
+              <a:gd name="connsiteX32" fmla="*/ 2384612 w 2752165"/>
+              <a:gd name="connsiteY32" fmla="*/ 1748117 h 3065929"/>
+              <a:gd name="connsiteX0" fmla="*/ 2384612 w 2752165"/>
+              <a:gd name="connsiteY0" fmla="*/ 1748117 h 3065929"/>
+              <a:gd name="connsiteX1" fmla="*/ 2662518 w 2752165"/>
+              <a:gd name="connsiteY1" fmla="*/ 2008094 h 3065929"/>
+              <a:gd name="connsiteX2" fmla="*/ 2752165 w 2752165"/>
+              <a:gd name="connsiteY2" fmla="*/ 2456329 h 3065929"/>
+              <a:gd name="connsiteX3" fmla="*/ 2743200 w 2752165"/>
+              <a:gd name="connsiteY3" fmla="*/ 2895600 h 3065929"/>
+              <a:gd name="connsiteX4" fmla="*/ 2537012 w 2752165"/>
+              <a:gd name="connsiteY4" fmla="*/ 2985247 h 3065929"/>
+              <a:gd name="connsiteX5" fmla="*/ 2061882 w 2752165"/>
+              <a:gd name="connsiteY5" fmla="*/ 3065929 h 3065929"/>
+              <a:gd name="connsiteX6" fmla="*/ 313765 w 2752165"/>
+              <a:gd name="connsiteY6" fmla="*/ 3048000 h 3065929"/>
+              <a:gd name="connsiteX7" fmla="*/ 107577 w 2752165"/>
+              <a:gd name="connsiteY7" fmla="*/ 2868706 h 3065929"/>
+              <a:gd name="connsiteX8" fmla="*/ 0 w 2752165"/>
+              <a:gd name="connsiteY8" fmla="*/ 2294964 h 3065929"/>
+              <a:gd name="connsiteX9" fmla="*/ 62753 w 2752165"/>
+              <a:gd name="connsiteY9" fmla="*/ 1272988 h 3065929"/>
+              <a:gd name="connsiteX10" fmla="*/ 224118 w 2752165"/>
+              <a:gd name="connsiteY10" fmla="*/ 412376 h 3065929"/>
+              <a:gd name="connsiteX11" fmla="*/ 546847 w 2752165"/>
+              <a:gd name="connsiteY11" fmla="*/ 26894 h 3065929"/>
+              <a:gd name="connsiteX12" fmla="*/ 1120588 w 2752165"/>
+              <a:gd name="connsiteY12" fmla="*/ 0 h 3065929"/>
+              <a:gd name="connsiteX13" fmla="*/ 1963271 w 2752165"/>
+              <a:gd name="connsiteY13" fmla="*/ 26894 h 3065929"/>
+              <a:gd name="connsiteX14" fmla="*/ 2182607 w 2752165"/>
+              <a:gd name="connsiteY14" fmla="*/ 170030 h 3065929"/>
+              <a:gd name="connsiteX15" fmla="*/ 2180515 w 2752165"/>
+              <a:gd name="connsiteY15" fmla="*/ 464073 h 3065929"/>
+              <a:gd name="connsiteX16" fmla="*/ 1954306 w 2752165"/>
+              <a:gd name="connsiteY16" fmla="*/ 546847 h 3065929"/>
+              <a:gd name="connsiteX17" fmla="*/ 1335741 w 2752165"/>
+              <a:gd name="connsiteY17" fmla="*/ 528917 h 3065929"/>
+              <a:gd name="connsiteX18" fmla="*/ 990600 w 2752165"/>
+              <a:gd name="connsiteY18" fmla="*/ 528917 h 3065929"/>
+              <a:gd name="connsiteX19" fmla="*/ 923365 w 2752165"/>
+              <a:gd name="connsiteY19" fmla="*/ 726141 h 3065929"/>
+              <a:gd name="connsiteX20" fmla="*/ 1004047 w 2752165"/>
+              <a:gd name="connsiteY20" fmla="*/ 896470 h 3065929"/>
+              <a:gd name="connsiteX21" fmla="*/ 1596913 w 2752165"/>
+              <a:gd name="connsiteY21" fmla="*/ 896171 h 3065929"/>
+              <a:gd name="connsiteX22" fmla="*/ 2043953 w 2752165"/>
+              <a:gd name="connsiteY22" fmla="*/ 887506 h 3065929"/>
+              <a:gd name="connsiteX23" fmla="*/ 2268071 w 2752165"/>
+              <a:gd name="connsiteY23" fmla="*/ 968188 h 3065929"/>
+              <a:gd name="connsiteX24" fmla="*/ 2286000 w 2752165"/>
+              <a:gd name="connsiteY24" fmla="*/ 1156447 h 3065929"/>
+              <a:gd name="connsiteX25" fmla="*/ 2214282 w 2752165"/>
+              <a:gd name="connsiteY25" fmla="*/ 1299882 h 3065929"/>
+              <a:gd name="connsiteX26" fmla="*/ 1766047 w 2752165"/>
+              <a:gd name="connsiteY26" fmla="*/ 1335741 h 3065929"/>
+              <a:gd name="connsiteX27" fmla="*/ 609600 w 2752165"/>
+              <a:gd name="connsiteY27" fmla="*/ 1353670 h 3065929"/>
+              <a:gd name="connsiteX28" fmla="*/ 426122 w 2752165"/>
+              <a:gd name="connsiteY28" fmla="*/ 1444513 h 3065929"/>
+              <a:gd name="connsiteX29" fmla="*/ 430306 w 2752165"/>
+              <a:gd name="connsiteY29" fmla="*/ 1649506 h 3065929"/>
+              <a:gd name="connsiteX30" fmla="*/ 546847 w 2752165"/>
+              <a:gd name="connsiteY30" fmla="*/ 1792941 h 3065929"/>
+              <a:gd name="connsiteX31" fmla="*/ 1515035 w 2752165"/>
+              <a:gd name="connsiteY31" fmla="*/ 1766047 h 3065929"/>
+              <a:gd name="connsiteX32" fmla="*/ 2384612 w 2752165"/>
+              <a:gd name="connsiteY32" fmla="*/ 1748117 h 3065929"/>
+              <a:gd name="connsiteX0" fmla="*/ 2384612 w 2752165"/>
+              <a:gd name="connsiteY0" fmla="*/ 1748117 h 3065929"/>
+              <a:gd name="connsiteX1" fmla="*/ 2662518 w 2752165"/>
+              <a:gd name="connsiteY1" fmla="*/ 2008094 h 3065929"/>
+              <a:gd name="connsiteX2" fmla="*/ 2752165 w 2752165"/>
+              <a:gd name="connsiteY2" fmla="*/ 2456329 h 3065929"/>
+              <a:gd name="connsiteX3" fmla="*/ 2743200 w 2752165"/>
+              <a:gd name="connsiteY3" fmla="*/ 2895600 h 3065929"/>
+              <a:gd name="connsiteX4" fmla="*/ 2537012 w 2752165"/>
+              <a:gd name="connsiteY4" fmla="*/ 2985247 h 3065929"/>
+              <a:gd name="connsiteX5" fmla="*/ 2061882 w 2752165"/>
+              <a:gd name="connsiteY5" fmla="*/ 3065929 h 3065929"/>
+              <a:gd name="connsiteX6" fmla="*/ 313765 w 2752165"/>
+              <a:gd name="connsiteY6" fmla="*/ 3048000 h 3065929"/>
+              <a:gd name="connsiteX7" fmla="*/ 107577 w 2752165"/>
+              <a:gd name="connsiteY7" fmla="*/ 2868706 h 3065929"/>
+              <a:gd name="connsiteX8" fmla="*/ 0 w 2752165"/>
+              <a:gd name="connsiteY8" fmla="*/ 2294964 h 3065929"/>
+              <a:gd name="connsiteX9" fmla="*/ 62753 w 2752165"/>
+              <a:gd name="connsiteY9" fmla="*/ 1272988 h 3065929"/>
+              <a:gd name="connsiteX10" fmla="*/ 224118 w 2752165"/>
+              <a:gd name="connsiteY10" fmla="*/ 412376 h 3065929"/>
+              <a:gd name="connsiteX11" fmla="*/ 546847 w 2752165"/>
+              <a:gd name="connsiteY11" fmla="*/ 26894 h 3065929"/>
+              <a:gd name="connsiteX12" fmla="*/ 1120588 w 2752165"/>
+              <a:gd name="connsiteY12" fmla="*/ 0 h 3065929"/>
+              <a:gd name="connsiteX13" fmla="*/ 1963271 w 2752165"/>
+              <a:gd name="connsiteY13" fmla="*/ 26894 h 3065929"/>
+              <a:gd name="connsiteX14" fmla="*/ 2182607 w 2752165"/>
+              <a:gd name="connsiteY14" fmla="*/ 170030 h 3065929"/>
+              <a:gd name="connsiteX15" fmla="*/ 2180515 w 2752165"/>
+              <a:gd name="connsiteY15" fmla="*/ 464073 h 3065929"/>
+              <a:gd name="connsiteX16" fmla="*/ 1954306 w 2752165"/>
+              <a:gd name="connsiteY16" fmla="*/ 546847 h 3065929"/>
+              <a:gd name="connsiteX17" fmla="*/ 1335741 w 2752165"/>
+              <a:gd name="connsiteY17" fmla="*/ 528917 h 3065929"/>
+              <a:gd name="connsiteX18" fmla="*/ 990600 w 2752165"/>
+              <a:gd name="connsiteY18" fmla="*/ 528917 h 3065929"/>
+              <a:gd name="connsiteX19" fmla="*/ 923365 w 2752165"/>
+              <a:gd name="connsiteY19" fmla="*/ 726141 h 3065929"/>
+              <a:gd name="connsiteX20" fmla="*/ 1004047 w 2752165"/>
+              <a:gd name="connsiteY20" fmla="*/ 896470 h 3065929"/>
+              <a:gd name="connsiteX21" fmla="*/ 1596913 w 2752165"/>
+              <a:gd name="connsiteY21" fmla="*/ 896171 h 3065929"/>
+              <a:gd name="connsiteX22" fmla="*/ 2043953 w 2752165"/>
+              <a:gd name="connsiteY22" fmla="*/ 887506 h 3065929"/>
+              <a:gd name="connsiteX23" fmla="*/ 2268071 w 2752165"/>
+              <a:gd name="connsiteY23" fmla="*/ 968188 h 3065929"/>
+              <a:gd name="connsiteX24" fmla="*/ 2286000 w 2752165"/>
+              <a:gd name="connsiteY24" fmla="*/ 1156447 h 3065929"/>
+              <a:gd name="connsiteX25" fmla="*/ 2214282 w 2752165"/>
+              <a:gd name="connsiteY25" fmla="*/ 1299882 h 3065929"/>
+              <a:gd name="connsiteX26" fmla="*/ 1766047 w 2752165"/>
+              <a:gd name="connsiteY26" fmla="*/ 1335741 h 3065929"/>
+              <a:gd name="connsiteX27" fmla="*/ 609600 w 2752165"/>
+              <a:gd name="connsiteY27" fmla="*/ 1353670 h 3065929"/>
+              <a:gd name="connsiteX28" fmla="*/ 426122 w 2752165"/>
+              <a:gd name="connsiteY28" fmla="*/ 1444513 h 3065929"/>
+              <a:gd name="connsiteX29" fmla="*/ 430306 w 2752165"/>
+              <a:gd name="connsiteY29" fmla="*/ 1649506 h 3065929"/>
+              <a:gd name="connsiteX30" fmla="*/ 551927 w 2752165"/>
+              <a:gd name="connsiteY30" fmla="*/ 1772621 h 3065929"/>
+              <a:gd name="connsiteX31" fmla="*/ 1515035 w 2752165"/>
+              <a:gd name="connsiteY31" fmla="*/ 1766047 h 3065929"/>
+              <a:gd name="connsiteX32" fmla="*/ 2384612 w 2752165"/>
+              <a:gd name="connsiteY32" fmla="*/ 1748117 h 3065929"/>
+              <a:gd name="connsiteX0" fmla="*/ 2384612 w 2752165"/>
+              <a:gd name="connsiteY0" fmla="*/ 1748117 h 3065929"/>
+              <a:gd name="connsiteX1" fmla="*/ 2662518 w 2752165"/>
+              <a:gd name="connsiteY1" fmla="*/ 2008094 h 3065929"/>
+              <a:gd name="connsiteX2" fmla="*/ 2752165 w 2752165"/>
+              <a:gd name="connsiteY2" fmla="*/ 2456329 h 3065929"/>
+              <a:gd name="connsiteX3" fmla="*/ 2641600 w 2752165"/>
+              <a:gd name="connsiteY3" fmla="*/ 2900680 h 3065929"/>
+              <a:gd name="connsiteX4" fmla="*/ 2537012 w 2752165"/>
+              <a:gd name="connsiteY4" fmla="*/ 2985247 h 3065929"/>
+              <a:gd name="connsiteX5" fmla="*/ 2061882 w 2752165"/>
+              <a:gd name="connsiteY5" fmla="*/ 3065929 h 3065929"/>
+              <a:gd name="connsiteX6" fmla="*/ 313765 w 2752165"/>
+              <a:gd name="connsiteY6" fmla="*/ 3048000 h 3065929"/>
+              <a:gd name="connsiteX7" fmla="*/ 107577 w 2752165"/>
+              <a:gd name="connsiteY7" fmla="*/ 2868706 h 3065929"/>
+              <a:gd name="connsiteX8" fmla="*/ 0 w 2752165"/>
+              <a:gd name="connsiteY8" fmla="*/ 2294964 h 3065929"/>
+              <a:gd name="connsiteX9" fmla="*/ 62753 w 2752165"/>
+              <a:gd name="connsiteY9" fmla="*/ 1272988 h 3065929"/>
+              <a:gd name="connsiteX10" fmla="*/ 224118 w 2752165"/>
+              <a:gd name="connsiteY10" fmla="*/ 412376 h 3065929"/>
+              <a:gd name="connsiteX11" fmla="*/ 546847 w 2752165"/>
+              <a:gd name="connsiteY11" fmla="*/ 26894 h 3065929"/>
+              <a:gd name="connsiteX12" fmla="*/ 1120588 w 2752165"/>
+              <a:gd name="connsiteY12" fmla="*/ 0 h 3065929"/>
+              <a:gd name="connsiteX13" fmla="*/ 1963271 w 2752165"/>
+              <a:gd name="connsiteY13" fmla="*/ 26894 h 3065929"/>
+              <a:gd name="connsiteX14" fmla="*/ 2182607 w 2752165"/>
+              <a:gd name="connsiteY14" fmla="*/ 170030 h 3065929"/>
+              <a:gd name="connsiteX15" fmla="*/ 2180515 w 2752165"/>
+              <a:gd name="connsiteY15" fmla="*/ 464073 h 3065929"/>
+              <a:gd name="connsiteX16" fmla="*/ 1954306 w 2752165"/>
+              <a:gd name="connsiteY16" fmla="*/ 546847 h 3065929"/>
+              <a:gd name="connsiteX17" fmla="*/ 1335741 w 2752165"/>
+              <a:gd name="connsiteY17" fmla="*/ 528917 h 3065929"/>
+              <a:gd name="connsiteX18" fmla="*/ 990600 w 2752165"/>
+              <a:gd name="connsiteY18" fmla="*/ 528917 h 3065929"/>
+              <a:gd name="connsiteX19" fmla="*/ 923365 w 2752165"/>
+              <a:gd name="connsiteY19" fmla="*/ 726141 h 3065929"/>
+              <a:gd name="connsiteX20" fmla="*/ 1004047 w 2752165"/>
+              <a:gd name="connsiteY20" fmla="*/ 896470 h 3065929"/>
+              <a:gd name="connsiteX21" fmla="*/ 1596913 w 2752165"/>
+              <a:gd name="connsiteY21" fmla="*/ 896171 h 3065929"/>
+              <a:gd name="connsiteX22" fmla="*/ 2043953 w 2752165"/>
+              <a:gd name="connsiteY22" fmla="*/ 887506 h 3065929"/>
+              <a:gd name="connsiteX23" fmla="*/ 2268071 w 2752165"/>
+              <a:gd name="connsiteY23" fmla="*/ 968188 h 3065929"/>
+              <a:gd name="connsiteX24" fmla="*/ 2286000 w 2752165"/>
+              <a:gd name="connsiteY24" fmla="*/ 1156447 h 3065929"/>
+              <a:gd name="connsiteX25" fmla="*/ 2214282 w 2752165"/>
+              <a:gd name="connsiteY25" fmla="*/ 1299882 h 3065929"/>
+              <a:gd name="connsiteX26" fmla="*/ 1766047 w 2752165"/>
+              <a:gd name="connsiteY26" fmla="*/ 1335741 h 3065929"/>
+              <a:gd name="connsiteX27" fmla="*/ 609600 w 2752165"/>
+              <a:gd name="connsiteY27" fmla="*/ 1353670 h 3065929"/>
+              <a:gd name="connsiteX28" fmla="*/ 426122 w 2752165"/>
+              <a:gd name="connsiteY28" fmla="*/ 1444513 h 3065929"/>
+              <a:gd name="connsiteX29" fmla="*/ 430306 w 2752165"/>
+              <a:gd name="connsiteY29" fmla="*/ 1649506 h 3065929"/>
+              <a:gd name="connsiteX30" fmla="*/ 551927 w 2752165"/>
+              <a:gd name="connsiteY30" fmla="*/ 1772621 h 3065929"/>
+              <a:gd name="connsiteX31" fmla="*/ 1515035 w 2752165"/>
+              <a:gd name="connsiteY31" fmla="*/ 1766047 h 3065929"/>
+              <a:gd name="connsiteX32" fmla="*/ 2384612 w 2752165"/>
+              <a:gd name="connsiteY32" fmla="*/ 1748117 h 3065929"/>
+              <a:gd name="connsiteX0" fmla="*/ 2384612 w 2681045"/>
+              <a:gd name="connsiteY0" fmla="*/ 1748117 h 3065929"/>
+              <a:gd name="connsiteX1" fmla="*/ 2662518 w 2681045"/>
+              <a:gd name="connsiteY1" fmla="*/ 2008094 h 3065929"/>
+              <a:gd name="connsiteX2" fmla="*/ 2681045 w 2681045"/>
+              <a:gd name="connsiteY2" fmla="*/ 2430929 h 3065929"/>
+              <a:gd name="connsiteX3" fmla="*/ 2641600 w 2681045"/>
+              <a:gd name="connsiteY3" fmla="*/ 2900680 h 3065929"/>
+              <a:gd name="connsiteX4" fmla="*/ 2537012 w 2681045"/>
+              <a:gd name="connsiteY4" fmla="*/ 2985247 h 3065929"/>
+              <a:gd name="connsiteX5" fmla="*/ 2061882 w 2681045"/>
+              <a:gd name="connsiteY5" fmla="*/ 3065929 h 3065929"/>
+              <a:gd name="connsiteX6" fmla="*/ 313765 w 2681045"/>
+              <a:gd name="connsiteY6" fmla="*/ 3048000 h 3065929"/>
+              <a:gd name="connsiteX7" fmla="*/ 107577 w 2681045"/>
+              <a:gd name="connsiteY7" fmla="*/ 2868706 h 3065929"/>
+              <a:gd name="connsiteX8" fmla="*/ 0 w 2681045"/>
+              <a:gd name="connsiteY8" fmla="*/ 2294964 h 3065929"/>
+              <a:gd name="connsiteX9" fmla="*/ 62753 w 2681045"/>
+              <a:gd name="connsiteY9" fmla="*/ 1272988 h 3065929"/>
+              <a:gd name="connsiteX10" fmla="*/ 224118 w 2681045"/>
+              <a:gd name="connsiteY10" fmla="*/ 412376 h 3065929"/>
+              <a:gd name="connsiteX11" fmla="*/ 546847 w 2681045"/>
+              <a:gd name="connsiteY11" fmla="*/ 26894 h 3065929"/>
+              <a:gd name="connsiteX12" fmla="*/ 1120588 w 2681045"/>
+              <a:gd name="connsiteY12" fmla="*/ 0 h 3065929"/>
+              <a:gd name="connsiteX13" fmla="*/ 1963271 w 2681045"/>
+              <a:gd name="connsiteY13" fmla="*/ 26894 h 3065929"/>
+              <a:gd name="connsiteX14" fmla="*/ 2182607 w 2681045"/>
+              <a:gd name="connsiteY14" fmla="*/ 170030 h 3065929"/>
+              <a:gd name="connsiteX15" fmla="*/ 2180515 w 2681045"/>
+              <a:gd name="connsiteY15" fmla="*/ 464073 h 3065929"/>
+              <a:gd name="connsiteX16" fmla="*/ 1954306 w 2681045"/>
+              <a:gd name="connsiteY16" fmla="*/ 546847 h 3065929"/>
+              <a:gd name="connsiteX17" fmla="*/ 1335741 w 2681045"/>
+              <a:gd name="connsiteY17" fmla="*/ 528917 h 3065929"/>
+              <a:gd name="connsiteX18" fmla="*/ 990600 w 2681045"/>
+              <a:gd name="connsiteY18" fmla="*/ 528917 h 3065929"/>
+              <a:gd name="connsiteX19" fmla="*/ 923365 w 2681045"/>
+              <a:gd name="connsiteY19" fmla="*/ 726141 h 3065929"/>
+              <a:gd name="connsiteX20" fmla="*/ 1004047 w 2681045"/>
+              <a:gd name="connsiteY20" fmla="*/ 896470 h 3065929"/>
+              <a:gd name="connsiteX21" fmla="*/ 1596913 w 2681045"/>
+              <a:gd name="connsiteY21" fmla="*/ 896171 h 3065929"/>
+              <a:gd name="connsiteX22" fmla="*/ 2043953 w 2681045"/>
+              <a:gd name="connsiteY22" fmla="*/ 887506 h 3065929"/>
+              <a:gd name="connsiteX23" fmla="*/ 2268071 w 2681045"/>
+              <a:gd name="connsiteY23" fmla="*/ 968188 h 3065929"/>
+              <a:gd name="connsiteX24" fmla="*/ 2286000 w 2681045"/>
+              <a:gd name="connsiteY24" fmla="*/ 1156447 h 3065929"/>
+              <a:gd name="connsiteX25" fmla="*/ 2214282 w 2681045"/>
+              <a:gd name="connsiteY25" fmla="*/ 1299882 h 3065929"/>
+              <a:gd name="connsiteX26" fmla="*/ 1766047 w 2681045"/>
+              <a:gd name="connsiteY26" fmla="*/ 1335741 h 3065929"/>
+              <a:gd name="connsiteX27" fmla="*/ 609600 w 2681045"/>
+              <a:gd name="connsiteY27" fmla="*/ 1353670 h 3065929"/>
+              <a:gd name="connsiteX28" fmla="*/ 426122 w 2681045"/>
+              <a:gd name="connsiteY28" fmla="*/ 1444513 h 3065929"/>
+              <a:gd name="connsiteX29" fmla="*/ 430306 w 2681045"/>
+              <a:gd name="connsiteY29" fmla="*/ 1649506 h 3065929"/>
+              <a:gd name="connsiteX30" fmla="*/ 551927 w 2681045"/>
+              <a:gd name="connsiteY30" fmla="*/ 1772621 h 3065929"/>
+              <a:gd name="connsiteX31" fmla="*/ 1515035 w 2681045"/>
+              <a:gd name="connsiteY31" fmla="*/ 1766047 h 3065929"/>
+              <a:gd name="connsiteX32" fmla="*/ 2384612 w 2681045"/>
+              <a:gd name="connsiteY32" fmla="*/ 1748117 h 3065929"/>
+              <a:gd name="connsiteX0" fmla="*/ 2384612 w 2681045"/>
+              <a:gd name="connsiteY0" fmla="*/ 1748117 h 3065929"/>
+              <a:gd name="connsiteX1" fmla="*/ 2616798 w 2681045"/>
+              <a:gd name="connsiteY1" fmla="*/ 2028414 h 3065929"/>
+              <a:gd name="connsiteX2" fmla="*/ 2681045 w 2681045"/>
+              <a:gd name="connsiteY2" fmla="*/ 2430929 h 3065929"/>
+              <a:gd name="connsiteX3" fmla="*/ 2641600 w 2681045"/>
+              <a:gd name="connsiteY3" fmla="*/ 2900680 h 3065929"/>
+              <a:gd name="connsiteX4" fmla="*/ 2537012 w 2681045"/>
+              <a:gd name="connsiteY4" fmla="*/ 2985247 h 3065929"/>
+              <a:gd name="connsiteX5" fmla="*/ 2061882 w 2681045"/>
+              <a:gd name="connsiteY5" fmla="*/ 3065929 h 3065929"/>
+              <a:gd name="connsiteX6" fmla="*/ 313765 w 2681045"/>
+              <a:gd name="connsiteY6" fmla="*/ 3048000 h 3065929"/>
+              <a:gd name="connsiteX7" fmla="*/ 107577 w 2681045"/>
+              <a:gd name="connsiteY7" fmla="*/ 2868706 h 3065929"/>
+              <a:gd name="connsiteX8" fmla="*/ 0 w 2681045"/>
+              <a:gd name="connsiteY8" fmla="*/ 2294964 h 3065929"/>
+              <a:gd name="connsiteX9" fmla="*/ 62753 w 2681045"/>
+              <a:gd name="connsiteY9" fmla="*/ 1272988 h 3065929"/>
+              <a:gd name="connsiteX10" fmla="*/ 224118 w 2681045"/>
+              <a:gd name="connsiteY10" fmla="*/ 412376 h 3065929"/>
+              <a:gd name="connsiteX11" fmla="*/ 546847 w 2681045"/>
+              <a:gd name="connsiteY11" fmla="*/ 26894 h 3065929"/>
+              <a:gd name="connsiteX12" fmla="*/ 1120588 w 2681045"/>
+              <a:gd name="connsiteY12" fmla="*/ 0 h 3065929"/>
+              <a:gd name="connsiteX13" fmla="*/ 1963271 w 2681045"/>
+              <a:gd name="connsiteY13" fmla="*/ 26894 h 3065929"/>
+              <a:gd name="connsiteX14" fmla="*/ 2182607 w 2681045"/>
+              <a:gd name="connsiteY14" fmla="*/ 170030 h 3065929"/>
+              <a:gd name="connsiteX15" fmla="*/ 2180515 w 2681045"/>
+              <a:gd name="connsiteY15" fmla="*/ 464073 h 3065929"/>
+              <a:gd name="connsiteX16" fmla="*/ 1954306 w 2681045"/>
+              <a:gd name="connsiteY16" fmla="*/ 546847 h 3065929"/>
+              <a:gd name="connsiteX17" fmla="*/ 1335741 w 2681045"/>
+              <a:gd name="connsiteY17" fmla="*/ 528917 h 3065929"/>
+              <a:gd name="connsiteX18" fmla="*/ 990600 w 2681045"/>
+              <a:gd name="connsiteY18" fmla="*/ 528917 h 3065929"/>
+              <a:gd name="connsiteX19" fmla="*/ 923365 w 2681045"/>
+              <a:gd name="connsiteY19" fmla="*/ 726141 h 3065929"/>
+              <a:gd name="connsiteX20" fmla="*/ 1004047 w 2681045"/>
+              <a:gd name="connsiteY20" fmla="*/ 896470 h 3065929"/>
+              <a:gd name="connsiteX21" fmla="*/ 1596913 w 2681045"/>
+              <a:gd name="connsiteY21" fmla="*/ 896171 h 3065929"/>
+              <a:gd name="connsiteX22" fmla="*/ 2043953 w 2681045"/>
+              <a:gd name="connsiteY22" fmla="*/ 887506 h 3065929"/>
+              <a:gd name="connsiteX23" fmla="*/ 2268071 w 2681045"/>
+              <a:gd name="connsiteY23" fmla="*/ 968188 h 3065929"/>
+              <a:gd name="connsiteX24" fmla="*/ 2286000 w 2681045"/>
+              <a:gd name="connsiteY24" fmla="*/ 1156447 h 3065929"/>
+              <a:gd name="connsiteX25" fmla="*/ 2214282 w 2681045"/>
+              <a:gd name="connsiteY25" fmla="*/ 1299882 h 3065929"/>
+              <a:gd name="connsiteX26" fmla="*/ 1766047 w 2681045"/>
+              <a:gd name="connsiteY26" fmla="*/ 1335741 h 3065929"/>
+              <a:gd name="connsiteX27" fmla="*/ 609600 w 2681045"/>
+              <a:gd name="connsiteY27" fmla="*/ 1353670 h 3065929"/>
+              <a:gd name="connsiteX28" fmla="*/ 426122 w 2681045"/>
+              <a:gd name="connsiteY28" fmla="*/ 1444513 h 3065929"/>
+              <a:gd name="connsiteX29" fmla="*/ 430306 w 2681045"/>
+              <a:gd name="connsiteY29" fmla="*/ 1649506 h 3065929"/>
+              <a:gd name="connsiteX30" fmla="*/ 551927 w 2681045"/>
+              <a:gd name="connsiteY30" fmla="*/ 1772621 h 3065929"/>
+              <a:gd name="connsiteX31" fmla="*/ 1515035 w 2681045"/>
+              <a:gd name="connsiteY31" fmla="*/ 1766047 h 3065929"/>
+              <a:gd name="connsiteX32" fmla="*/ 2384612 w 2681045"/>
+              <a:gd name="connsiteY32" fmla="*/ 1748117 h 3065929"/>
+              <a:gd name="connsiteX0" fmla="*/ 2384612 w 2641600"/>
+              <a:gd name="connsiteY0" fmla="*/ 1748117 h 3065929"/>
+              <a:gd name="connsiteX1" fmla="*/ 2616798 w 2641600"/>
+              <a:gd name="connsiteY1" fmla="*/ 2028414 h 3065929"/>
+              <a:gd name="connsiteX2" fmla="*/ 2635325 w 2641600"/>
+              <a:gd name="connsiteY2" fmla="*/ 2436009 h 3065929"/>
+              <a:gd name="connsiteX3" fmla="*/ 2641600 w 2641600"/>
+              <a:gd name="connsiteY3" fmla="*/ 2900680 h 3065929"/>
+              <a:gd name="connsiteX4" fmla="*/ 2537012 w 2641600"/>
+              <a:gd name="connsiteY4" fmla="*/ 2985247 h 3065929"/>
+              <a:gd name="connsiteX5" fmla="*/ 2061882 w 2641600"/>
+              <a:gd name="connsiteY5" fmla="*/ 3065929 h 3065929"/>
+              <a:gd name="connsiteX6" fmla="*/ 313765 w 2641600"/>
+              <a:gd name="connsiteY6" fmla="*/ 3048000 h 3065929"/>
+              <a:gd name="connsiteX7" fmla="*/ 107577 w 2641600"/>
+              <a:gd name="connsiteY7" fmla="*/ 2868706 h 3065929"/>
+              <a:gd name="connsiteX8" fmla="*/ 0 w 2641600"/>
+              <a:gd name="connsiteY8" fmla="*/ 2294964 h 3065929"/>
+              <a:gd name="connsiteX9" fmla="*/ 62753 w 2641600"/>
+              <a:gd name="connsiteY9" fmla="*/ 1272988 h 3065929"/>
+              <a:gd name="connsiteX10" fmla="*/ 224118 w 2641600"/>
+              <a:gd name="connsiteY10" fmla="*/ 412376 h 3065929"/>
+              <a:gd name="connsiteX11" fmla="*/ 546847 w 2641600"/>
+              <a:gd name="connsiteY11" fmla="*/ 26894 h 3065929"/>
+              <a:gd name="connsiteX12" fmla="*/ 1120588 w 2641600"/>
+              <a:gd name="connsiteY12" fmla="*/ 0 h 3065929"/>
+              <a:gd name="connsiteX13" fmla="*/ 1963271 w 2641600"/>
+              <a:gd name="connsiteY13" fmla="*/ 26894 h 3065929"/>
+              <a:gd name="connsiteX14" fmla="*/ 2182607 w 2641600"/>
+              <a:gd name="connsiteY14" fmla="*/ 170030 h 3065929"/>
+              <a:gd name="connsiteX15" fmla="*/ 2180515 w 2641600"/>
+              <a:gd name="connsiteY15" fmla="*/ 464073 h 3065929"/>
+              <a:gd name="connsiteX16" fmla="*/ 1954306 w 2641600"/>
+              <a:gd name="connsiteY16" fmla="*/ 546847 h 3065929"/>
+              <a:gd name="connsiteX17" fmla="*/ 1335741 w 2641600"/>
+              <a:gd name="connsiteY17" fmla="*/ 528917 h 3065929"/>
+              <a:gd name="connsiteX18" fmla="*/ 990600 w 2641600"/>
+              <a:gd name="connsiteY18" fmla="*/ 528917 h 3065929"/>
+              <a:gd name="connsiteX19" fmla="*/ 923365 w 2641600"/>
+              <a:gd name="connsiteY19" fmla="*/ 726141 h 3065929"/>
+              <a:gd name="connsiteX20" fmla="*/ 1004047 w 2641600"/>
+              <a:gd name="connsiteY20" fmla="*/ 896470 h 3065929"/>
+              <a:gd name="connsiteX21" fmla="*/ 1596913 w 2641600"/>
+              <a:gd name="connsiteY21" fmla="*/ 896171 h 3065929"/>
+              <a:gd name="connsiteX22" fmla="*/ 2043953 w 2641600"/>
+              <a:gd name="connsiteY22" fmla="*/ 887506 h 3065929"/>
+              <a:gd name="connsiteX23" fmla="*/ 2268071 w 2641600"/>
+              <a:gd name="connsiteY23" fmla="*/ 968188 h 3065929"/>
+              <a:gd name="connsiteX24" fmla="*/ 2286000 w 2641600"/>
+              <a:gd name="connsiteY24" fmla="*/ 1156447 h 3065929"/>
+              <a:gd name="connsiteX25" fmla="*/ 2214282 w 2641600"/>
+              <a:gd name="connsiteY25" fmla="*/ 1299882 h 3065929"/>
+              <a:gd name="connsiteX26" fmla="*/ 1766047 w 2641600"/>
+              <a:gd name="connsiteY26" fmla="*/ 1335741 h 3065929"/>
+              <a:gd name="connsiteX27" fmla="*/ 609600 w 2641600"/>
+              <a:gd name="connsiteY27" fmla="*/ 1353670 h 3065929"/>
+              <a:gd name="connsiteX28" fmla="*/ 426122 w 2641600"/>
+              <a:gd name="connsiteY28" fmla="*/ 1444513 h 3065929"/>
+              <a:gd name="connsiteX29" fmla="*/ 430306 w 2641600"/>
+              <a:gd name="connsiteY29" fmla="*/ 1649506 h 3065929"/>
+              <a:gd name="connsiteX30" fmla="*/ 551927 w 2641600"/>
+              <a:gd name="connsiteY30" fmla="*/ 1772621 h 3065929"/>
+              <a:gd name="connsiteX31" fmla="*/ 1515035 w 2641600"/>
+              <a:gd name="connsiteY31" fmla="*/ 1766047 h 3065929"/>
+              <a:gd name="connsiteX32" fmla="*/ 2384612 w 2641600"/>
+              <a:gd name="connsiteY32" fmla="*/ 1748117 h 3065929"/>
+              <a:gd name="connsiteX0" fmla="*/ 2384612 w 2635435"/>
+              <a:gd name="connsiteY0" fmla="*/ 1748117 h 3065929"/>
+              <a:gd name="connsiteX1" fmla="*/ 2616798 w 2635435"/>
+              <a:gd name="connsiteY1" fmla="*/ 2028414 h 3065929"/>
+              <a:gd name="connsiteX2" fmla="*/ 2635325 w 2635435"/>
+              <a:gd name="connsiteY2" fmla="*/ 2436009 h 3065929"/>
+              <a:gd name="connsiteX3" fmla="*/ 2611120 w 2635435"/>
+              <a:gd name="connsiteY3" fmla="*/ 2895600 h 3065929"/>
+              <a:gd name="connsiteX4" fmla="*/ 2537012 w 2635435"/>
+              <a:gd name="connsiteY4" fmla="*/ 2985247 h 3065929"/>
+              <a:gd name="connsiteX5" fmla="*/ 2061882 w 2635435"/>
+              <a:gd name="connsiteY5" fmla="*/ 3065929 h 3065929"/>
+              <a:gd name="connsiteX6" fmla="*/ 313765 w 2635435"/>
+              <a:gd name="connsiteY6" fmla="*/ 3048000 h 3065929"/>
+              <a:gd name="connsiteX7" fmla="*/ 107577 w 2635435"/>
+              <a:gd name="connsiteY7" fmla="*/ 2868706 h 3065929"/>
+              <a:gd name="connsiteX8" fmla="*/ 0 w 2635435"/>
+              <a:gd name="connsiteY8" fmla="*/ 2294964 h 3065929"/>
+              <a:gd name="connsiteX9" fmla="*/ 62753 w 2635435"/>
+              <a:gd name="connsiteY9" fmla="*/ 1272988 h 3065929"/>
+              <a:gd name="connsiteX10" fmla="*/ 224118 w 2635435"/>
+              <a:gd name="connsiteY10" fmla="*/ 412376 h 3065929"/>
+              <a:gd name="connsiteX11" fmla="*/ 546847 w 2635435"/>
+              <a:gd name="connsiteY11" fmla="*/ 26894 h 3065929"/>
+              <a:gd name="connsiteX12" fmla="*/ 1120588 w 2635435"/>
+              <a:gd name="connsiteY12" fmla="*/ 0 h 3065929"/>
+              <a:gd name="connsiteX13" fmla="*/ 1963271 w 2635435"/>
+              <a:gd name="connsiteY13" fmla="*/ 26894 h 3065929"/>
+              <a:gd name="connsiteX14" fmla="*/ 2182607 w 2635435"/>
+              <a:gd name="connsiteY14" fmla="*/ 170030 h 3065929"/>
+              <a:gd name="connsiteX15" fmla="*/ 2180515 w 2635435"/>
+              <a:gd name="connsiteY15" fmla="*/ 464073 h 3065929"/>
+              <a:gd name="connsiteX16" fmla="*/ 1954306 w 2635435"/>
+              <a:gd name="connsiteY16" fmla="*/ 546847 h 3065929"/>
+              <a:gd name="connsiteX17" fmla="*/ 1335741 w 2635435"/>
+              <a:gd name="connsiteY17" fmla="*/ 528917 h 3065929"/>
+              <a:gd name="connsiteX18" fmla="*/ 990600 w 2635435"/>
+              <a:gd name="connsiteY18" fmla="*/ 528917 h 3065929"/>
+              <a:gd name="connsiteX19" fmla="*/ 923365 w 2635435"/>
+              <a:gd name="connsiteY19" fmla="*/ 726141 h 3065929"/>
+              <a:gd name="connsiteX20" fmla="*/ 1004047 w 2635435"/>
+              <a:gd name="connsiteY20" fmla="*/ 896470 h 3065929"/>
+              <a:gd name="connsiteX21" fmla="*/ 1596913 w 2635435"/>
+              <a:gd name="connsiteY21" fmla="*/ 896171 h 3065929"/>
+              <a:gd name="connsiteX22" fmla="*/ 2043953 w 2635435"/>
+              <a:gd name="connsiteY22" fmla="*/ 887506 h 3065929"/>
+              <a:gd name="connsiteX23" fmla="*/ 2268071 w 2635435"/>
+              <a:gd name="connsiteY23" fmla="*/ 968188 h 3065929"/>
+              <a:gd name="connsiteX24" fmla="*/ 2286000 w 2635435"/>
+              <a:gd name="connsiteY24" fmla="*/ 1156447 h 3065929"/>
+              <a:gd name="connsiteX25" fmla="*/ 2214282 w 2635435"/>
+              <a:gd name="connsiteY25" fmla="*/ 1299882 h 3065929"/>
+              <a:gd name="connsiteX26" fmla="*/ 1766047 w 2635435"/>
+              <a:gd name="connsiteY26" fmla="*/ 1335741 h 3065929"/>
+              <a:gd name="connsiteX27" fmla="*/ 609600 w 2635435"/>
+              <a:gd name="connsiteY27" fmla="*/ 1353670 h 3065929"/>
+              <a:gd name="connsiteX28" fmla="*/ 426122 w 2635435"/>
+              <a:gd name="connsiteY28" fmla="*/ 1444513 h 3065929"/>
+              <a:gd name="connsiteX29" fmla="*/ 430306 w 2635435"/>
+              <a:gd name="connsiteY29" fmla="*/ 1649506 h 3065929"/>
+              <a:gd name="connsiteX30" fmla="*/ 551927 w 2635435"/>
+              <a:gd name="connsiteY30" fmla="*/ 1772621 h 3065929"/>
+              <a:gd name="connsiteX31" fmla="*/ 1515035 w 2635435"/>
+              <a:gd name="connsiteY31" fmla="*/ 1766047 h 3065929"/>
+              <a:gd name="connsiteX32" fmla="*/ 2384612 w 2635435"/>
+              <a:gd name="connsiteY32" fmla="*/ 1748117 h 3065929"/>
+              <a:gd name="connsiteX0" fmla="*/ 2384612 w 2635435"/>
+              <a:gd name="connsiteY0" fmla="*/ 1748117 h 3065929"/>
+              <a:gd name="connsiteX1" fmla="*/ 2571078 w 2635435"/>
+              <a:gd name="connsiteY1" fmla="*/ 1931894 h 3065929"/>
+              <a:gd name="connsiteX2" fmla="*/ 2635325 w 2635435"/>
+              <a:gd name="connsiteY2" fmla="*/ 2436009 h 3065929"/>
+              <a:gd name="connsiteX3" fmla="*/ 2611120 w 2635435"/>
+              <a:gd name="connsiteY3" fmla="*/ 2895600 h 3065929"/>
+              <a:gd name="connsiteX4" fmla="*/ 2537012 w 2635435"/>
+              <a:gd name="connsiteY4" fmla="*/ 2985247 h 3065929"/>
+              <a:gd name="connsiteX5" fmla="*/ 2061882 w 2635435"/>
+              <a:gd name="connsiteY5" fmla="*/ 3065929 h 3065929"/>
+              <a:gd name="connsiteX6" fmla="*/ 313765 w 2635435"/>
+              <a:gd name="connsiteY6" fmla="*/ 3048000 h 3065929"/>
+              <a:gd name="connsiteX7" fmla="*/ 107577 w 2635435"/>
+              <a:gd name="connsiteY7" fmla="*/ 2868706 h 3065929"/>
+              <a:gd name="connsiteX8" fmla="*/ 0 w 2635435"/>
+              <a:gd name="connsiteY8" fmla="*/ 2294964 h 3065929"/>
+              <a:gd name="connsiteX9" fmla="*/ 62753 w 2635435"/>
+              <a:gd name="connsiteY9" fmla="*/ 1272988 h 3065929"/>
+              <a:gd name="connsiteX10" fmla="*/ 224118 w 2635435"/>
+              <a:gd name="connsiteY10" fmla="*/ 412376 h 3065929"/>
+              <a:gd name="connsiteX11" fmla="*/ 546847 w 2635435"/>
+              <a:gd name="connsiteY11" fmla="*/ 26894 h 3065929"/>
+              <a:gd name="connsiteX12" fmla="*/ 1120588 w 2635435"/>
+              <a:gd name="connsiteY12" fmla="*/ 0 h 3065929"/>
+              <a:gd name="connsiteX13" fmla="*/ 1963271 w 2635435"/>
+              <a:gd name="connsiteY13" fmla="*/ 26894 h 3065929"/>
+              <a:gd name="connsiteX14" fmla="*/ 2182607 w 2635435"/>
+              <a:gd name="connsiteY14" fmla="*/ 170030 h 3065929"/>
+              <a:gd name="connsiteX15" fmla="*/ 2180515 w 2635435"/>
+              <a:gd name="connsiteY15" fmla="*/ 464073 h 3065929"/>
+              <a:gd name="connsiteX16" fmla="*/ 1954306 w 2635435"/>
+              <a:gd name="connsiteY16" fmla="*/ 546847 h 3065929"/>
+              <a:gd name="connsiteX17" fmla="*/ 1335741 w 2635435"/>
+              <a:gd name="connsiteY17" fmla="*/ 528917 h 3065929"/>
+              <a:gd name="connsiteX18" fmla="*/ 990600 w 2635435"/>
+              <a:gd name="connsiteY18" fmla="*/ 528917 h 3065929"/>
+              <a:gd name="connsiteX19" fmla="*/ 923365 w 2635435"/>
+              <a:gd name="connsiteY19" fmla="*/ 726141 h 3065929"/>
+              <a:gd name="connsiteX20" fmla="*/ 1004047 w 2635435"/>
+              <a:gd name="connsiteY20" fmla="*/ 896470 h 3065929"/>
+              <a:gd name="connsiteX21" fmla="*/ 1596913 w 2635435"/>
+              <a:gd name="connsiteY21" fmla="*/ 896171 h 3065929"/>
+              <a:gd name="connsiteX22" fmla="*/ 2043953 w 2635435"/>
+              <a:gd name="connsiteY22" fmla="*/ 887506 h 3065929"/>
+              <a:gd name="connsiteX23" fmla="*/ 2268071 w 2635435"/>
+              <a:gd name="connsiteY23" fmla="*/ 968188 h 3065929"/>
+              <a:gd name="connsiteX24" fmla="*/ 2286000 w 2635435"/>
+              <a:gd name="connsiteY24" fmla="*/ 1156447 h 3065929"/>
+              <a:gd name="connsiteX25" fmla="*/ 2214282 w 2635435"/>
+              <a:gd name="connsiteY25" fmla="*/ 1299882 h 3065929"/>
+              <a:gd name="connsiteX26" fmla="*/ 1766047 w 2635435"/>
+              <a:gd name="connsiteY26" fmla="*/ 1335741 h 3065929"/>
+              <a:gd name="connsiteX27" fmla="*/ 609600 w 2635435"/>
+              <a:gd name="connsiteY27" fmla="*/ 1353670 h 3065929"/>
+              <a:gd name="connsiteX28" fmla="*/ 426122 w 2635435"/>
+              <a:gd name="connsiteY28" fmla="*/ 1444513 h 3065929"/>
+              <a:gd name="connsiteX29" fmla="*/ 430306 w 2635435"/>
+              <a:gd name="connsiteY29" fmla="*/ 1649506 h 3065929"/>
+              <a:gd name="connsiteX30" fmla="*/ 551927 w 2635435"/>
+              <a:gd name="connsiteY30" fmla="*/ 1772621 h 3065929"/>
+              <a:gd name="connsiteX31" fmla="*/ 1515035 w 2635435"/>
+              <a:gd name="connsiteY31" fmla="*/ 1766047 h 3065929"/>
+              <a:gd name="connsiteX32" fmla="*/ 2384612 w 2635435"/>
+              <a:gd name="connsiteY32" fmla="*/ 1748117 h 3065929"/>
+              <a:gd name="connsiteX0" fmla="*/ 2384612 w 2655710"/>
+              <a:gd name="connsiteY0" fmla="*/ 1748117 h 3065929"/>
+              <a:gd name="connsiteX1" fmla="*/ 2571078 w 2655710"/>
+              <a:gd name="connsiteY1" fmla="*/ 1931894 h 3065929"/>
+              <a:gd name="connsiteX2" fmla="*/ 2655645 w 2655710"/>
+              <a:gd name="connsiteY2" fmla="*/ 2354729 h 3065929"/>
+              <a:gd name="connsiteX3" fmla="*/ 2611120 w 2655710"/>
+              <a:gd name="connsiteY3" fmla="*/ 2895600 h 3065929"/>
+              <a:gd name="connsiteX4" fmla="*/ 2537012 w 2655710"/>
+              <a:gd name="connsiteY4" fmla="*/ 2985247 h 3065929"/>
+              <a:gd name="connsiteX5" fmla="*/ 2061882 w 2655710"/>
+              <a:gd name="connsiteY5" fmla="*/ 3065929 h 3065929"/>
+              <a:gd name="connsiteX6" fmla="*/ 313765 w 2655710"/>
+              <a:gd name="connsiteY6" fmla="*/ 3048000 h 3065929"/>
+              <a:gd name="connsiteX7" fmla="*/ 107577 w 2655710"/>
+              <a:gd name="connsiteY7" fmla="*/ 2868706 h 3065929"/>
+              <a:gd name="connsiteX8" fmla="*/ 0 w 2655710"/>
+              <a:gd name="connsiteY8" fmla="*/ 2294964 h 3065929"/>
+              <a:gd name="connsiteX9" fmla="*/ 62753 w 2655710"/>
+              <a:gd name="connsiteY9" fmla="*/ 1272988 h 3065929"/>
+              <a:gd name="connsiteX10" fmla="*/ 224118 w 2655710"/>
+              <a:gd name="connsiteY10" fmla="*/ 412376 h 3065929"/>
+              <a:gd name="connsiteX11" fmla="*/ 546847 w 2655710"/>
+              <a:gd name="connsiteY11" fmla="*/ 26894 h 3065929"/>
+              <a:gd name="connsiteX12" fmla="*/ 1120588 w 2655710"/>
+              <a:gd name="connsiteY12" fmla="*/ 0 h 3065929"/>
+              <a:gd name="connsiteX13" fmla="*/ 1963271 w 2655710"/>
+              <a:gd name="connsiteY13" fmla="*/ 26894 h 3065929"/>
+              <a:gd name="connsiteX14" fmla="*/ 2182607 w 2655710"/>
+              <a:gd name="connsiteY14" fmla="*/ 170030 h 3065929"/>
+              <a:gd name="connsiteX15" fmla="*/ 2180515 w 2655710"/>
+              <a:gd name="connsiteY15" fmla="*/ 464073 h 3065929"/>
+              <a:gd name="connsiteX16" fmla="*/ 1954306 w 2655710"/>
+              <a:gd name="connsiteY16" fmla="*/ 546847 h 3065929"/>
+              <a:gd name="connsiteX17" fmla="*/ 1335741 w 2655710"/>
+              <a:gd name="connsiteY17" fmla="*/ 528917 h 3065929"/>
+              <a:gd name="connsiteX18" fmla="*/ 990600 w 2655710"/>
+              <a:gd name="connsiteY18" fmla="*/ 528917 h 3065929"/>
+              <a:gd name="connsiteX19" fmla="*/ 923365 w 2655710"/>
+              <a:gd name="connsiteY19" fmla="*/ 726141 h 3065929"/>
+              <a:gd name="connsiteX20" fmla="*/ 1004047 w 2655710"/>
+              <a:gd name="connsiteY20" fmla="*/ 896470 h 3065929"/>
+              <a:gd name="connsiteX21" fmla="*/ 1596913 w 2655710"/>
+              <a:gd name="connsiteY21" fmla="*/ 896171 h 3065929"/>
+              <a:gd name="connsiteX22" fmla="*/ 2043953 w 2655710"/>
+              <a:gd name="connsiteY22" fmla="*/ 887506 h 3065929"/>
+              <a:gd name="connsiteX23" fmla="*/ 2268071 w 2655710"/>
+              <a:gd name="connsiteY23" fmla="*/ 968188 h 3065929"/>
+              <a:gd name="connsiteX24" fmla="*/ 2286000 w 2655710"/>
+              <a:gd name="connsiteY24" fmla="*/ 1156447 h 3065929"/>
+              <a:gd name="connsiteX25" fmla="*/ 2214282 w 2655710"/>
+              <a:gd name="connsiteY25" fmla="*/ 1299882 h 3065929"/>
+              <a:gd name="connsiteX26" fmla="*/ 1766047 w 2655710"/>
+              <a:gd name="connsiteY26" fmla="*/ 1335741 h 3065929"/>
+              <a:gd name="connsiteX27" fmla="*/ 609600 w 2655710"/>
+              <a:gd name="connsiteY27" fmla="*/ 1353670 h 3065929"/>
+              <a:gd name="connsiteX28" fmla="*/ 426122 w 2655710"/>
+              <a:gd name="connsiteY28" fmla="*/ 1444513 h 3065929"/>
+              <a:gd name="connsiteX29" fmla="*/ 430306 w 2655710"/>
+              <a:gd name="connsiteY29" fmla="*/ 1649506 h 3065929"/>
+              <a:gd name="connsiteX30" fmla="*/ 551927 w 2655710"/>
+              <a:gd name="connsiteY30" fmla="*/ 1772621 h 3065929"/>
+              <a:gd name="connsiteX31" fmla="*/ 1515035 w 2655710"/>
+              <a:gd name="connsiteY31" fmla="*/ 1766047 h 3065929"/>
+              <a:gd name="connsiteX32" fmla="*/ 2384612 w 2655710"/>
+              <a:gd name="connsiteY32" fmla="*/ 1748117 h 3065929"/>
+              <a:gd name="connsiteX0" fmla="*/ 2384612 w 2655710"/>
+              <a:gd name="connsiteY0" fmla="*/ 1748117 h 3065929"/>
+              <a:gd name="connsiteX1" fmla="*/ 2606638 w 2655710"/>
+              <a:gd name="connsiteY1" fmla="*/ 1952214 h 3065929"/>
+              <a:gd name="connsiteX2" fmla="*/ 2655645 w 2655710"/>
+              <a:gd name="connsiteY2" fmla="*/ 2354729 h 3065929"/>
+              <a:gd name="connsiteX3" fmla="*/ 2611120 w 2655710"/>
+              <a:gd name="connsiteY3" fmla="*/ 2895600 h 3065929"/>
+              <a:gd name="connsiteX4" fmla="*/ 2537012 w 2655710"/>
+              <a:gd name="connsiteY4" fmla="*/ 2985247 h 3065929"/>
+              <a:gd name="connsiteX5" fmla="*/ 2061882 w 2655710"/>
+              <a:gd name="connsiteY5" fmla="*/ 3065929 h 3065929"/>
+              <a:gd name="connsiteX6" fmla="*/ 313765 w 2655710"/>
+              <a:gd name="connsiteY6" fmla="*/ 3048000 h 3065929"/>
+              <a:gd name="connsiteX7" fmla="*/ 107577 w 2655710"/>
+              <a:gd name="connsiteY7" fmla="*/ 2868706 h 3065929"/>
+              <a:gd name="connsiteX8" fmla="*/ 0 w 2655710"/>
+              <a:gd name="connsiteY8" fmla="*/ 2294964 h 3065929"/>
+              <a:gd name="connsiteX9" fmla="*/ 62753 w 2655710"/>
+              <a:gd name="connsiteY9" fmla="*/ 1272988 h 3065929"/>
+              <a:gd name="connsiteX10" fmla="*/ 224118 w 2655710"/>
+              <a:gd name="connsiteY10" fmla="*/ 412376 h 3065929"/>
+              <a:gd name="connsiteX11" fmla="*/ 546847 w 2655710"/>
+              <a:gd name="connsiteY11" fmla="*/ 26894 h 3065929"/>
+              <a:gd name="connsiteX12" fmla="*/ 1120588 w 2655710"/>
+              <a:gd name="connsiteY12" fmla="*/ 0 h 3065929"/>
+              <a:gd name="connsiteX13" fmla="*/ 1963271 w 2655710"/>
+              <a:gd name="connsiteY13" fmla="*/ 26894 h 3065929"/>
+              <a:gd name="connsiteX14" fmla="*/ 2182607 w 2655710"/>
+              <a:gd name="connsiteY14" fmla="*/ 170030 h 3065929"/>
+              <a:gd name="connsiteX15" fmla="*/ 2180515 w 2655710"/>
+              <a:gd name="connsiteY15" fmla="*/ 464073 h 3065929"/>
+              <a:gd name="connsiteX16" fmla="*/ 1954306 w 2655710"/>
+              <a:gd name="connsiteY16" fmla="*/ 546847 h 3065929"/>
+              <a:gd name="connsiteX17" fmla="*/ 1335741 w 2655710"/>
+              <a:gd name="connsiteY17" fmla="*/ 528917 h 3065929"/>
+              <a:gd name="connsiteX18" fmla="*/ 990600 w 2655710"/>
+              <a:gd name="connsiteY18" fmla="*/ 528917 h 3065929"/>
+              <a:gd name="connsiteX19" fmla="*/ 923365 w 2655710"/>
+              <a:gd name="connsiteY19" fmla="*/ 726141 h 3065929"/>
+              <a:gd name="connsiteX20" fmla="*/ 1004047 w 2655710"/>
+              <a:gd name="connsiteY20" fmla="*/ 896470 h 3065929"/>
+              <a:gd name="connsiteX21" fmla="*/ 1596913 w 2655710"/>
+              <a:gd name="connsiteY21" fmla="*/ 896171 h 3065929"/>
+              <a:gd name="connsiteX22" fmla="*/ 2043953 w 2655710"/>
+              <a:gd name="connsiteY22" fmla="*/ 887506 h 3065929"/>
+              <a:gd name="connsiteX23" fmla="*/ 2268071 w 2655710"/>
+              <a:gd name="connsiteY23" fmla="*/ 968188 h 3065929"/>
+              <a:gd name="connsiteX24" fmla="*/ 2286000 w 2655710"/>
+              <a:gd name="connsiteY24" fmla="*/ 1156447 h 3065929"/>
+              <a:gd name="connsiteX25" fmla="*/ 2214282 w 2655710"/>
+              <a:gd name="connsiteY25" fmla="*/ 1299882 h 3065929"/>
+              <a:gd name="connsiteX26" fmla="*/ 1766047 w 2655710"/>
+              <a:gd name="connsiteY26" fmla="*/ 1335741 h 3065929"/>
+              <a:gd name="connsiteX27" fmla="*/ 609600 w 2655710"/>
+              <a:gd name="connsiteY27" fmla="*/ 1353670 h 3065929"/>
+              <a:gd name="connsiteX28" fmla="*/ 426122 w 2655710"/>
+              <a:gd name="connsiteY28" fmla="*/ 1444513 h 3065929"/>
+              <a:gd name="connsiteX29" fmla="*/ 430306 w 2655710"/>
+              <a:gd name="connsiteY29" fmla="*/ 1649506 h 3065929"/>
+              <a:gd name="connsiteX30" fmla="*/ 551927 w 2655710"/>
+              <a:gd name="connsiteY30" fmla="*/ 1772621 h 3065929"/>
+              <a:gd name="connsiteX31" fmla="*/ 1515035 w 2655710"/>
+              <a:gd name="connsiteY31" fmla="*/ 1766047 h 3065929"/>
+              <a:gd name="connsiteX32" fmla="*/ 2384612 w 2655710"/>
+              <a:gd name="connsiteY32" fmla="*/ 1748117 h 3065929"/>
+              <a:gd name="connsiteX0" fmla="*/ 2445572 w 2655710"/>
+              <a:gd name="connsiteY0" fmla="*/ 1783677 h 3065929"/>
+              <a:gd name="connsiteX1" fmla="*/ 2606638 w 2655710"/>
+              <a:gd name="connsiteY1" fmla="*/ 1952214 h 3065929"/>
+              <a:gd name="connsiteX2" fmla="*/ 2655645 w 2655710"/>
+              <a:gd name="connsiteY2" fmla="*/ 2354729 h 3065929"/>
+              <a:gd name="connsiteX3" fmla="*/ 2611120 w 2655710"/>
+              <a:gd name="connsiteY3" fmla="*/ 2895600 h 3065929"/>
+              <a:gd name="connsiteX4" fmla="*/ 2537012 w 2655710"/>
+              <a:gd name="connsiteY4" fmla="*/ 2985247 h 3065929"/>
+              <a:gd name="connsiteX5" fmla="*/ 2061882 w 2655710"/>
+              <a:gd name="connsiteY5" fmla="*/ 3065929 h 3065929"/>
+              <a:gd name="connsiteX6" fmla="*/ 313765 w 2655710"/>
+              <a:gd name="connsiteY6" fmla="*/ 3048000 h 3065929"/>
+              <a:gd name="connsiteX7" fmla="*/ 107577 w 2655710"/>
+              <a:gd name="connsiteY7" fmla="*/ 2868706 h 3065929"/>
+              <a:gd name="connsiteX8" fmla="*/ 0 w 2655710"/>
+              <a:gd name="connsiteY8" fmla="*/ 2294964 h 3065929"/>
+              <a:gd name="connsiteX9" fmla="*/ 62753 w 2655710"/>
+              <a:gd name="connsiteY9" fmla="*/ 1272988 h 3065929"/>
+              <a:gd name="connsiteX10" fmla="*/ 224118 w 2655710"/>
+              <a:gd name="connsiteY10" fmla="*/ 412376 h 3065929"/>
+              <a:gd name="connsiteX11" fmla="*/ 546847 w 2655710"/>
+              <a:gd name="connsiteY11" fmla="*/ 26894 h 3065929"/>
+              <a:gd name="connsiteX12" fmla="*/ 1120588 w 2655710"/>
+              <a:gd name="connsiteY12" fmla="*/ 0 h 3065929"/>
+              <a:gd name="connsiteX13" fmla="*/ 1963271 w 2655710"/>
+              <a:gd name="connsiteY13" fmla="*/ 26894 h 3065929"/>
+              <a:gd name="connsiteX14" fmla="*/ 2182607 w 2655710"/>
+              <a:gd name="connsiteY14" fmla="*/ 170030 h 3065929"/>
+              <a:gd name="connsiteX15" fmla="*/ 2180515 w 2655710"/>
+              <a:gd name="connsiteY15" fmla="*/ 464073 h 3065929"/>
+              <a:gd name="connsiteX16" fmla="*/ 1954306 w 2655710"/>
+              <a:gd name="connsiteY16" fmla="*/ 546847 h 3065929"/>
+              <a:gd name="connsiteX17" fmla="*/ 1335741 w 2655710"/>
+              <a:gd name="connsiteY17" fmla="*/ 528917 h 3065929"/>
+              <a:gd name="connsiteX18" fmla="*/ 990600 w 2655710"/>
+              <a:gd name="connsiteY18" fmla="*/ 528917 h 3065929"/>
+              <a:gd name="connsiteX19" fmla="*/ 923365 w 2655710"/>
+              <a:gd name="connsiteY19" fmla="*/ 726141 h 3065929"/>
+              <a:gd name="connsiteX20" fmla="*/ 1004047 w 2655710"/>
+              <a:gd name="connsiteY20" fmla="*/ 896470 h 3065929"/>
+              <a:gd name="connsiteX21" fmla="*/ 1596913 w 2655710"/>
+              <a:gd name="connsiteY21" fmla="*/ 896171 h 3065929"/>
+              <a:gd name="connsiteX22" fmla="*/ 2043953 w 2655710"/>
+              <a:gd name="connsiteY22" fmla="*/ 887506 h 3065929"/>
+              <a:gd name="connsiteX23" fmla="*/ 2268071 w 2655710"/>
+              <a:gd name="connsiteY23" fmla="*/ 968188 h 3065929"/>
+              <a:gd name="connsiteX24" fmla="*/ 2286000 w 2655710"/>
+              <a:gd name="connsiteY24" fmla="*/ 1156447 h 3065929"/>
+              <a:gd name="connsiteX25" fmla="*/ 2214282 w 2655710"/>
+              <a:gd name="connsiteY25" fmla="*/ 1299882 h 3065929"/>
+              <a:gd name="connsiteX26" fmla="*/ 1766047 w 2655710"/>
+              <a:gd name="connsiteY26" fmla="*/ 1335741 h 3065929"/>
+              <a:gd name="connsiteX27" fmla="*/ 609600 w 2655710"/>
+              <a:gd name="connsiteY27" fmla="*/ 1353670 h 3065929"/>
+              <a:gd name="connsiteX28" fmla="*/ 426122 w 2655710"/>
+              <a:gd name="connsiteY28" fmla="*/ 1444513 h 3065929"/>
+              <a:gd name="connsiteX29" fmla="*/ 430306 w 2655710"/>
+              <a:gd name="connsiteY29" fmla="*/ 1649506 h 3065929"/>
+              <a:gd name="connsiteX30" fmla="*/ 551927 w 2655710"/>
+              <a:gd name="connsiteY30" fmla="*/ 1772621 h 3065929"/>
+              <a:gd name="connsiteX31" fmla="*/ 1515035 w 2655710"/>
+              <a:gd name="connsiteY31" fmla="*/ 1766047 h 3065929"/>
+              <a:gd name="connsiteX32" fmla="*/ 2445572 w 2655710"/>
+              <a:gd name="connsiteY32" fmla="*/ 1783677 h 3065929"/>
+            </a:gdLst>
+            <a:ahLst/>
+            <a:cxnLst>
+              <a:cxn ang="0">
+                <a:pos x="connsiteX0" y="connsiteY0"/>
+              </a:cxn>
+              <a:cxn ang="0">
+                <a:pos x="connsiteX1" y="connsiteY1"/>
+              </a:cxn>
+              <a:cxn ang="0">
+                <a:pos x="connsiteX2" y="connsiteY2"/>
+              </a:cxn>
+              <a:cxn ang="0">
+                <a:pos x="connsiteX3" y="connsiteY3"/>
+              </a:cxn>
+              <a:cxn ang="0">
+                <a:pos x="connsiteX4" y="connsiteY4"/>
+              </a:cxn>
+              <a:cxn ang="0">
+                <a:pos x="connsiteX5" y="connsiteY5"/>
+              </a:cxn>
+              <a:cxn ang="0">
+                <a:pos x="connsiteX6" y="connsiteY6"/>
+              </a:cxn>
+              <a:cxn ang="0">
+                <a:pos x="connsiteX7" y="connsiteY7"/>
+              </a:cxn>
+              <a:cxn ang="0">
+                <a:pos x="connsiteX8" y="connsiteY8"/>
+              </a:cxn>
+              <a:cxn ang="0">
+                <a:pos x="connsiteX9" y="connsiteY9"/>
+              </a:cxn>
+              <a:cxn ang="0">
+                <a:pos x="connsiteX10" y="connsiteY10"/>
+              </a:cxn>
+              <a:cxn ang="0">
+                <a:pos x="connsiteX11" y="connsiteY11"/>
+              </a:cxn>
+              <a:cxn ang="0">
+                <a:pos x="connsiteX12" y="connsiteY12"/>
+              </a:cxn>
+              <a:cxn ang="0">
+                <a:pos x="connsiteX13" y="connsiteY13"/>
+              </a:cxn>
+              <a:cxn ang="0">
+                <a:pos x="connsiteX14" y="connsiteY14"/>
+              </a:cxn>
+              <a:cxn ang="0">
+                <a:pos x="connsiteX15" y="connsiteY15"/>
+              </a:cxn>
+              <a:cxn ang="0">
+                <a:pos x="connsiteX16" y="connsiteY16"/>
+              </a:cxn>
+              <a:cxn ang="0">
+                <a:pos x="connsiteX17" y="connsiteY17"/>
+              </a:cxn>
+              <a:cxn ang="0">
+                <a:pos x="connsiteX18" y="connsiteY18"/>
+              </a:cxn>
+              <a:cxn ang="0">
+                <a:pos x="connsiteX19" y="connsiteY19"/>
+              </a:cxn>
+              <a:cxn ang="0">
+                <a:pos x="connsiteX20" y="connsiteY20"/>
+              </a:cxn>
+              <a:cxn ang="0">
+                <a:pos x="connsiteX21" y="connsiteY21"/>
+              </a:cxn>
+              <a:cxn ang="0">
+                <a:pos x="connsiteX22" y="connsiteY22"/>
+              </a:cxn>
+              <a:cxn ang="0">
+                <a:pos x="connsiteX23" y="connsiteY23"/>
+              </a:cxn>
+              <a:cxn ang="0">
+                <a:pos x="connsiteX24" y="connsiteY24"/>
+              </a:cxn>
+              <a:cxn ang="0">
+                <a:pos x="connsiteX25" y="connsiteY25"/>
+              </a:cxn>
+              <a:cxn ang="0">
+                <a:pos x="connsiteX26" y="connsiteY26"/>
+              </a:cxn>
+              <a:cxn ang="0">
+                <a:pos x="connsiteX27" y="connsiteY27"/>
+              </a:cxn>
+              <a:cxn ang="0">
+                <a:pos x="connsiteX28" y="connsiteY28"/>
+              </a:cxn>
+              <a:cxn ang="0">
+                <a:pos x="connsiteX29" y="connsiteY29"/>
+              </a:cxn>
+              <a:cxn ang="0">
+                <a:pos x="connsiteX30" y="connsiteY30"/>
+              </a:cxn>
+              <a:cxn ang="0">
+                <a:pos x="connsiteX31" y="connsiteY31"/>
+              </a:cxn>
+              <a:cxn ang="0">
+                <a:pos x="connsiteX32" y="connsiteY32"/>
+              </a:cxn>
+            </a:cxnLst>
+            <a:rect l="l" t="t" r="r" b="b"/>
+            <a:pathLst>
+              <a:path w="2655710" h="3065929">
+                <a:moveTo>
+                  <a:pt x="2445572" y="1783677"/>
+                </a:moveTo>
+                <a:lnTo>
+                  <a:pt x="2606638" y="1952214"/>
+                </a:lnTo>
+                <a:lnTo>
+                  <a:pt x="2655645" y="2354729"/>
+                </a:lnTo>
+                <a:cubicBezTo>
+                  <a:pt x="2657737" y="2509619"/>
+                  <a:pt x="2609028" y="2740710"/>
+                  <a:pt x="2611120" y="2895600"/>
+                </a:cubicBezTo>
+                <a:lnTo>
+                  <a:pt x="2537012" y="2985247"/>
+                </a:lnTo>
+                <a:lnTo>
+                  <a:pt x="2061882" y="3065929"/>
+                </a:lnTo>
+                <a:lnTo>
+                  <a:pt x="313765" y="3048000"/>
+                </a:lnTo>
+                <a:lnTo>
+                  <a:pt x="107577" y="2868706"/>
+                </a:lnTo>
+                <a:lnTo>
+                  <a:pt x="0" y="2294964"/>
+                </a:lnTo>
+                <a:lnTo>
+                  <a:pt x="62753" y="1272988"/>
+                </a:lnTo>
+                <a:lnTo>
+                  <a:pt x="224118" y="412376"/>
+                </a:lnTo>
+                <a:lnTo>
+                  <a:pt x="546847" y="26894"/>
+                </a:lnTo>
+                <a:lnTo>
+                  <a:pt x="1120588" y="0"/>
+                </a:lnTo>
+                <a:lnTo>
+                  <a:pt x="1963271" y="26894"/>
+                </a:lnTo>
+                <a:lnTo>
+                  <a:pt x="2182607" y="170030"/>
+                </a:lnTo>
+                <a:cubicBezTo>
+                  <a:pt x="2181910" y="268044"/>
+                  <a:pt x="2181212" y="366059"/>
+                  <a:pt x="2180515" y="464073"/>
+                </a:cubicBezTo>
+                <a:lnTo>
+                  <a:pt x="1954306" y="546847"/>
+                </a:lnTo>
+                <a:lnTo>
+                  <a:pt x="1335741" y="528917"/>
+                </a:lnTo>
+                <a:lnTo>
+                  <a:pt x="990600" y="528917"/>
+                </a:lnTo>
+                <a:lnTo>
+                  <a:pt x="923365" y="726141"/>
+                </a:lnTo>
+                <a:lnTo>
+                  <a:pt x="1004047" y="896470"/>
+                </a:lnTo>
+                <a:lnTo>
+                  <a:pt x="1596913" y="896171"/>
+                </a:lnTo>
+                <a:lnTo>
+                  <a:pt x="2043953" y="887506"/>
+                </a:lnTo>
+                <a:lnTo>
+                  <a:pt x="2268071" y="968188"/>
+                </a:lnTo>
+                <a:lnTo>
+                  <a:pt x="2286000" y="1156447"/>
+                </a:lnTo>
+                <a:lnTo>
+                  <a:pt x="2214282" y="1299882"/>
+                </a:lnTo>
+                <a:lnTo>
+                  <a:pt x="1766047" y="1335741"/>
+                </a:lnTo>
+                <a:lnTo>
+                  <a:pt x="609600" y="1353670"/>
+                </a:lnTo>
+                <a:lnTo>
+                  <a:pt x="426122" y="1444513"/>
+                </a:lnTo>
+                <a:cubicBezTo>
+                  <a:pt x="427517" y="1512844"/>
+                  <a:pt x="428911" y="1581175"/>
+                  <a:pt x="430306" y="1649506"/>
+                </a:cubicBezTo>
+                <a:lnTo>
+                  <a:pt x="551927" y="1772621"/>
+                </a:lnTo>
+                <a:lnTo>
+                  <a:pt x="1515035" y="1766047"/>
+                </a:lnTo>
+                <a:lnTo>
+                  <a:pt x="2445572" y="1783677"/>
+                </a:lnTo>
+                <a:close/>
+              </a:path>
+            </a:pathLst>
+          </a:custGeom>
+          <a:noFill/>
+          <a:ln w="28575">
+            <a:solidFill>
+              <a:srgbClr val="61D0CE"/>
+            </a:solidFill>
+          </a:ln>
+        </p:spPr>
+        <p:style>
+          <a:lnRef idx="2">
+            <a:schemeClr val="accent1">
+              <a:shade val="15000"/>
+            </a:schemeClr>
+          </a:lnRef>
+          <a:fillRef idx="1">
+            <a:schemeClr val="accent1"/>
+          </a:fillRef>
+          <a:effectRef idx="0">
+            <a:schemeClr val="accent1"/>
+          </a:effectRef>
+          <a:fontRef idx="minor">
+            <a:schemeClr val="lt1"/>
+          </a:fontRef>
+        </p:style>
+        <p:txBody>
+          <a:bodyPr rtlCol="0" anchor="ctr"/>
+          <a:lstStyle/>
+          <a:p>
+            <a:pPr algn="ctr"/>
+            <a:endParaRPr lang="fr-FR"/>
+          </a:p>
+        </p:txBody>
+      </p:sp>
+      <p:sp>
+        <p:nvSpPr>
+          <p:cNvPr id="11" name="TextBox 5">
+            <a:extLst>
+              <a:ext uri="{FF2B5EF4-FFF2-40B4-BE49-F238E27FC236}">
+                <a16:creationId xmlns:a16="http://schemas.microsoft.com/office/drawing/2014/main" id="{2F7E1FA1-9CBB-B1E8-D945-83A681FFAB99}"/>
+              </a:ext>
+            </a:extLst>
+          </p:cNvPr>
+          <p:cNvSpPr txBox="1"/>
+          <p:nvPr/>
+        </p:nvSpPr>
+        <p:spPr>
+          <a:xfrm>
+            <a:off x="2790180" y="3544210"/>
+            <a:ext cx="1965960" cy="307777"/>
+          </a:xfrm>
+          <a:prstGeom prst="rect">
+            <a:avLst/>
+          </a:prstGeom>
+          <a:noFill/>
+        </p:spPr>
+        <p:txBody>
+          <a:bodyPr wrap="square" lIns="45720" rIns="45720" anchor="t">
+            <a:spAutoFit/>
+          </a:bodyPr>
+          <a:lstStyle/>
+          <a:p>
+            <a:pPr algn="ctr">
+              <a:defRPr sz="2000" b="1">
+                <a:solidFill>
+                  <a:srgbClr val="FFFFFF"/>
+                </a:solidFill>
+                <a:latin typeface="Aptos"/>
+              </a:defRPr>
+            </a:pPr>
+            <a:r>
+              <a:rPr lang="fr-FR" sz="1400" dirty="0" err="1">
+                <a:solidFill>
+                  <a:srgbClr val="61D0CE"/>
+                </a:solidFill>
+              </a:rPr>
+              <a:t>staging</a:t>
+            </a:r>
+            <a:endParaRPr sz="1400" dirty="0">
+              <a:solidFill>
+                <a:srgbClr val="61D0CE"/>
+              </a:solidFill>
+            </a:endParaRPr>
+          </a:p>
+        </p:txBody>
+      </p:sp>
+      <p:sp>
+        <p:nvSpPr>
+          <p:cNvPr id="12" name="Forme libre : forme 11">
+            <a:extLst>
+              <a:ext uri="{FF2B5EF4-FFF2-40B4-BE49-F238E27FC236}">
+                <a16:creationId xmlns:a16="http://schemas.microsoft.com/office/drawing/2014/main" id="{0591A664-DA03-D4F6-BF41-C6EDBE458DC5}"/>
+              </a:ext>
+            </a:extLst>
+          </p:cNvPr>
+          <p:cNvSpPr/>
+          <p:nvPr/>
+        </p:nvSpPr>
+        <p:spPr>
+          <a:xfrm>
+            <a:off x="3722370" y="3615690"/>
+            <a:ext cx="2453640" cy="1169670"/>
+          </a:xfrm>
+          <a:custGeom>
+            <a:avLst/>
+            <a:gdLst>
+              <a:gd name="connsiteX0" fmla="*/ 556260 w 2453640"/>
+              <a:gd name="connsiteY0" fmla="*/ 11430 h 1169670"/>
+              <a:gd name="connsiteX1" fmla="*/ 529590 w 2453640"/>
+              <a:gd name="connsiteY1" fmla="*/ 148590 h 1169670"/>
+              <a:gd name="connsiteX2" fmla="*/ 552450 w 2453640"/>
+              <a:gd name="connsiteY2" fmla="*/ 243840 h 1169670"/>
+              <a:gd name="connsiteX3" fmla="*/ 601980 w 2453640"/>
+              <a:gd name="connsiteY3" fmla="*/ 281940 h 1169670"/>
+              <a:gd name="connsiteX4" fmla="*/ 792480 w 2453640"/>
+              <a:gd name="connsiteY4" fmla="*/ 274320 h 1169670"/>
+              <a:gd name="connsiteX5" fmla="*/ 1032510 w 2453640"/>
+              <a:gd name="connsiteY5" fmla="*/ 274320 h 1169670"/>
+              <a:gd name="connsiteX6" fmla="*/ 1329690 w 2453640"/>
+              <a:gd name="connsiteY6" fmla="*/ 266700 h 1169670"/>
+              <a:gd name="connsiteX7" fmla="*/ 1798320 w 2453640"/>
+              <a:gd name="connsiteY7" fmla="*/ 308610 h 1169670"/>
+              <a:gd name="connsiteX8" fmla="*/ 1908810 w 2453640"/>
+              <a:gd name="connsiteY8" fmla="*/ 400050 h 1169670"/>
+              <a:gd name="connsiteX9" fmla="*/ 1908810 w 2453640"/>
+              <a:gd name="connsiteY9" fmla="*/ 472440 h 1169670"/>
+              <a:gd name="connsiteX10" fmla="*/ 1920240 w 2453640"/>
+              <a:gd name="connsiteY10" fmla="*/ 708660 h 1169670"/>
+              <a:gd name="connsiteX11" fmla="*/ 1901190 w 2453640"/>
+              <a:gd name="connsiteY11" fmla="*/ 781050 h 1169670"/>
+              <a:gd name="connsiteX12" fmla="*/ 1798320 w 2453640"/>
+              <a:gd name="connsiteY12" fmla="*/ 811530 h 1169670"/>
+              <a:gd name="connsiteX13" fmla="*/ 1440180 w 2453640"/>
+              <a:gd name="connsiteY13" fmla="*/ 842010 h 1169670"/>
+              <a:gd name="connsiteX14" fmla="*/ 784860 w 2453640"/>
+              <a:gd name="connsiteY14" fmla="*/ 826770 h 1169670"/>
+              <a:gd name="connsiteX15" fmla="*/ 228600 w 2453640"/>
+              <a:gd name="connsiteY15" fmla="*/ 834390 h 1169670"/>
+              <a:gd name="connsiteX16" fmla="*/ 91440 w 2453640"/>
+              <a:gd name="connsiteY16" fmla="*/ 849630 h 1169670"/>
+              <a:gd name="connsiteX17" fmla="*/ 22860 w 2453640"/>
+              <a:gd name="connsiteY17" fmla="*/ 887730 h 1169670"/>
+              <a:gd name="connsiteX18" fmla="*/ 0 w 2453640"/>
+              <a:gd name="connsiteY18" fmla="*/ 963930 h 1169670"/>
+              <a:gd name="connsiteX19" fmla="*/ 7620 w 2453640"/>
+              <a:gd name="connsiteY19" fmla="*/ 1062990 h 1169670"/>
+              <a:gd name="connsiteX20" fmla="*/ 34290 w 2453640"/>
+              <a:gd name="connsiteY20" fmla="*/ 1127760 h 1169670"/>
+              <a:gd name="connsiteX21" fmla="*/ 118110 w 2453640"/>
+              <a:gd name="connsiteY21" fmla="*/ 1150620 h 1169670"/>
+              <a:gd name="connsiteX22" fmla="*/ 323850 w 2453640"/>
+              <a:gd name="connsiteY22" fmla="*/ 1169670 h 1169670"/>
+              <a:gd name="connsiteX23" fmla="*/ 1455420 w 2453640"/>
+              <a:gd name="connsiteY23" fmla="*/ 1165860 h 1169670"/>
+              <a:gd name="connsiteX24" fmla="*/ 1874520 w 2453640"/>
+              <a:gd name="connsiteY24" fmla="*/ 1143000 h 1169670"/>
+              <a:gd name="connsiteX25" fmla="*/ 2202180 w 2453640"/>
+              <a:gd name="connsiteY25" fmla="*/ 1093470 h 1169670"/>
+              <a:gd name="connsiteX26" fmla="*/ 2400300 w 2453640"/>
+              <a:gd name="connsiteY26" fmla="*/ 941070 h 1169670"/>
+              <a:gd name="connsiteX27" fmla="*/ 2453640 w 2453640"/>
+              <a:gd name="connsiteY27" fmla="*/ 678180 h 1169670"/>
+              <a:gd name="connsiteX28" fmla="*/ 2434590 w 2453640"/>
+              <a:gd name="connsiteY28" fmla="*/ 419100 h 1169670"/>
+              <a:gd name="connsiteX29" fmla="*/ 2377440 w 2453640"/>
+              <a:gd name="connsiteY29" fmla="*/ 224790 h 1169670"/>
+              <a:gd name="connsiteX30" fmla="*/ 2236470 w 2453640"/>
+              <a:gd name="connsiteY30" fmla="*/ 102870 h 1169670"/>
+              <a:gd name="connsiteX31" fmla="*/ 2011680 w 2453640"/>
+              <a:gd name="connsiteY31" fmla="*/ 19050 h 1169670"/>
+              <a:gd name="connsiteX32" fmla="*/ 1790700 w 2453640"/>
+              <a:gd name="connsiteY32" fmla="*/ 22860 h 1169670"/>
+              <a:gd name="connsiteX33" fmla="*/ 1383030 w 2453640"/>
+              <a:gd name="connsiteY33" fmla="*/ 26670 h 1169670"/>
+              <a:gd name="connsiteX34" fmla="*/ 1143000 w 2453640"/>
+              <a:gd name="connsiteY34" fmla="*/ 7620 h 1169670"/>
+              <a:gd name="connsiteX35" fmla="*/ 838200 w 2453640"/>
+              <a:gd name="connsiteY35" fmla="*/ 0 h 1169670"/>
+              <a:gd name="connsiteX36" fmla="*/ 556260 w 2453640"/>
+              <a:gd name="connsiteY36" fmla="*/ 11430 h 1169670"/>
+            </a:gdLst>
+            <a:ahLst/>
+            <a:cxnLst>
+              <a:cxn ang="0">
+                <a:pos x="connsiteX0" y="connsiteY0"/>
+              </a:cxn>
+              <a:cxn ang="0">
+                <a:pos x="connsiteX1" y="connsiteY1"/>
+              </a:cxn>
+              <a:cxn ang="0">
+                <a:pos x="connsiteX2" y="connsiteY2"/>
+              </a:cxn>
+              <a:cxn ang="0">
+                <a:pos x="connsiteX3" y="connsiteY3"/>
+              </a:cxn>
+              <a:cxn ang="0">
+                <a:pos x="connsiteX4" y="connsiteY4"/>
+              </a:cxn>
+              <a:cxn ang="0">
+                <a:pos x="connsiteX5" y="connsiteY5"/>
+              </a:cxn>
+              <a:cxn ang="0">
+                <a:pos x="connsiteX6" y="connsiteY6"/>
+              </a:cxn>
+              <a:cxn ang="0">
+                <a:pos x="connsiteX7" y="connsiteY7"/>
+              </a:cxn>
+              <a:cxn ang="0">
+                <a:pos x="connsiteX8" y="connsiteY8"/>
+              </a:cxn>
+              <a:cxn ang="0">
+                <a:pos x="connsiteX9" y="connsiteY9"/>
+              </a:cxn>
+              <a:cxn ang="0">
+                <a:pos x="connsiteX10" y="connsiteY10"/>
+              </a:cxn>
+              <a:cxn ang="0">
+                <a:pos x="connsiteX11" y="connsiteY11"/>
+              </a:cxn>
+              <a:cxn ang="0">
+                <a:pos x="connsiteX12" y="connsiteY12"/>
+              </a:cxn>
+              <a:cxn ang="0">
+                <a:pos x="connsiteX13" y="connsiteY13"/>
+              </a:cxn>
+              <a:cxn ang="0">
+                <a:pos x="connsiteX14" y="connsiteY14"/>
+              </a:cxn>
+              <a:cxn ang="0">
+                <a:pos x="connsiteX15" y="connsiteY15"/>
+              </a:cxn>
+              <a:cxn ang="0">
+                <a:pos x="connsiteX16" y="connsiteY16"/>
+              </a:cxn>
+              <a:cxn ang="0">
+                <a:pos x="connsiteX17" y="connsiteY17"/>
+              </a:cxn>
+              <a:cxn ang="0">
+                <a:pos x="connsiteX18" y="connsiteY18"/>
+              </a:cxn>
+              <a:cxn ang="0">
+                <a:pos x="connsiteX19" y="connsiteY19"/>
+              </a:cxn>
+              <a:cxn ang="0">
+                <a:pos x="connsiteX20" y="connsiteY20"/>
+              </a:cxn>
+              <a:cxn ang="0">
+                <a:pos x="connsiteX21" y="connsiteY21"/>
+              </a:cxn>
+              <a:cxn ang="0">
+                <a:pos x="connsiteX22" y="connsiteY22"/>
+              </a:cxn>
+              <a:cxn ang="0">
+                <a:pos x="connsiteX23" y="connsiteY23"/>
+              </a:cxn>
+              <a:cxn ang="0">
+                <a:pos x="connsiteX24" y="connsiteY24"/>
+              </a:cxn>
+              <a:cxn ang="0">
+                <a:pos x="connsiteX25" y="connsiteY25"/>
+              </a:cxn>
+              <a:cxn ang="0">
+                <a:pos x="connsiteX26" y="connsiteY26"/>
+              </a:cxn>
+              <a:cxn ang="0">
+                <a:pos x="connsiteX27" y="connsiteY27"/>
+              </a:cxn>
+              <a:cxn ang="0">
+                <a:pos x="connsiteX28" y="connsiteY28"/>
+              </a:cxn>
+              <a:cxn ang="0">
+                <a:pos x="connsiteX29" y="connsiteY29"/>
+              </a:cxn>
+              <a:cxn ang="0">
+                <a:pos x="connsiteX30" y="connsiteY30"/>
+              </a:cxn>
+              <a:cxn ang="0">
+                <a:pos x="connsiteX31" y="connsiteY31"/>
+              </a:cxn>
+              <a:cxn ang="0">
+                <a:pos x="connsiteX32" y="connsiteY32"/>
+              </a:cxn>
+              <a:cxn ang="0">
+                <a:pos x="connsiteX33" y="connsiteY33"/>
+              </a:cxn>
+              <a:cxn ang="0">
+                <a:pos x="connsiteX34" y="connsiteY34"/>
+              </a:cxn>
+              <a:cxn ang="0">
+                <a:pos x="connsiteX35" y="connsiteY35"/>
+              </a:cxn>
+              <a:cxn ang="0">
+                <a:pos x="connsiteX36" y="connsiteY36"/>
+              </a:cxn>
+            </a:cxnLst>
+            <a:rect l="l" t="t" r="r" b="b"/>
+            <a:pathLst>
+              <a:path w="2453640" h="1169670">
+                <a:moveTo>
+                  <a:pt x="556260" y="11430"/>
+                </a:moveTo>
+                <a:lnTo>
+                  <a:pt x="529590" y="148590"/>
+                </a:lnTo>
+                <a:lnTo>
+                  <a:pt x="552450" y="243840"/>
+                </a:lnTo>
+                <a:lnTo>
+                  <a:pt x="601980" y="281940"/>
+                </a:lnTo>
+                <a:lnTo>
+                  <a:pt x="792480" y="274320"/>
+                </a:lnTo>
+                <a:lnTo>
+                  <a:pt x="1032510" y="274320"/>
+                </a:lnTo>
+                <a:lnTo>
+                  <a:pt x="1329690" y="266700"/>
+                </a:lnTo>
+                <a:lnTo>
+                  <a:pt x="1798320" y="308610"/>
+                </a:lnTo>
+                <a:lnTo>
+                  <a:pt x="1908810" y="400050"/>
+                </a:lnTo>
+                <a:lnTo>
+                  <a:pt x="1908810" y="472440"/>
+                </a:lnTo>
+                <a:lnTo>
+                  <a:pt x="1920240" y="708660"/>
+                </a:lnTo>
+                <a:lnTo>
+                  <a:pt x="1901190" y="781050"/>
+                </a:lnTo>
+                <a:lnTo>
+                  <a:pt x="1798320" y="811530"/>
+                </a:lnTo>
+                <a:lnTo>
+                  <a:pt x="1440180" y="842010"/>
+                </a:lnTo>
+                <a:lnTo>
+                  <a:pt x="784860" y="826770"/>
+                </a:lnTo>
+                <a:lnTo>
+                  <a:pt x="228600" y="834390"/>
+                </a:lnTo>
+                <a:lnTo>
+                  <a:pt x="91440" y="849630"/>
+                </a:lnTo>
+                <a:lnTo>
+                  <a:pt x="22860" y="887730"/>
+                </a:lnTo>
+                <a:lnTo>
+                  <a:pt x="0" y="963930"/>
+                </a:lnTo>
+                <a:lnTo>
+                  <a:pt x="7620" y="1062990"/>
+                </a:lnTo>
+                <a:lnTo>
+                  <a:pt x="34290" y="1127760"/>
+                </a:lnTo>
+                <a:lnTo>
+                  <a:pt x="118110" y="1150620"/>
+                </a:lnTo>
+                <a:lnTo>
+                  <a:pt x="323850" y="1169670"/>
+                </a:lnTo>
+                <a:lnTo>
+                  <a:pt x="1455420" y="1165860"/>
+                </a:lnTo>
+                <a:lnTo>
+                  <a:pt x="1874520" y="1143000"/>
+                </a:lnTo>
+                <a:lnTo>
+                  <a:pt x="2202180" y="1093470"/>
+                </a:lnTo>
+                <a:lnTo>
+                  <a:pt x="2400300" y="941070"/>
+                </a:lnTo>
+                <a:lnTo>
+                  <a:pt x="2453640" y="678180"/>
+                </a:lnTo>
+                <a:lnTo>
+                  <a:pt x="2434590" y="419100"/>
+                </a:lnTo>
+                <a:lnTo>
+                  <a:pt x="2377440" y="224790"/>
+                </a:lnTo>
+                <a:lnTo>
+                  <a:pt x="2236470" y="102870"/>
+                </a:lnTo>
+                <a:lnTo>
+                  <a:pt x="2011680" y="19050"/>
+                </a:lnTo>
+                <a:lnTo>
+                  <a:pt x="1790700" y="22860"/>
+                </a:lnTo>
+                <a:lnTo>
+                  <a:pt x="1383030" y="26670"/>
+                </a:lnTo>
+                <a:lnTo>
+                  <a:pt x="1143000" y="7620"/>
+                </a:lnTo>
+                <a:lnTo>
+                  <a:pt x="838200" y="0"/>
+                </a:lnTo>
+                <a:lnTo>
+                  <a:pt x="556260" y="11430"/>
+                </a:lnTo>
+                <a:close/>
+              </a:path>
+            </a:pathLst>
+          </a:custGeom>
+          <a:noFill/>
+          <a:ln>
+            <a:solidFill>
+              <a:srgbClr val="F15333"/>
+            </a:solidFill>
+          </a:ln>
+        </p:spPr>
+        <p:style>
+          <a:lnRef idx="2">
+            <a:schemeClr val="accent1">
+              <a:shade val="15000"/>
+            </a:schemeClr>
+          </a:lnRef>
+          <a:fillRef idx="1">
+            <a:schemeClr val="accent1"/>
+          </a:fillRef>
+          <a:effectRef idx="0">
+            <a:schemeClr val="accent1"/>
+          </a:effectRef>
+          <a:fontRef idx="minor">
+            <a:schemeClr val="lt1"/>
+          </a:fontRef>
+        </p:style>
+        <p:txBody>
+          <a:bodyPr rtlCol="0" anchor="ctr"/>
+          <a:lstStyle/>
+          <a:p>
+            <a:pPr algn="ctr"/>
+            <a:endParaRPr lang="fr-FR"/>
+          </a:p>
+        </p:txBody>
+      </p:sp>
+      <p:sp>
+        <p:nvSpPr>
+          <p:cNvPr id="13" name="TextBox 5">
+            <a:extLst>
+              <a:ext uri="{FF2B5EF4-FFF2-40B4-BE49-F238E27FC236}">
+                <a16:creationId xmlns:a16="http://schemas.microsoft.com/office/drawing/2014/main" id="{BD9BC477-DD03-FA26-37DC-0C9B5AC86987}"/>
+              </a:ext>
+            </a:extLst>
+          </p:cNvPr>
+          <p:cNvSpPr txBox="1"/>
+          <p:nvPr/>
+        </p:nvSpPr>
+        <p:spPr>
+          <a:xfrm>
+            <a:off x="4903469" y="3820967"/>
+            <a:ext cx="1965960" cy="307777"/>
+          </a:xfrm>
+          <a:prstGeom prst="rect">
+            <a:avLst/>
+          </a:prstGeom>
+          <a:noFill/>
+        </p:spPr>
+        <p:txBody>
+          <a:bodyPr wrap="square" lIns="45720" rIns="45720" anchor="t">
+            <a:spAutoFit/>
+          </a:bodyPr>
+          <a:lstStyle/>
+          <a:p>
+            <a:pPr algn="ctr">
+              <a:defRPr sz="2000" b="1">
+                <a:solidFill>
+                  <a:srgbClr val="FFFFFF"/>
+                </a:solidFill>
+                <a:latin typeface="Aptos"/>
+              </a:defRPr>
+            </a:pPr>
+            <a:r>
+              <a:rPr lang="fr-FR" sz="1400" dirty="0" err="1">
+                <a:solidFill>
+                  <a:srgbClr val="F15333"/>
+                </a:solidFill>
+              </a:rPr>
+              <a:t>seed</a:t>
+            </a:r>
+            <a:endParaRPr sz="1400" dirty="0">
+              <a:solidFill>
+                <a:srgbClr val="F15333"/>
+              </a:solidFill>
+            </a:endParaRPr>
+          </a:p>
+        </p:txBody>
+      </p:sp>
+      <p:sp>
+        <p:nvSpPr>
+          <p:cNvPr id="14" name="Rectangle 13">
+            <a:extLst>
+              <a:ext uri="{FF2B5EF4-FFF2-40B4-BE49-F238E27FC236}">
+                <a16:creationId xmlns:a16="http://schemas.microsoft.com/office/drawing/2014/main" id="{A2BF4DF9-8725-9FE9-335B-BE0CE9D2F489}"/>
+              </a:ext>
+            </a:extLst>
+          </p:cNvPr>
+          <p:cNvSpPr/>
+          <p:nvPr/>
+        </p:nvSpPr>
+        <p:spPr>
+          <a:xfrm>
+            <a:off x="47961" y="3095535"/>
+            <a:ext cx="2787573" cy="2968329"/>
+          </a:xfrm>
+          <a:prstGeom prst="rect">
+            <a:avLst/>
+          </a:prstGeom>
+          <a:noFill/>
+          <a:ln w="28575">
+            <a:solidFill>
+              <a:srgbClr val="D9F0F0"/>
+            </a:solidFill>
+          </a:ln>
+        </p:spPr>
+        <p:style>
+          <a:lnRef idx="2">
+            <a:schemeClr val="accent1">
+              <a:shade val="15000"/>
+            </a:schemeClr>
+          </a:lnRef>
+          <a:fillRef idx="1">
+            <a:schemeClr val="accent1"/>
+          </a:fillRef>
+          <a:effectRef idx="0">
+            <a:schemeClr val="accent1"/>
+          </a:effectRef>
+          <a:fontRef idx="minor">
+            <a:schemeClr val="lt1"/>
+          </a:fontRef>
+        </p:style>
+        <p:txBody>
+          <a:bodyPr rtlCol="0" anchor="ctr"/>
+          <a:lstStyle/>
+          <a:p>
+            <a:pPr algn="ctr"/>
+            <a:endParaRPr lang="fr-FR"/>
+          </a:p>
+        </p:txBody>
+      </p:sp>
+      <p:sp>
+        <p:nvSpPr>
+          <p:cNvPr id="15" name="TextBox 5">
+            <a:extLst>
+              <a:ext uri="{FF2B5EF4-FFF2-40B4-BE49-F238E27FC236}">
+                <a16:creationId xmlns:a16="http://schemas.microsoft.com/office/drawing/2014/main" id="{6E633ED5-E12F-5B27-4289-EAB2756CEEE1}"/>
+              </a:ext>
+            </a:extLst>
+          </p:cNvPr>
+          <p:cNvSpPr txBox="1"/>
+          <p:nvPr/>
+        </p:nvSpPr>
+        <p:spPr>
+          <a:xfrm>
+            <a:off x="-551387" y="3133370"/>
+            <a:ext cx="1965960" cy="307777"/>
+          </a:xfrm>
+          <a:prstGeom prst="rect">
+            <a:avLst/>
+          </a:prstGeom>
+          <a:noFill/>
+        </p:spPr>
+        <p:txBody>
+          <a:bodyPr wrap="square" lIns="45720" rIns="45720" anchor="t">
+            <a:spAutoFit/>
+          </a:bodyPr>
+          <a:lstStyle/>
+          <a:p>
+            <a:pPr algn="ctr">
+              <a:defRPr sz="2000" b="1">
+                <a:solidFill>
+                  <a:srgbClr val="FFFFFF"/>
+                </a:solidFill>
+                <a:latin typeface="Aptos"/>
+              </a:defRPr>
+            </a:pPr>
+            <a:r>
+              <a:rPr lang="fr-FR" sz="1400" dirty="0" err="1">
+                <a:solidFill>
+                  <a:srgbClr val="D9F0F0"/>
+                </a:solidFill>
+              </a:rPr>
+              <a:t>raw</a:t>
+            </a:r>
+            <a:endParaRPr sz="1400" dirty="0">
+              <a:solidFill>
+                <a:srgbClr val="D9F0F0"/>
+              </a:solidFill>
+            </a:endParaRPr>
+          </a:p>
+        </p:txBody>
+      </p:sp>
+      <p:sp>
+        <p:nvSpPr>
+          <p:cNvPr id="16" name="Rectangle 15">
+            <a:extLst>
+              <a:ext uri="{FF2B5EF4-FFF2-40B4-BE49-F238E27FC236}">
+                <a16:creationId xmlns:a16="http://schemas.microsoft.com/office/drawing/2014/main" id="{38C900B4-CFE2-2AD9-78A3-67BE10F0891C}"/>
+              </a:ext>
+            </a:extLst>
+          </p:cNvPr>
+          <p:cNvSpPr/>
+          <p:nvPr/>
+        </p:nvSpPr>
+        <p:spPr>
+          <a:xfrm>
+            <a:off x="10983406" y="3168316"/>
+            <a:ext cx="1160632" cy="2541604"/>
+          </a:xfrm>
+          <a:prstGeom prst="rect">
+            <a:avLst/>
+          </a:prstGeom>
+          <a:noFill/>
+          <a:ln w="28575">
+            <a:solidFill>
+              <a:srgbClr val="F6A2F8"/>
+            </a:solidFill>
+          </a:ln>
+        </p:spPr>
+        <p:style>
+          <a:lnRef idx="2">
+            <a:schemeClr val="accent1">
+              <a:shade val="15000"/>
+            </a:schemeClr>
+          </a:lnRef>
+          <a:fillRef idx="1">
+            <a:schemeClr val="accent1"/>
+          </a:fillRef>
+          <a:effectRef idx="0">
+            <a:schemeClr val="accent1"/>
+          </a:effectRef>
+          <a:fontRef idx="minor">
+            <a:schemeClr val="lt1"/>
+          </a:fontRef>
+        </p:style>
+        <p:txBody>
+          <a:bodyPr rtlCol="0" anchor="ctr"/>
+          <a:lstStyle/>
+          <a:p>
+            <a:pPr algn="ctr"/>
+            <a:endParaRPr lang="fr-FR"/>
+          </a:p>
+        </p:txBody>
+      </p:sp>
+      <p:sp>
+        <p:nvSpPr>
+          <p:cNvPr id="17" name="TextBox 5">
+            <a:extLst>
+              <a:ext uri="{FF2B5EF4-FFF2-40B4-BE49-F238E27FC236}">
+                <a16:creationId xmlns:a16="http://schemas.microsoft.com/office/drawing/2014/main" id="{CC098DD6-E717-8008-FAB5-55F61DEA7E9E}"/>
+              </a:ext>
+            </a:extLst>
+          </p:cNvPr>
+          <p:cNvSpPr txBox="1"/>
+          <p:nvPr/>
+        </p:nvSpPr>
+        <p:spPr>
+          <a:xfrm>
+            <a:off x="10396384" y="3236433"/>
+            <a:ext cx="1965960" cy="307777"/>
+          </a:xfrm>
+          <a:prstGeom prst="rect">
+            <a:avLst/>
+          </a:prstGeom>
+          <a:noFill/>
+        </p:spPr>
+        <p:txBody>
+          <a:bodyPr wrap="square" lIns="45720" rIns="45720" anchor="t">
+            <a:spAutoFit/>
+          </a:bodyPr>
+          <a:lstStyle/>
+          <a:p>
+            <a:pPr algn="ctr">
+              <a:defRPr sz="2000" b="1">
+                <a:solidFill>
+                  <a:srgbClr val="FFFFFF"/>
+                </a:solidFill>
+                <a:latin typeface="Aptos"/>
+              </a:defRPr>
+            </a:pPr>
+            <a:r>
+              <a:rPr lang="fr-FR" sz="1400" dirty="0">
+                <a:solidFill>
+                  <a:srgbClr val="F6A2F8"/>
+                </a:solidFill>
+              </a:rPr>
+              <a:t>test</a:t>
+            </a:r>
+            <a:endParaRPr sz="1400" dirty="0">
+              <a:solidFill>
+                <a:srgbClr val="F6A2F8"/>
+              </a:solidFill>
+            </a:endParaRPr>
+          </a:p>
+        </p:txBody>
+      </p:sp>
     </p:spTree>
     <p:extLst>
       <p:ext uri="{BB962C8B-B14F-4D97-AF65-F5344CB8AC3E}">
         <p14:creationId xmlns:p14="http://schemas.microsoft.com/office/powerpoint/2010/main" val="318623322"/>
-      </p:ext>
-    </p:extLst>
-  </p:cSld>
-  <p:clrMapOvr>
-    <a:masterClrMapping/>
-  </p:clrMapOvr>
-</p:sld>
-</file>
-
-<file path=ppt/slides/slide17.xml><?xml version="1.0" encoding="utf-8"?>
-<p:sld xmlns:a="http://schemas.openxmlformats.org/drawingml/2006/main" xmlns:r="http://schemas.openxmlformats.org/officeDocument/2006/relationships" xmlns:p="http://schemas.openxmlformats.org/presentationml/2006/main">
-  <p:cSld>
-    <p:spTree>
-      <p:nvGrpSpPr>
-        <p:cNvPr id="1" name=""/>
-        <p:cNvGrpSpPr/>
-        <p:nvPr/>
-      </p:nvGrpSpPr>
-      <p:grpSpPr>
-        <a:xfrm>
-          <a:off x="0" y="0"/>
-          <a:ext cx="0" cy="0"/>
-          <a:chOff x="0" y="0"/>
-          <a:chExt cx="0" cy="0"/>
-        </a:xfrm>
-      </p:grpSpPr>
-      <p:sp>
-        <p:nvSpPr>
-          <p:cNvPr id="2" name="Titre 1">
-            <a:extLst>
-              <a:ext uri="{FF2B5EF4-FFF2-40B4-BE49-F238E27FC236}">
-                <a16:creationId xmlns:a16="http://schemas.microsoft.com/office/drawing/2014/main" id="{87B20ECB-F85D-886B-507C-A8DC38419C6E}"/>
-              </a:ext>
-            </a:extLst>
-          </p:cNvPr>
-          <p:cNvSpPr>
-            <a:spLocks noGrp="1"/>
-          </p:cNvSpPr>
-          <p:nvPr>
-            <p:ph type="title"/>
-          </p:nvPr>
-        </p:nvSpPr>
-        <p:spPr/>
-        <p:txBody>
-          <a:bodyPr/>
-          <a:lstStyle/>
-          <a:p>
-            <a:r>
-              <a:rPr lang="fr-FR" dirty="0"/>
-              <a:t>6. Mise en place DBT</a:t>
-            </a:r>
-          </a:p>
-        </p:txBody>
-      </p:sp>
-      <p:sp>
-        <p:nvSpPr>
-          <p:cNvPr id="4" name="Espace réservé de la date 3">
-            <a:extLst>
-              <a:ext uri="{FF2B5EF4-FFF2-40B4-BE49-F238E27FC236}">
-                <a16:creationId xmlns:a16="http://schemas.microsoft.com/office/drawing/2014/main" id="{9C226B0D-F133-CA55-B662-239CE67D6170}"/>
-              </a:ext>
-            </a:extLst>
-          </p:cNvPr>
-          <p:cNvSpPr>
-            <a:spLocks noGrp="1"/>
-          </p:cNvSpPr>
-          <p:nvPr>
-            <p:ph type="dt" sz="half" idx="10"/>
-          </p:nvPr>
-        </p:nvSpPr>
-        <p:spPr/>
-        <p:txBody>
-          <a:bodyPr/>
-          <a:lstStyle/>
-          <a:p>
-            <a:pPr rtl="0"/>
-            <a:fld id="{22897033-9A55-4DAC-991D-1FF1921C78B7}" type="datetime1">
-              <a:rPr lang="fr-FR" smtClean="0"/>
-              <a:t>21/08/2026</a:t>
-            </a:fld>
-            <a:endParaRPr lang="en-US" dirty="0"/>
-          </a:p>
-        </p:txBody>
-      </p:sp>
-      <p:pic>
-        <p:nvPicPr>
-          <p:cNvPr id="10" name="Image 9">
-            <a:extLst>
-              <a:ext uri="{FF2B5EF4-FFF2-40B4-BE49-F238E27FC236}">
-                <a16:creationId xmlns:a16="http://schemas.microsoft.com/office/drawing/2014/main" id="{A5266153-74DF-1004-F763-24CC95E8F1CE}"/>
-              </a:ext>
-            </a:extLst>
-          </p:cNvPr>
-          <p:cNvPicPr>
-            <a:picLocks noChangeAspect="1"/>
-          </p:cNvPicPr>
-          <p:nvPr/>
-        </p:nvPicPr>
-        <p:blipFill>
-          <a:blip r:embed="rId2"/>
-          <a:stretch>
-            <a:fillRect/>
-          </a:stretch>
-        </p:blipFill>
-        <p:spPr>
-          <a:xfrm>
-            <a:off x="4728381" y="624899"/>
-            <a:ext cx="2735237" cy="6164140"/>
-          </a:xfrm>
-          <a:prstGeom prst="rect">
-            <a:avLst/>
-          </a:prstGeom>
-        </p:spPr>
-      </p:pic>
-    </p:spTree>
-    <p:extLst>
-      <p:ext uri="{BB962C8B-B14F-4D97-AF65-F5344CB8AC3E}">
-        <p14:creationId xmlns:p14="http://schemas.microsoft.com/office/powerpoint/2010/main" val="1627038735"/>
       </p:ext>
     </p:extLst>
   </p:cSld>
@@ -15968,7 +18507,7 @@
             <a:pPr rtl="0"/>
             <a:fld id="{22897033-9A55-4DAC-991D-1FF1921C78B7}" type="datetime1">
               <a:rPr lang="fr-FR" smtClean="0"/>
-              <a:t>21/08/2026</a:t>
+              <a:t>25/08/2026</a:t>
             </a:fld>
             <a:endParaRPr lang="en-US" dirty="0"/>
           </a:p>
@@ -16006,6 +18545,261 @@
           </a:prstGeom>
         </p:spPr>
       </p:pic>
+      <p:sp>
+        <p:nvSpPr>
+          <p:cNvPr id="3" name="ZoneTexte 2">
+            <a:extLst>
+              <a:ext uri="{FF2B5EF4-FFF2-40B4-BE49-F238E27FC236}">
+                <a16:creationId xmlns:a16="http://schemas.microsoft.com/office/drawing/2014/main" id="{1BEEC357-E065-0E9C-B384-518C1CEF04D5}"/>
+              </a:ext>
+            </a:extLst>
+          </p:cNvPr>
+          <p:cNvSpPr txBox="1"/>
+          <p:nvPr/>
+        </p:nvSpPr>
+        <p:spPr>
+          <a:xfrm>
+            <a:off x="7960659" y="2420471"/>
+            <a:ext cx="4087906" cy="3753079"/>
+          </a:xfrm>
+          <a:prstGeom prst="rect">
+            <a:avLst/>
+          </a:prstGeom>
+        </p:spPr>
+        <p:txBody>
+          <a:bodyPr vert="horz" lIns="91440" tIns="45720" rIns="91440" bIns="45720" rtlCol="0" anchor="ctr">
+            <a:normAutofit/>
+          </a:bodyPr>
+          <a:lstStyle>
+            <a:lvl1pPr marL="306000" indent="-306000" defTabSz="457200">
+              <a:lnSpc>
+                <a:spcPct val="110000"/>
+              </a:lnSpc>
+              <a:spcBef>
+                <a:spcPct val="20000"/>
+              </a:spcBef>
+              <a:spcAft>
+                <a:spcPts val="600"/>
+              </a:spcAft>
+              <a:buClr>
+                <a:schemeClr val="accent1"/>
+              </a:buClr>
+              <a:buSzPct val="92000"/>
+              <a:buFont typeface="Wingdings 2" panose="05020102010507070707" pitchFamily="18" charset="2"/>
+              <a:buChar char=""/>
+              <a:defRPr sz="1700">
+                <a:solidFill>
+                  <a:schemeClr val="tx1">
+                    <a:lumMod val="75000"/>
+                    <a:lumOff val="25000"/>
+                  </a:schemeClr>
+                </a:solidFill>
+              </a:defRPr>
+            </a:lvl1pPr>
+            <a:lvl2pPr marL="630000" indent="-306000" defTabSz="457200">
+              <a:spcBef>
+                <a:spcPct val="20000"/>
+              </a:spcBef>
+              <a:spcAft>
+                <a:spcPts val="600"/>
+              </a:spcAft>
+              <a:buClr>
+                <a:schemeClr val="accent1"/>
+              </a:buClr>
+              <a:buSzPct val="92000"/>
+              <a:buFont typeface="Wingdings 2" panose="05020102010507070707" pitchFamily="18" charset="2"/>
+              <a:buChar char=""/>
+              <a:defRPr sz="1400">
+                <a:solidFill>
+                  <a:schemeClr val="tx1">
+                    <a:lumMod val="75000"/>
+                    <a:lumOff val="25000"/>
+                  </a:schemeClr>
+                </a:solidFill>
+              </a:defRPr>
+            </a:lvl2pPr>
+            <a:lvl3pPr marL="900000" indent="-270000" defTabSz="457200">
+              <a:spcBef>
+                <a:spcPct val="20000"/>
+              </a:spcBef>
+              <a:spcAft>
+                <a:spcPts val="600"/>
+              </a:spcAft>
+              <a:buClr>
+                <a:schemeClr val="accent1"/>
+              </a:buClr>
+              <a:buSzPct val="92000"/>
+              <a:buFont typeface="Wingdings 2" panose="05020102010507070707" pitchFamily="18" charset="2"/>
+              <a:buChar char=""/>
+              <a:defRPr sz="1300">
+                <a:solidFill>
+                  <a:schemeClr val="tx1">
+                    <a:lumMod val="75000"/>
+                    <a:lumOff val="25000"/>
+                  </a:schemeClr>
+                </a:solidFill>
+              </a:defRPr>
+            </a:lvl3pPr>
+            <a:lvl4pPr marL="1242000" indent="-234000" defTabSz="457200">
+              <a:spcBef>
+                <a:spcPct val="20000"/>
+              </a:spcBef>
+              <a:spcAft>
+                <a:spcPts val="600"/>
+              </a:spcAft>
+              <a:buClr>
+                <a:schemeClr val="accent1"/>
+              </a:buClr>
+              <a:buSzPct val="92000"/>
+              <a:buFont typeface="Wingdings 2" panose="05020102010507070707" pitchFamily="18" charset="2"/>
+              <a:buChar char=""/>
+              <a:defRPr sz="1100">
+                <a:solidFill>
+                  <a:schemeClr val="tx1">
+                    <a:lumMod val="75000"/>
+                    <a:lumOff val="25000"/>
+                  </a:schemeClr>
+                </a:solidFill>
+              </a:defRPr>
+            </a:lvl4pPr>
+            <a:lvl5pPr marL="1602000" indent="-234000" defTabSz="457200">
+              <a:spcBef>
+                <a:spcPct val="20000"/>
+              </a:spcBef>
+              <a:spcAft>
+                <a:spcPts val="600"/>
+              </a:spcAft>
+              <a:buClr>
+                <a:schemeClr val="accent1"/>
+              </a:buClr>
+              <a:buSzPct val="92000"/>
+              <a:buFont typeface="Wingdings 2" panose="05020102010507070707" pitchFamily="18" charset="2"/>
+              <a:buChar char=""/>
+              <a:defRPr sz="1100">
+                <a:solidFill>
+                  <a:schemeClr val="tx1">
+                    <a:lumMod val="75000"/>
+                    <a:lumOff val="25000"/>
+                  </a:schemeClr>
+                </a:solidFill>
+              </a:defRPr>
+            </a:lvl5pPr>
+            <a:lvl6pPr marL="1900000" indent="-228600" defTabSz="457200">
+              <a:spcBef>
+                <a:spcPct val="20000"/>
+              </a:spcBef>
+              <a:spcAft>
+                <a:spcPts val="600"/>
+              </a:spcAft>
+              <a:buClr>
+                <a:schemeClr val="accent2"/>
+              </a:buClr>
+              <a:buSzPct val="92000"/>
+              <a:buFont typeface="Wingdings 2" panose="05020102010507070707" pitchFamily="18" charset="2"/>
+              <a:buChar char=""/>
+              <a:defRPr sz="1200">
+                <a:solidFill>
+                  <a:schemeClr val="tx2"/>
+                </a:solidFill>
+              </a:defRPr>
+            </a:lvl6pPr>
+            <a:lvl7pPr marL="2200000" indent="-228600" defTabSz="457200">
+              <a:spcBef>
+                <a:spcPct val="20000"/>
+              </a:spcBef>
+              <a:spcAft>
+                <a:spcPts val="600"/>
+              </a:spcAft>
+              <a:buClr>
+                <a:schemeClr val="accent2"/>
+              </a:buClr>
+              <a:buSzPct val="92000"/>
+              <a:buFont typeface="Wingdings 2" panose="05020102010507070707" pitchFamily="18" charset="2"/>
+              <a:buChar char=""/>
+              <a:defRPr sz="1200">
+                <a:solidFill>
+                  <a:schemeClr val="tx2"/>
+                </a:solidFill>
+              </a:defRPr>
+            </a:lvl7pPr>
+            <a:lvl8pPr marL="2500000" indent="-228600" defTabSz="457200">
+              <a:spcBef>
+                <a:spcPct val="20000"/>
+              </a:spcBef>
+              <a:spcAft>
+                <a:spcPts val="600"/>
+              </a:spcAft>
+              <a:buClr>
+                <a:schemeClr val="accent2"/>
+              </a:buClr>
+              <a:buSzPct val="92000"/>
+              <a:buFont typeface="Wingdings 2" panose="05020102010507070707" pitchFamily="18" charset="2"/>
+              <a:buChar char=""/>
+              <a:defRPr sz="1200">
+                <a:solidFill>
+                  <a:schemeClr val="tx2"/>
+                </a:solidFill>
+              </a:defRPr>
+            </a:lvl8pPr>
+            <a:lvl9pPr marL="2800000" indent="-228600" defTabSz="457200">
+              <a:spcBef>
+                <a:spcPct val="20000"/>
+              </a:spcBef>
+              <a:spcAft>
+                <a:spcPts val="600"/>
+              </a:spcAft>
+              <a:buClr>
+                <a:schemeClr val="accent2"/>
+              </a:buClr>
+              <a:buSzPct val="92000"/>
+              <a:buFont typeface="Wingdings 2" panose="05020102010507070707" pitchFamily="18" charset="2"/>
+              <a:buChar char=""/>
+              <a:defRPr sz="1200">
+                <a:solidFill>
+                  <a:schemeClr val="tx2"/>
+                </a:solidFill>
+              </a:defRPr>
+            </a:lvl9pPr>
+          </a:lstStyle>
+          <a:p>
+            <a:r>
+              <a:rPr lang="fr-FR" dirty="0"/>
+              <a:t>Données des logs de synchro </a:t>
+            </a:r>
+            <a:r>
+              <a:rPr lang="fr-FR" dirty="0" err="1"/>
+              <a:t>Airbyte</a:t>
+            </a:r>
+            <a:endParaRPr lang="fr-FR" dirty="0"/>
+          </a:p>
+          <a:p>
+            <a:endParaRPr lang="fr-FR" dirty="0"/>
+          </a:p>
+          <a:p>
+            <a:r>
+              <a:rPr lang="fr-FR" dirty="0"/>
+              <a:t>Temps de chargement des données pouvant être supérieur à 6min</a:t>
+            </a:r>
+          </a:p>
+          <a:p>
+            <a:endParaRPr lang="fr-FR" dirty="0"/>
+          </a:p>
+          <a:p>
+            <a:r>
+              <a:rPr lang="fr-FR" dirty="0"/>
+              <a:t>Le temps de chargement dépend de la connexion internet, des éventuelles latences d’</a:t>
+            </a:r>
+            <a:r>
+              <a:rPr lang="fr-FR" dirty="0" err="1"/>
+              <a:t>Airbyte</a:t>
+            </a:r>
+            <a:r>
+              <a:rPr lang="fr-FR" dirty="0"/>
+              <a:t>, de la quantité de données chargée</a:t>
+            </a:r>
+          </a:p>
+        </p:txBody>
+      </p:sp>
     </p:spTree>
     <p:extLst>
       <p:ext uri="{BB962C8B-B14F-4D97-AF65-F5344CB8AC3E}">
@@ -16118,7 +18912,7 @@
             <a:pPr rtl="0"/>
             <a:fld id="{22897033-9A55-4DAC-991D-1FF1921C78B7}" type="datetime1">
               <a:rPr lang="fr-FR" smtClean="0"/>
-              <a:t>21/08/2026</a:t>
+              <a:t>25/08/2026</a:t>
             </a:fld>
             <a:endParaRPr lang="en-US" dirty="0"/>
           </a:p>
@@ -16209,6 +19003,84 @@
               <a:t>marts</a:t>
             </a:r>
             <a:endParaRPr lang="fr-FR" dirty="0"/>
+          </a:p>
+        </p:txBody>
+      </p:sp>
+      <p:sp>
+        <p:nvSpPr>
+          <p:cNvPr id="3" name="ZoneTexte 2">
+            <a:extLst>
+              <a:ext uri="{FF2B5EF4-FFF2-40B4-BE49-F238E27FC236}">
+                <a16:creationId xmlns:a16="http://schemas.microsoft.com/office/drawing/2014/main" id="{E6F3472F-1C0E-19C4-ADCC-E3787222C1D8}"/>
+              </a:ext>
+            </a:extLst>
+          </p:cNvPr>
+          <p:cNvSpPr txBox="1"/>
+          <p:nvPr/>
+        </p:nvSpPr>
+        <p:spPr>
+          <a:xfrm>
+            <a:off x="8867793" y="2597346"/>
+            <a:ext cx="3189736" cy="358303"/>
+          </a:xfrm>
+          <a:prstGeom prst="rect">
+            <a:avLst/>
+          </a:prstGeom>
+          <a:noFill/>
+        </p:spPr>
+        <p:txBody>
+          <a:bodyPr wrap="square" rtlCol="0">
+            <a:spAutoFit/>
+          </a:bodyPr>
+          <a:lstStyle/>
+          <a:p>
+            <a:pPr marL="306000" indent="-306000" defTabSz="457200">
+              <a:lnSpc>
+                <a:spcPct val="110000"/>
+              </a:lnSpc>
+              <a:spcBef>
+                <a:spcPct val="20000"/>
+              </a:spcBef>
+              <a:spcAft>
+                <a:spcPts val="600"/>
+              </a:spcAft>
+              <a:buClr>
+                <a:schemeClr val="accent1"/>
+              </a:buClr>
+              <a:buSzPct val="92000"/>
+              <a:buFont typeface="Wingdings 2" panose="05020102010507070707" pitchFamily="18" charset="2"/>
+              <a:buChar char=""/>
+            </a:pPr>
+            <a:r>
+              <a:rPr lang="fr-FR" sz="1700" dirty="0">
+                <a:solidFill>
+                  <a:schemeClr val="tx1">
+                    <a:lumMod val="75000"/>
+                    <a:lumOff val="25000"/>
+                  </a:schemeClr>
+                </a:solidFill>
+              </a:rPr>
+              <a:t>Données tirées des logs </a:t>
+            </a:r>
+            <a:r>
+              <a:rPr lang="fr-FR" sz="1700" dirty="0" err="1">
+                <a:solidFill>
+                  <a:schemeClr val="tx1">
+                    <a:lumMod val="75000"/>
+                    <a:lumOff val="25000"/>
+                  </a:schemeClr>
+                </a:solidFill>
+              </a:rPr>
+              <a:t>dbt</a:t>
+            </a:r>
+            <a:endParaRPr lang="fr-FR" sz="1700" dirty="0">
+              <a:solidFill>
+                <a:schemeClr val="tx1">
+                  <a:lumMod val="75000"/>
+                  <a:lumOff val="25000"/>
+                </a:schemeClr>
+              </a:solidFill>
+            </a:endParaRPr>
           </a:p>
         </p:txBody>
       </p:sp>
@@ -16330,7 +19202,7 @@
             <a:pPr rtl="0"/>
             <a:fld id="{22897033-9A55-4DAC-991D-1FF1921C78B7}" type="datetime1">
               <a:rPr lang="fr-FR" smtClean="0"/>
-              <a:t>21/08/2026</a:t>
+              <a:t>25/08/2026</a:t>
             </a:fld>
             <a:endParaRPr lang="en-US" dirty="0"/>
           </a:p>
@@ -16418,7 +19290,7 @@
             <a:pPr rtl="0"/>
             <a:fld id="{22897033-9A55-4DAC-991D-1FF1921C78B7}" type="datetime1">
               <a:rPr lang="fr-FR" smtClean="0"/>
-              <a:t>21/08/2026</a:t>
+              <a:t>25/08/2026</a:t>
             </a:fld>
             <a:endParaRPr lang="en-US" dirty="0"/>
           </a:p>
@@ -16447,7 +19319,9 @@
           </a:xfrm>
         </p:spPr>
         <p:txBody>
-          <a:bodyPr/>
+          <a:bodyPr>
+            <a:normAutofit fontScale="92500"/>
+          </a:bodyPr>
           <a:lstStyle/>
           <a:p>
             <a:r>
@@ -16473,6 +19347,22 @@
               <a:rPr lang="fr-FR" dirty="0" err="1"/>
               <a:t>station_id</a:t>
             </a:r>
+            <a:r>
+              <a:rPr lang="fr-FR" dirty="0"/>
+              <a:t>, </a:t>
+            </a:r>
+            <a:r>
+              <a:rPr lang="fr-FR" dirty="0" err="1"/>
+              <a:t>observation_date</a:t>
+            </a:r>
+            <a:r>
+              <a:rPr lang="fr-FR" dirty="0"/>
+              <a:t>, </a:t>
+            </a:r>
+            <a:r>
+              <a:rPr lang="fr-FR" dirty="0" err="1"/>
+              <a:t>observation_time</a:t>
+            </a:r>
             <a:endParaRPr lang="fr-FR" dirty="0"/>
           </a:p>
           <a:p>
@@ -16487,6 +19377,22 @@
             <a:r>
               <a:rPr lang="fr-FR" dirty="0" err="1"/>
               <a:t>station_id</a:t>
+            </a:r>
+            <a:r>
+              <a:rPr lang="fr-FR" dirty="0"/>
+              <a:t>, </a:t>
+            </a:r>
+            <a:r>
+              <a:rPr lang="fr-FR" dirty="0" err="1"/>
+              <a:t>observation_date</a:t>
+            </a:r>
+            <a:r>
+              <a:rPr lang="fr-FR" dirty="0"/>
+              <a:t>, </a:t>
+            </a:r>
+            <a:r>
+              <a:rPr lang="fr-FR" dirty="0" err="1"/>
+              <a:t>observation_time</a:t>
             </a:r>
             <a:r>
               <a:rPr lang="fr-FR" dirty="0"/>
@@ -16670,7 +19576,7 @@
             <a:pPr rtl="0"/>
             <a:fld id="{22897033-9A55-4DAC-991D-1FF1921C78B7}" type="datetime1">
               <a:rPr lang="fr-FR" smtClean="0"/>
-              <a:t>21/08/2026</a:t>
+              <a:t>25/08/2026</a:t>
             </a:fld>
             <a:endParaRPr lang="en-US" dirty="0"/>
           </a:p>
@@ -16706,6 +19612,65 @@
           </a:prstGeom>
         </p:spPr>
       </p:pic>
+      <p:sp>
+        <p:nvSpPr>
+          <p:cNvPr id="3" name="ZoneTexte 2">
+            <a:extLst>
+              <a:ext uri="{FF2B5EF4-FFF2-40B4-BE49-F238E27FC236}">
+                <a16:creationId xmlns:a16="http://schemas.microsoft.com/office/drawing/2014/main" id="{CE7F2CA8-5623-0C70-B3D2-62A9492601D4}"/>
+              </a:ext>
+            </a:extLst>
+          </p:cNvPr>
+          <p:cNvSpPr txBox="1"/>
+          <p:nvPr/>
+        </p:nvSpPr>
+        <p:spPr>
+          <a:xfrm>
+            <a:off x="8867793" y="2597346"/>
+            <a:ext cx="3189736" cy="933845"/>
+          </a:xfrm>
+          <a:prstGeom prst="rect">
+            <a:avLst/>
+          </a:prstGeom>
+          <a:noFill/>
+        </p:spPr>
+        <p:txBody>
+          <a:bodyPr wrap="square" rtlCol="0">
+            <a:spAutoFit/>
+          </a:bodyPr>
+          <a:lstStyle/>
+          <a:p>
+            <a:pPr marL="306000" indent="-306000" defTabSz="457200">
+              <a:lnSpc>
+                <a:spcPct val="110000"/>
+              </a:lnSpc>
+              <a:spcBef>
+                <a:spcPct val="20000"/>
+              </a:spcBef>
+              <a:spcAft>
+                <a:spcPts val="600"/>
+              </a:spcAft>
+              <a:buClr>
+                <a:schemeClr val="accent1"/>
+              </a:buClr>
+              <a:buSzPct val="92000"/>
+              <a:buFont typeface="Wingdings 2" panose="05020102010507070707" pitchFamily="18" charset="2"/>
+              <a:buChar char=""/>
+            </a:pPr>
+            <a:r>
+              <a:rPr lang="fr-FR" sz="1700" dirty="0">
+                <a:solidFill>
+                  <a:schemeClr val="tx1">
+                    <a:lumMod val="75000"/>
+                    <a:lumOff val="25000"/>
+                  </a:schemeClr>
+                </a:solidFill>
+              </a:rPr>
+              <a:t>Mise en place du suivi des coûts des services AWS utilisés</a:t>
+            </a:r>
+          </a:p>
+        </p:txBody>
+      </p:sp>
     </p:spTree>
     <p:extLst>
       <p:ext uri="{BB962C8B-B14F-4D97-AF65-F5344CB8AC3E}">
@@ -16794,6 +19759,11 @@
           <a:prstGeom prst="rect">
             <a:avLst/>
           </a:prstGeom>
+          <a:ln>
+            <a:solidFill>
+              <a:srgbClr val="00B050"/>
+            </a:solidFill>
+          </a:ln>
         </p:spPr>
       </p:pic>
       <p:sp>
@@ -16820,7 +19790,7 @@
             <a:pPr rtl="0"/>
             <a:fld id="{22897033-9A55-4DAC-991D-1FF1921C78B7}" type="datetime1">
               <a:rPr lang="fr-FR" smtClean="0"/>
-              <a:t>21/08/2026</a:t>
+              <a:t>25/08/2026</a:t>
             </a:fld>
             <a:endParaRPr lang="en-US" dirty="0"/>
           </a:p>
@@ -16854,8 +19824,97 @@
           <a:prstGeom prst="rect">
             <a:avLst/>
           </a:prstGeom>
+          <a:ln>
+            <a:solidFill>
+              <a:srgbClr val="00B050"/>
+            </a:solidFill>
+          </a:ln>
         </p:spPr>
       </p:pic>
+      <p:sp>
+        <p:nvSpPr>
+          <p:cNvPr id="3" name="ZoneTexte 2">
+            <a:extLst>
+              <a:ext uri="{FF2B5EF4-FFF2-40B4-BE49-F238E27FC236}">
+                <a16:creationId xmlns:a16="http://schemas.microsoft.com/office/drawing/2014/main" id="{6C780DC9-74CA-26FE-1638-12DEE96BEFB7}"/>
+              </a:ext>
+            </a:extLst>
+          </p:cNvPr>
+          <p:cNvSpPr txBox="1"/>
+          <p:nvPr/>
+        </p:nvSpPr>
+        <p:spPr>
+          <a:xfrm>
+            <a:off x="5262282" y="2033370"/>
+            <a:ext cx="2343669" cy="646331"/>
+          </a:xfrm>
+          <a:prstGeom prst="rect">
+            <a:avLst/>
+          </a:prstGeom>
+          <a:solidFill>
+            <a:schemeClr val="bg1"/>
+          </a:solidFill>
+          <a:ln w="12700">
+            <a:solidFill>
+              <a:srgbClr val="00B050"/>
+            </a:solidFill>
+          </a:ln>
+        </p:spPr>
+        <p:txBody>
+          <a:bodyPr wrap="square" rtlCol="0">
+            <a:spAutoFit/>
+          </a:bodyPr>
+          <a:lstStyle/>
+          <a:p>
+            <a:r>
+              <a:rPr lang="fr-FR" dirty="0"/>
+              <a:t>RDS pour la base de données PostgreSQL</a:t>
+            </a:r>
+          </a:p>
+        </p:txBody>
+      </p:sp>
+      <p:sp>
+        <p:nvSpPr>
+          <p:cNvPr id="5" name="ZoneTexte 4">
+            <a:extLst>
+              <a:ext uri="{FF2B5EF4-FFF2-40B4-BE49-F238E27FC236}">
+                <a16:creationId xmlns:a16="http://schemas.microsoft.com/office/drawing/2014/main" id="{6C5DD885-1EA2-7EED-3077-A930F4113357}"/>
+              </a:ext>
+            </a:extLst>
+          </p:cNvPr>
+          <p:cNvSpPr txBox="1"/>
+          <p:nvPr/>
+        </p:nvSpPr>
+        <p:spPr>
+          <a:xfrm>
+            <a:off x="5262282" y="3416735"/>
+            <a:ext cx="2343669" cy="923330"/>
+          </a:xfrm>
+          <a:prstGeom prst="rect">
+            <a:avLst/>
+          </a:prstGeom>
+          <a:solidFill>
+            <a:schemeClr val="bg1"/>
+          </a:solidFill>
+          <a:ln w="12700">
+            <a:solidFill>
+              <a:srgbClr val="00B050"/>
+            </a:solidFill>
+          </a:ln>
+        </p:spPr>
+        <p:txBody>
+          <a:bodyPr wrap="square" rtlCol="0">
+            <a:spAutoFit/>
+          </a:bodyPr>
+          <a:lstStyle/>
+          <a:p>
+            <a:r>
+              <a:rPr lang="fr-FR" dirty="0"/>
+              <a:t>ECS cluster pour l’exécution des tâches et services</a:t>
+            </a:r>
+          </a:p>
+        </p:txBody>
+      </p:sp>
     </p:spTree>
     <p:extLst>
       <p:ext uri="{BB962C8B-B14F-4D97-AF65-F5344CB8AC3E}">
@@ -16938,7 +19997,7 @@
             <a:pPr rtl="0"/>
             <a:fld id="{22897033-9A55-4DAC-991D-1FF1921C78B7}" type="datetime1">
               <a:rPr lang="fr-FR" smtClean="0"/>
-              <a:t>21/08/2026</a:t>
+              <a:t>25/08/2026</a:t>
             </a:fld>
             <a:endParaRPr lang="en-US" dirty="0"/>
           </a:p>
@@ -16972,6 +20031,11 @@
           <a:prstGeom prst="rect">
             <a:avLst/>
           </a:prstGeom>
+          <a:ln>
+            <a:solidFill>
+              <a:srgbClr val="00B050"/>
+            </a:solidFill>
+          </a:ln>
         </p:spPr>
       </p:pic>
       <p:pic>
@@ -17002,8 +20066,125 @@
           <a:prstGeom prst="rect">
             <a:avLst/>
           </a:prstGeom>
+          <a:ln>
+            <a:solidFill>
+              <a:srgbClr val="00B050"/>
+            </a:solidFill>
+          </a:ln>
         </p:spPr>
       </p:pic>
+      <p:sp>
+        <p:nvSpPr>
+          <p:cNvPr id="3" name="ZoneTexte 2">
+            <a:extLst>
+              <a:ext uri="{FF2B5EF4-FFF2-40B4-BE49-F238E27FC236}">
+                <a16:creationId xmlns:a16="http://schemas.microsoft.com/office/drawing/2014/main" id="{2A9FB985-0B06-0CBF-438D-46ABAFCF8231}"/>
+              </a:ext>
+            </a:extLst>
+          </p:cNvPr>
+          <p:cNvSpPr txBox="1"/>
+          <p:nvPr/>
+        </p:nvSpPr>
+        <p:spPr>
+          <a:xfrm>
+            <a:off x="5262282" y="1851655"/>
+            <a:ext cx="2343669" cy="923330"/>
+          </a:xfrm>
+          <a:prstGeom prst="rect">
+            <a:avLst/>
+          </a:prstGeom>
+          <a:solidFill>
+            <a:schemeClr val="bg1"/>
+          </a:solidFill>
+          <a:ln w="12700">
+            <a:solidFill>
+              <a:srgbClr val="00B050"/>
+            </a:solidFill>
+          </a:ln>
+        </p:spPr>
+        <p:txBody>
+          <a:bodyPr wrap="square" rtlCol="0">
+            <a:spAutoFit/>
+          </a:bodyPr>
+          <a:lstStyle/>
+          <a:p>
+            <a:r>
+              <a:rPr lang="fr-FR" dirty="0"/>
+              <a:t>ECS définitions de tâches pour </a:t>
+            </a:r>
+            <a:r>
+              <a:rPr lang="fr-FR" dirty="0" err="1"/>
+              <a:t>dbt</a:t>
+            </a:r>
+            <a:r>
+              <a:rPr lang="fr-FR" dirty="0"/>
+              <a:t> </a:t>
+            </a:r>
+            <a:r>
+              <a:rPr lang="fr-FR" dirty="0" err="1"/>
+              <a:t>build</a:t>
+            </a:r>
+            <a:r>
+              <a:rPr lang="fr-FR" dirty="0"/>
+              <a:t> et </a:t>
+            </a:r>
+            <a:r>
+              <a:rPr lang="fr-FR" dirty="0" err="1"/>
+              <a:t>dbt</a:t>
+            </a:r>
+            <a:r>
+              <a:rPr lang="fr-FR" dirty="0"/>
+              <a:t> docs serve</a:t>
+            </a:r>
+          </a:p>
+        </p:txBody>
+      </p:sp>
+      <p:sp>
+        <p:nvSpPr>
+          <p:cNvPr id="5" name="ZoneTexte 4">
+            <a:extLst>
+              <a:ext uri="{FF2B5EF4-FFF2-40B4-BE49-F238E27FC236}">
+                <a16:creationId xmlns:a16="http://schemas.microsoft.com/office/drawing/2014/main" id="{A4AF8742-CFC9-4331-6634-9CAF9FF5D93E}"/>
+              </a:ext>
+            </a:extLst>
+          </p:cNvPr>
+          <p:cNvSpPr txBox="1"/>
+          <p:nvPr/>
+        </p:nvSpPr>
+        <p:spPr>
+          <a:xfrm>
+            <a:off x="5262282" y="3789393"/>
+            <a:ext cx="2343669" cy="646331"/>
+          </a:xfrm>
+          <a:prstGeom prst="rect">
+            <a:avLst/>
+          </a:prstGeom>
+          <a:solidFill>
+            <a:schemeClr val="bg1"/>
+          </a:solidFill>
+          <a:ln w="12700">
+            <a:solidFill>
+              <a:srgbClr val="00B050"/>
+            </a:solidFill>
+          </a:ln>
+        </p:spPr>
+        <p:txBody>
+          <a:bodyPr wrap="square" rtlCol="0">
+            <a:spAutoFit/>
+          </a:bodyPr>
+          <a:lstStyle/>
+          <a:p>
+            <a:r>
+              <a:rPr lang="fr-FR" dirty="0" err="1"/>
+              <a:t>CloudWatch</a:t>
+            </a:r>
+            <a:r>
+              <a:rPr lang="fr-FR" dirty="0"/>
+              <a:t> pour les logs ECS et RDS</a:t>
+            </a:r>
+          </a:p>
+        </p:txBody>
+      </p:sp>
     </p:spTree>
     <p:extLst>
       <p:ext uri="{BB962C8B-B14F-4D97-AF65-F5344CB8AC3E}">
@@ -17086,7 +20267,7 @@
             <a:pPr rtl="0"/>
             <a:fld id="{22897033-9A55-4DAC-991D-1FF1921C78B7}" type="datetime1">
               <a:rPr lang="fr-FR" smtClean="0"/>
-              <a:t>21/08/2026</a:t>
+              <a:t>25/08/2026</a:t>
             </a:fld>
             <a:endParaRPr lang="en-US" dirty="0"/>
           </a:p>
@@ -17120,6 +20301,11 @@
           <a:prstGeom prst="rect">
             <a:avLst/>
           </a:prstGeom>
+          <a:ln>
+            <a:solidFill>
+              <a:srgbClr val="00B050"/>
+            </a:solidFill>
+          </a:ln>
         </p:spPr>
       </p:pic>
       <p:pic>
@@ -17138,20 +20324,119 @@
         </p:nvPicPr>
         <p:blipFill>
           <a:blip r:embed="rId3"/>
+          <a:srcRect t="2739"/>
           <a:stretch>
             <a:fillRect/>
           </a:stretch>
         </p:blipFill>
         <p:spPr>
           <a:xfrm>
-            <a:off x="0" y="4769457"/>
-            <a:ext cx="12192000" cy="1300820"/>
+            <a:off x="0" y="4805081"/>
+            <a:ext cx="12192000" cy="1265195"/>
           </a:xfrm>
           <a:prstGeom prst="rect">
             <a:avLst/>
           </a:prstGeom>
+          <a:ln>
+            <a:solidFill>
+              <a:srgbClr val="00B050"/>
+            </a:solidFill>
+          </a:ln>
         </p:spPr>
       </p:pic>
+      <p:sp>
+        <p:nvSpPr>
+          <p:cNvPr id="3" name="ZoneTexte 2">
+            <a:extLst>
+              <a:ext uri="{FF2B5EF4-FFF2-40B4-BE49-F238E27FC236}">
+                <a16:creationId xmlns:a16="http://schemas.microsoft.com/office/drawing/2014/main" id="{8954C034-F17C-B0E2-D36E-61FDD169DB68}"/>
+              </a:ext>
+            </a:extLst>
+          </p:cNvPr>
+          <p:cNvSpPr txBox="1"/>
+          <p:nvPr/>
+        </p:nvSpPr>
+        <p:spPr>
+          <a:xfrm>
+            <a:off x="5468470" y="2244513"/>
+            <a:ext cx="2343669" cy="646331"/>
+          </a:xfrm>
+          <a:prstGeom prst="rect">
+            <a:avLst/>
+          </a:prstGeom>
+          <a:solidFill>
+            <a:schemeClr val="bg1"/>
+          </a:solidFill>
+          <a:ln w="12700">
+            <a:solidFill>
+              <a:srgbClr val="00B050"/>
+            </a:solidFill>
+          </a:ln>
+        </p:spPr>
+        <p:txBody>
+          <a:bodyPr wrap="square" rtlCol="0">
+            <a:spAutoFit/>
+          </a:bodyPr>
+          <a:lstStyle/>
+          <a:p>
+            <a:r>
+              <a:rPr lang="fr-FR" dirty="0" err="1"/>
+              <a:t>EvenBridge</a:t>
+            </a:r>
+            <a:r>
+              <a:rPr lang="fr-FR" dirty="0"/>
+              <a:t> pour la planification de tâche</a:t>
+            </a:r>
+          </a:p>
+        </p:txBody>
+      </p:sp>
+      <p:sp>
+        <p:nvSpPr>
+          <p:cNvPr id="5" name="ZoneTexte 4">
+            <a:extLst>
+              <a:ext uri="{FF2B5EF4-FFF2-40B4-BE49-F238E27FC236}">
+                <a16:creationId xmlns:a16="http://schemas.microsoft.com/office/drawing/2014/main" id="{C03C9884-3489-FA0F-12F4-C45931198EA8}"/>
+              </a:ext>
+            </a:extLst>
+          </p:cNvPr>
+          <p:cNvSpPr txBox="1"/>
+          <p:nvPr/>
+        </p:nvSpPr>
+        <p:spPr>
+          <a:xfrm>
+            <a:off x="5468470" y="4613487"/>
+            <a:ext cx="2137481" cy="646331"/>
+          </a:xfrm>
+          <a:prstGeom prst="rect">
+            <a:avLst/>
+          </a:prstGeom>
+          <a:solidFill>
+            <a:schemeClr val="bg1"/>
+          </a:solidFill>
+          <a:ln w="12700">
+            <a:solidFill>
+              <a:srgbClr val="00B050"/>
+            </a:solidFill>
+          </a:ln>
+        </p:spPr>
+        <p:txBody>
+          <a:bodyPr wrap="square" rtlCol="0">
+            <a:spAutoFit/>
+          </a:bodyPr>
+          <a:lstStyle/>
+          <a:p>
+            <a:r>
+              <a:rPr lang="fr-FR" dirty="0"/>
+              <a:t>EC2 instance pour </a:t>
+            </a:r>
+            <a:r>
+              <a:rPr lang="fr-FR" dirty="0" err="1"/>
+              <a:t>Airbyte</a:t>
+            </a:r>
+            <a:endParaRPr lang="fr-FR" dirty="0"/>
+          </a:p>
+        </p:txBody>
+      </p:sp>
     </p:spTree>
     <p:extLst>
       <p:ext uri="{BB962C8B-B14F-4D97-AF65-F5344CB8AC3E}">
@@ -17234,7 +20519,7 @@
             <a:pPr rtl="0"/>
             <a:fld id="{22897033-9A55-4DAC-991D-1FF1921C78B7}" type="datetime1">
               <a:rPr lang="fr-FR" smtClean="0"/>
-              <a:t>21/08/2026</a:t>
+              <a:t>25/08/2026</a:t>
             </a:fld>
             <a:endParaRPr lang="en-US" dirty="0"/>
           </a:p>
@@ -17268,8 +20553,55 @@
           <a:prstGeom prst="rect">
             <a:avLst/>
           </a:prstGeom>
+          <a:ln>
+            <a:solidFill>
+              <a:srgbClr val="00B050"/>
+            </a:solidFill>
+          </a:ln>
         </p:spPr>
       </p:pic>
+      <p:sp>
+        <p:nvSpPr>
+          <p:cNvPr id="3" name="ZoneTexte 2">
+            <a:extLst>
+              <a:ext uri="{FF2B5EF4-FFF2-40B4-BE49-F238E27FC236}">
+                <a16:creationId xmlns:a16="http://schemas.microsoft.com/office/drawing/2014/main" id="{323BB8A1-670A-9FC6-E9EF-A94486AA58FD}"/>
+              </a:ext>
+            </a:extLst>
+          </p:cNvPr>
+          <p:cNvSpPr txBox="1"/>
+          <p:nvPr/>
+        </p:nvSpPr>
+        <p:spPr>
+          <a:xfrm>
+            <a:off x="5477435" y="2150085"/>
+            <a:ext cx="2343669" cy="1200329"/>
+          </a:xfrm>
+          <a:prstGeom prst="rect">
+            <a:avLst/>
+          </a:prstGeom>
+          <a:solidFill>
+            <a:schemeClr val="bg1"/>
+          </a:solidFill>
+          <a:ln w="12700">
+            <a:solidFill>
+              <a:srgbClr val="00B050"/>
+            </a:solidFill>
+          </a:ln>
+        </p:spPr>
+        <p:txBody>
+          <a:bodyPr wrap="square" rtlCol="0">
+            <a:spAutoFit/>
+          </a:bodyPr>
+          <a:lstStyle/>
+          <a:p>
+            <a:r>
+              <a:rPr lang="fr-FR" dirty="0"/>
+              <a:t>Secret Manager pour la gestion des secrets RDS (PostgreSQL) et DBT</a:t>
+            </a:r>
+          </a:p>
+        </p:txBody>
+      </p:sp>
     </p:spTree>
     <p:extLst>
       <p:ext uri="{BB962C8B-B14F-4D97-AF65-F5344CB8AC3E}">
@@ -17642,7 +20974,7 @@
             <a:pPr rtl="0"/>
             <a:fld id="{A1255F31-5DB3-4925-BA87-822F5B17A2F1}" type="datetime1">
               <a:rPr lang="fr-FR" smtClean="0"/>
-              <a:t>21/08/2026</a:t>
+              <a:t>25/08/2026</a:t>
             </a:fld>
             <a:endParaRPr lang="en-US" dirty="0"/>
           </a:p>
@@ -18490,116 +21822,6 @@
 <file path=ppt/slides/slide27.xml><?xml version="1.0" encoding="utf-8"?>
 <p:sld xmlns:a="http://schemas.openxmlformats.org/drawingml/2006/main" xmlns:r="http://schemas.openxmlformats.org/officeDocument/2006/relationships" xmlns:p="http://schemas.openxmlformats.org/presentationml/2006/main">
   <p:cSld>
-    <p:spTree>
-      <p:nvGrpSpPr>
-        <p:cNvPr id="1" name=""/>
-        <p:cNvGrpSpPr/>
-        <p:nvPr/>
-      </p:nvGrpSpPr>
-      <p:grpSpPr>
-        <a:xfrm>
-          <a:off x="0" y="0"/>
-          <a:ext cx="0" cy="0"/>
-          <a:chOff x="0" y="0"/>
-          <a:chExt cx="0" cy="0"/>
-        </a:xfrm>
-      </p:grpSpPr>
-      <p:sp>
-        <p:nvSpPr>
-          <p:cNvPr id="2" name="Titre 1">
-            <a:extLst>
-              <a:ext uri="{FF2B5EF4-FFF2-40B4-BE49-F238E27FC236}">
-                <a16:creationId xmlns:a16="http://schemas.microsoft.com/office/drawing/2014/main" id="{B420B823-7776-D5B3-80FA-03A71C84C9A7}"/>
-              </a:ext>
-            </a:extLst>
-          </p:cNvPr>
-          <p:cNvSpPr>
-            <a:spLocks noGrp="1"/>
-          </p:cNvSpPr>
-          <p:nvPr>
-            <p:ph type="title"/>
-          </p:nvPr>
-        </p:nvSpPr>
-        <p:spPr/>
-        <p:txBody>
-          <a:bodyPr/>
-          <a:lstStyle/>
-          <a:p>
-            <a:endParaRPr lang="fr-FR"/>
-          </a:p>
-        </p:txBody>
-      </p:sp>
-      <p:sp>
-        <p:nvSpPr>
-          <p:cNvPr id="3" name="Espace réservé du contenu 2">
-            <a:extLst>
-              <a:ext uri="{FF2B5EF4-FFF2-40B4-BE49-F238E27FC236}">
-                <a16:creationId xmlns:a16="http://schemas.microsoft.com/office/drawing/2014/main" id="{54470396-BE62-2B51-CC6E-B118E0316E6A}"/>
-              </a:ext>
-            </a:extLst>
-          </p:cNvPr>
-          <p:cNvSpPr>
-            <a:spLocks noGrp="1"/>
-          </p:cNvSpPr>
-          <p:nvPr>
-            <p:ph idx="1"/>
-          </p:nvPr>
-        </p:nvSpPr>
-        <p:spPr/>
-        <p:txBody>
-          <a:bodyPr/>
-          <a:lstStyle/>
-          <a:p>
-            <a:endParaRPr lang="fr-FR"/>
-          </a:p>
-        </p:txBody>
-      </p:sp>
-      <p:sp>
-        <p:nvSpPr>
-          <p:cNvPr id="4" name="Espace réservé de la date 3">
-            <a:extLst>
-              <a:ext uri="{FF2B5EF4-FFF2-40B4-BE49-F238E27FC236}">
-                <a16:creationId xmlns:a16="http://schemas.microsoft.com/office/drawing/2014/main" id="{96CD73EE-8902-50CE-AF9B-4E2751061B11}"/>
-              </a:ext>
-            </a:extLst>
-          </p:cNvPr>
-          <p:cNvSpPr>
-            <a:spLocks noGrp="1"/>
-          </p:cNvSpPr>
-          <p:nvPr>
-            <p:ph type="dt" sz="half" idx="10"/>
-          </p:nvPr>
-        </p:nvSpPr>
-        <p:spPr/>
-        <p:txBody>
-          <a:bodyPr/>
-          <a:lstStyle/>
-          <a:p>
-            <a:pPr rtl="0"/>
-            <a:fld id="{22897033-9A55-4DAC-991D-1FF1921C78B7}" type="datetime1">
-              <a:rPr lang="fr-FR" smtClean="0"/>
-              <a:t>21/08/2026</a:t>
-            </a:fld>
-            <a:endParaRPr lang="en-US" dirty="0"/>
-          </a:p>
-        </p:txBody>
-      </p:sp>
-    </p:spTree>
-    <p:extLst>
-      <p:ext uri="{BB962C8B-B14F-4D97-AF65-F5344CB8AC3E}">
-        <p14:creationId xmlns:p14="http://schemas.microsoft.com/office/powerpoint/2010/main" val="2370938000"/>
-      </p:ext>
-    </p:extLst>
-  </p:cSld>
-  <p:clrMapOvr>
-    <a:masterClrMapping/>
-  </p:clrMapOvr>
-</p:sld>
-</file>
-
-<file path=ppt/slides/slide28.xml><?xml version="1.0" encoding="utf-8"?>
-<p:sld xmlns:a="http://schemas.openxmlformats.org/drawingml/2006/main" xmlns:r="http://schemas.openxmlformats.org/officeDocument/2006/relationships" xmlns:p="http://schemas.openxmlformats.org/presentationml/2006/main">
-  <p:cSld>
     <p:bg>
       <p:bgPr>
         <a:solidFill>
@@ -18648,7 +21870,7 @@
             <a:pPr rtl="0"/>
             <a:fld id="{ACEC98BE-FCE2-445F-8146-3A7F8CC3881D}" type="datetime1">
               <a:rPr lang="fr-FR" smtClean="0"/>
-              <a:t>21/08/2026</a:t>
+              <a:t>25/08/2026</a:t>
             </a:fld>
             <a:endParaRPr lang="en-US" dirty="0"/>
           </a:p>
@@ -18810,7 +22032,7 @@
             <a:pPr rtl="0"/>
             <a:fld id="{22897033-9A55-4DAC-991D-1FF1921C78B7}" type="datetime1">
               <a:rPr lang="fr-FR" smtClean="0"/>
-              <a:t>21/08/2026</a:t>
+              <a:t>25/08/2026</a:t>
             </a:fld>
             <a:endParaRPr lang="en-US" dirty="0"/>
           </a:p>
@@ -18912,7 +22134,7 @@
             <a:fld id="{22897033-9A55-4DAC-991D-1FF1921C78B7}" type="datetime1">
               <a:rPr lang="fr-FR" smtClean="0"/>
               <a:pPr/>
-              <a:t>21/08/2026</a:t>
+              <a:t>25/08/2026</a:t>
             </a:fld>
             <a:endParaRPr lang="en-US" dirty="0"/>
           </a:p>
@@ -19036,7 +22258,7 @@
             <a:pPr rtl="0"/>
             <a:fld id="{22897033-9A55-4DAC-991D-1FF1921C78B7}" type="datetime1">
               <a:rPr lang="fr-FR" smtClean="0"/>
-              <a:t>21/08/2026</a:t>
+              <a:t>25/08/2026</a:t>
             </a:fld>
             <a:endParaRPr lang="en-US" dirty="0"/>
           </a:p>
@@ -19234,7 +22456,7 @@
                     <a:ea typeface="Consolas" pitchFamily="34" charset="-122"/>
                     <a:cs typeface="Consolas" pitchFamily="34" charset="-120"/>
                   </a:rPr>
-                  <a:t>GitHub</a:t>
+                  <a:t>GitHub/S3</a:t>
                 </a:r>
                 <a:endParaRPr lang="en-US" sz="1200" dirty="0">
                   <a:solidFill>
@@ -21143,7 +24365,7 @@
             <a:pPr rtl="0"/>
             <a:fld id="{22897033-9A55-4DAC-991D-1FF1921C78B7}" type="datetime1">
               <a:rPr lang="fr-FR" smtClean="0"/>
-              <a:t>21/08/2026</a:t>
+              <a:t>25/08/2026</a:t>
             </a:fld>
             <a:endParaRPr lang="en-US" dirty="0"/>
           </a:p>
@@ -21163,8 +24385,8 @@
         </p:nvSpPr>
         <p:spPr>
           <a:xfrm>
-            <a:off x="2528180" y="1971700"/>
-            <a:ext cx="6821777" cy="4751829"/>
+            <a:off x="2578507" y="1971700"/>
+            <a:ext cx="6697819" cy="4751829"/>
           </a:xfrm>
           <a:prstGeom prst="round2DiagRect">
             <a:avLst/>
@@ -23411,8 +26633,8 @@
         </p:nvSpPr>
         <p:spPr>
           <a:xfrm>
-            <a:off x="9446777" y="2818796"/>
-            <a:ext cx="1416523" cy="1081341"/>
+            <a:off x="10263321" y="3156277"/>
+            <a:ext cx="1416523" cy="684420"/>
           </a:xfrm>
           <a:prstGeom prst="roundRect">
             <a:avLst/>
@@ -23448,14 +26670,14 @@
           <a:p>
             <a:pPr algn="ctr"/>
             <a:r>
-              <a:rPr lang="fr-FR" dirty="0"/>
+              <a:rPr lang="fr-FR" sz="1400" dirty="0"/>
               <a:t>GitHub</a:t>
             </a:r>
           </a:p>
           <a:p>
             <a:pPr algn="ctr"/>
             <a:r>
-              <a:rPr lang="fr-FR" dirty="0"/>
+              <a:rPr lang="fr-FR" sz="1400" dirty="0"/>
               <a:t>(Données Brutes)</a:t>
             </a:r>
           </a:p>
@@ -23475,8 +26697,8 @@
         </p:nvSpPr>
         <p:spPr>
           <a:xfrm>
-            <a:off x="9559442" y="1746088"/>
-            <a:ext cx="1207039" cy="430887"/>
+            <a:off x="11142035" y="2470061"/>
+            <a:ext cx="1006229" cy="430887"/>
           </a:xfrm>
           <a:prstGeom prst="rect">
             <a:avLst/>
@@ -23491,15 +26713,7 @@
           <a:p>
             <a:r>
               <a:rPr lang="fr-FR" sz="1100" i="1" dirty="0"/>
-              <a:t>Chargement .</a:t>
-            </a:r>
-            <a:r>
-              <a:rPr lang="fr-FR" sz="1100" i="1" dirty="0" err="1"/>
-              <a:t>json</a:t>
-            </a:r>
-            <a:r>
-              <a:rPr lang="fr-FR" sz="1100" i="1" dirty="0"/>
-              <a:t>, .xlsx .csv</a:t>
+              <a:t>Chargement .csv</a:t>
             </a:r>
           </a:p>
         </p:txBody>
@@ -23522,8 +26736,8 @@
         </p:nvCxnSpPr>
         <p:spPr>
           <a:xfrm rot="5400000">
-            <a:off x="8967482" y="3602332"/>
-            <a:ext cx="889753" cy="1485363"/>
+            <a:off x="9346034" y="3164340"/>
+            <a:ext cx="949193" cy="2301907"/>
           </a:xfrm>
           <a:prstGeom prst="bentConnector2">
             <a:avLst/>
@@ -23883,9 +27097,37 @@
           <a:p>
             <a:pPr algn="ctr"/>
             <a:r>
-              <a:rPr lang="fr-FR" dirty="0"/>
+              <a:rPr lang="fr-FR" sz="1200" dirty="0"/>
               <a:t>Utilisateur</a:t>
             </a:r>
+          </a:p>
+          <a:p>
+            <a:pPr algn="ctr"/>
+            <a:r>
+              <a:rPr lang="fr-FR" sz="1200" dirty="0"/>
+              <a:t>(</a:t>
+            </a:r>
+            <a:r>
+              <a:rPr lang="fr-FR" sz="1200" dirty="0" err="1"/>
+              <a:t>pre-processing</a:t>
+            </a:r>
+            <a:r>
+              <a:rPr lang="fr-FR" sz="1200" dirty="0"/>
+              <a:t>, </a:t>
+            </a:r>
+            <a:r>
+              <a:rPr lang="fr-FR" sz="1200" dirty="0" err="1"/>
+              <a:t>creation</a:t>
+            </a:r>
+            <a:r>
+              <a:rPr lang="fr-FR" sz="1200" dirty="0"/>
+              <a:t> projet</a:t>
+            </a:r>
+            <a:r>
+              <a:rPr lang="fr-FR" sz="1100" dirty="0"/>
+              <a:t>)</a:t>
+            </a:r>
+            <a:endParaRPr lang="fr-FR" sz="1200" dirty="0"/>
           </a:p>
         </p:txBody>
       </p:sp>
@@ -23906,13 +27148,13 @@
           <p:nvPr/>
         </p:nvCxnSpPr>
         <p:spPr>
-          <a:xfrm rot="5400000">
-            <a:off x="9909058" y="1783044"/>
-            <a:ext cx="1281734" cy="789771"/>
+          <a:xfrm rot="16200000" flipH="1">
+            <a:off x="10148589" y="2333282"/>
+            <a:ext cx="1619215" cy="26773"/>
           </a:xfrm>
           <a:prstGeom prst="curvedConnector3">
             <a:avLst>
-              <a:gd name="adj1" fmla="val 50000"/>
+              <a:gd name="adj1" fmla="val 78789"/>
             </a:avLst>
           </a:prstGeom>
           <a:ln w="19050">
@@ -24015,7 +27257,7 @@
         </p:nvSpPr>
         <p:spPr>
           <a:xfrm>
-            <a:off x="10124502" y="4102438"/>
+            <a:off x="10162960" y="4359003"/>
             <a:ext cx="1207039" cy="430887"/>
           </a:xfrm>
           <a:prstGeom prst="rect">
@@ -24031,7 +27273,7 @@
           <a:p>
             <a:r>
               <a:rPr lang="fr-FR" sz="1100" i="1" dirty="0"/>
-              <a:t>Collecte de données</a:t>
+              <a:t>Collecte de données .csv</a:t>
             </a:r>
           </a:p>
         </p:txBody>
@@ -24107,7 +27349,7 @@
           </a:xfrm>
           <a:prstGeom prst="curvedConnector3">
             <a:avLst>
-              <a:gd name="adj1" fmla="val -29238"/>
+              <a:gd name="adj1" fmla="val -52170"/>
             </a:avLst>
           </a:prstGeom>
           <a:ln w="19050">
@@ -24146,7 +27388,7 @@
         </p:nvSpPr>
         <p:spPr>
           <a:xfrm>
-            <a:off x="10999336" y="3342552"/>
+            <a:off x="11245257" y="5157541"/>
             <a:ext cx="971075" cy="430887"/>
           </a:xfrm>
           <a:prstGeom prst="rect">
@@ -25017,6 +28259,231 @@
           </a:p>
         </p:txBody>
       </p:sp>
+      <p:sp>
+        <p:nvSpPr>
+          <p:cNvPr id="8" name="Rectangle : coins arrondis 7">
+            <a:extLst>
+              <a:ext uri="{FF2B5EF4-FFF2-40B4-BE49-F238E27FC236}">
+                <a16:creationId xmlns:a16="http://schemas.microsoft.com/office/drawing/2014/main" id="{D421DC26-9E1E-3058-A0E6-CDDC7968B886}"/>
+              </a:ext>
+            </a:extLst>
+          </p:cNvPr>
+          <p:cNvSpPr/>
+          <p:nvPr/>
+        </p:nvSpPr>
+        <p:spPr>
+          <a:xfrm>
+            <a:off x="9404055" y="2098555"/>
+            <a:ext cx="1478830" cy="718994"/>
+          </a:xfrm>
+          <a:prstGeom prst="roundRect">
+            <a:avLst/>
+          </a:prstGeom>
+          <a:solidFill>
+            <a:srgbClr val="CCCC00"/>
+          </a:solidFill>
+          <a:ln>
+            <a:solidFill>
+              <a:srgbClr val="996633"/>
+            </a:solidFill>
+          </a:ln>
+        </p:spPr>
+        <p:style>
+          <a:lnRef idx="2">
+            <a:schemeClr val="accent1">
+              <a:shade val="15000"/>
+            </a:schemeClr>
+          </a:lnRef>
+          <a:fillRef idx="1">
+            <a:schemeClr val="accent1"/>
+          </a:fillRef>
+          <a:effectRef idx="0">
+            <a:schemeClr val="accent1"/>
+          </a:effectRef>
+          <a:fontRef idx="minor">
+            <a:schemeClr val="lt1"/>
+          </a:fontRef>
+        </p:style>
+        <p:txBody>
+          <a:bodyPr rtlCol="0" anchor="ctr"/>
+          <a:lstStyle/>
+          <a:p>
+            <a:pPr algn="ctr"/>
+            <a:r>
+              <a:rPr lang="fr-FR" sz="1200" dirty="0"/>
+              <a:t>Amazon S3 extérieur (Données Brutes)</a:t>
+            </a:r>
+          </a:p>
+        </p:txBody>
+      </p:sp>
+      <p:cxnSp>
+        <p:nvCxnSpPr>
+          <p:cNvPr id="19" name="Connecteur : en arc 30">
+            <a:extLst>
+              <a:ext uri="{FF2B5EF4-FFF2-40B4-BE49-F238E27FC236}">
+                <a16:creationId xmlns:a16="http://schemas.microsoft.com/office/drawing/2014/main" id="{B29B4E36-A158-636F-D4B2-D21B2FBD51C3}"/>
+              </a:ext>
+            </a:extLst>
+          </p:cNvPr>
+          <p:cNvCxnSpPr>
+            <a:cxnSpLocks/>
+            <a:stCxn id="8" idx="2"/>
+            <a:endCxn id="11" idx="3"/>
+          </p:cNvCxnSpPr>
+          <p:nvPr/>
+        </p:nvCxnSpPr>
+        <p:spPr>
+          <a:xfrm rot="5400000">
+            <a:off x="8420403" y="3066822"/>
+            <a:ext cx="1972341" cy="1473794"/>
+          </a:xfrm>
+          <a:prstGeom prst="bentConnector2">
+            <a:avLst/>
+          </a:prstGeom>
+          <a:ln w="19050">
+            <a:solidFill>
+              <a:srgbClr val="996633"/>
+            </a:solidFill>
+            <a:tailEnd type="triangle"/>
+          </a:ln>
+        </p:spPr>
+        <p:style>
+          <a:lnRef idx="1">
+            <a:schemeClr val="accent1"/>
+          </a:lnRef>
+          <a:fillRef idx="0">
+            <a:schemeClr val="accent1"/>
+          </a:fillRef>
+          <a:effectRef idx="0">
+            <a:schemeClr val="accent1"/>
+          </a:effectRef>
+          <a:fontRef idx="minor">
+            <a:schemeClr val="tx1"/>
+          </a:fontRef>
+        </p:style>
+      </p:cxnSp>
+      <p:sp>
+        <p:nvSpPr>
+          <p:cNvPr id="26" name="ZoneTexte 25">
+            <a:extLst>
+              <a:ext uri="{FF2B5EF4-FFF2-40B4-BE49-F238E27FC236}">
+                <a16:creationId xmlns:a16="http://schemas.microsoft.com/office/drawing/2014/main" id="{4F79C028-0B05-874F-014B-7A8B84818D7D}"/>
+              </a:ext>
+            </a:extLst>
+          </p:cNvPr>
+          <p:cNvSpPr txBox="1"/>
+          <p:nvPr/>
+        </p:nvSpPr>
+        <p:spPr>
+          <a:xfrm>
+            <a:off x="9070099" y="1356673"/>
+            <a:ext cx="1174371" cy="430887"/>
+          </a:xfrm>
+          <a:prstGeom prst="rect">
+            <a:avLst/>
+          </a:prstGeom>
+          <a:noFill/>
+        </p:spPr>
+        <p:txBody>
+          <a:bodyPr wrap="square" rtlCol="0">
+            <a:spAutoFit/>
+          </a:bodyPr>
+          <a:lstStyle/>
+          <a:p>
+            <a:pPr algn="ctr"/>
+            <a:r>
+              <a:rPr lang="fr-FR" sz="1100" i="1" dirty="0"/>
+              <a:t>téléchargement .xlsx</a:t>
+            </a:r>
+          </a:p>
+        </p:txBody>
+      </p:sp>
+      <p:cxnSp>
+        <p:nvCxnSpPr>
+          <p:cNvPr id="27" name="Connecteur : en arc 26">
+            <a:extLst>
+              <a:ext uri="{FF2B5EF4-FFF2-40B4-BE49-F238E27FC236}">
+                <a16:creationId xmlns:a16="http://schemas.microsoft.com/office/drawing/2014/main" id="{F877F869-E227-1176-C39C-86F0E43ACBB0}"/>
+              </a:ext>
+            </a:extLst>
+          </p:cNvPr>
+          <p:cNvCxnSpPr>
+            <a:cxnSpLocks/>
+            <a:stCxn id="8" idx="0"/>
+            <a:endCxn id="94" idx="1"/>
+          </p:cNvCxnSpPr>
+          <p:nvPr/>
+        </p:nvCxnSpPr>
+        <p:spPr>
+          <a:xfrm rot="5400000" flipH="1" flipV="1">
+            <a:off x="9750238" y="1604323"/>
+            <a:ext cx="887464" cy="101000"/>
+          </a:xfrm>
+          <a:prstGeom prst="curvedConnector2">
+            <a:avLst/>
+          </a:prstGeom>
+          <a:ln w="19050">
+            <a:solidFill>
+              <a:srgbClr val="002060"/>
+            </a:solidFill>
+            <a:tailEnd type="triangle"/>
+          </a:ln>
+        </p:spPr>
+        <p:style>
+          <a:lnRef idx="1">
+            <a:schemeClr val="accent1"/>
+          </a:lnRef>
+          <a:fillRef idx="0">
+            <a:schemeClr val="accent1"/>
+          </a:fillRef>
+          <a:effectRef idx="0">
+            <a:schemeClr val="accent1"/>
+          </a:effectRef>
+          <a:fontRef idx="minor">
+            <a:schemeClr val="tx1"/>
+          </a:fontRef>
+        </p:style>
+      </p:cxnSp>
+      <p:sp>
+        <p:nvSpPr>
+          <p:cNvPr id="40" name="ZoneTexte 39">
+            <a:extLst>
+              <a:ext uri="{FF2B5EF4-FFF2-40B4-BE49-F238E27FC236}">
+                <a16:creationId xmlns:a16="http://schemas.microsoft.com/office/drawing/2014/main" id="{5699B919-7888-46BA-0355-09571B76E25B}"/>
+              </a:ext>
+            </a:extLst>
+          </p:cNvPr>
+          <p:cNvSpPr txBox="1"/>
+          <p:nvPr/>
+        </p:nvSpPr>
+        <p:spPr>
+          <a:xfrm>
+            <a:off x="9339250" y="2944403"/>
+            <a:ext cx="986872" cy="600164"/>
+          </a:xfrm>
+          <a:prstGeom prst="rect">
+            <a:avLst/>
+          </a:prstGeom>
+          <a:noFill/>
+        </p:spPr>
+        <p:txBody>
+          <a:bodyPr wrap="square" rtlCol="0">
+            <a:spAutoFit/>
+          </a:bodyPr>
+          <a:lstStyle/>
+          <a:p>
+            <a:r>
+              <a:rPr lang="fr-FR" sz="1100" i="1" dirty="0"/>
+              <a:t>Collecte de données .</a:t>
+            </a:r>
+            <a:r>
+              <a:rPr lang="fr-FR" sz="1100" i="1" dirty="0" err="1"/>
+              <a:t>json</a:t>
+            </a:r>
+            <a:endParaRPr lang="fr-FR" sz="1100" i="1" dirty="0"/>
+          </a:p>
+        </p:txBody>
+      </p:sp>
     </p:spTree>
     <p:extLst>
       <p:ext uri="{BB962C8B-B14F-4D97-AF65-F5344CB8AC3E}">
@@ -25107,7 +28574,7 @@
             <a:pPr rtl="0"/>
             <a:fld id="{22897033-9A55-4DAC-991D-1FF1921C78B7}" type="datetime1">
               <a:rPr lang="fr-FR" smtClean="0"/>
-              <a:t>21/08/2026</a:t>
+              <a:t>25/08/2026</a:t>
             </a:fld>
             <a:endParaRPr lang="en-US" dirty="0"/>
           </a:p>
@@ -25717,7 +29184,7 @@
             <a:pPr rtl="0"/>
             <a:fld id="{22897033-9A55-4DAC-991D-1FF1921C78B7}" type="datetime1">
               <a:rPr lang="fr-FR" smtClean="0"/>
-              <a:t>21/08/2026</a:t>
+              <a:t>25/08/2026</a:t>
             </a:fld>
             <a:endParaRPr lang="en-US" dirty="0"/>
           </a:p>
@@ -26355,7 +29822,7 @@
             <a:pPr rtl="0"/>
             <a:fld id="{22897033-9A55-4DAC-991D-1FF1921C78B7}" type="datetime1">
               <a:rPr lang="fr-FR" smtClean="0"/>
-              <a:t>21/08/2026</a:t>
+              <a:t>25/08/2026</a:t>
             </a:fld>
             <a:endParaRPr lang="en-US" dirty="0"/>
           </a:p>
